--- a/slides/thursday_app.pptx
+++ b/slides/thursday_app.pptx
@@ -26,6 +26,7 @@
     <p:sldId id="274" r:id="rId26"/>
     <p:sldId id="275" r:id="rId27"/>
     <p:sldId id="276" r:id="rId28"/>
+    <p:sldId id="277" r:id="rId29"/>
   </p:sldIdLst>
   <p:sldSz cx="12191695" cy="6858000" type="screen4x3"/>
   <p:notesSz cx="6858000" cy="9144000"/>
@@ -592,7 +593,7 @@
           <a:lstStyle/>
           <a:p>
             <a:r>
-              <a:t>Say: Eight posts, randomly sampled from the paper’s own data. Read the question first, then the answer.</a:t>
+              <a:t>Say: Eight posts, drawn at random from short, answered posts that the paper credits to its top-5 commands. Read the question first, then the answer.</a:t>
             </a:r>
           </a:p>
         </p:txBody>
@@ -662,7 +663,7 @@
           <a:lstStyle/>
           <a:p>
             <a:r>
-              <a:t>Say: Sarah: have they operationalized their measure well? The post with 2.4 million views counts for git reflog only because of its answer.</a:t>
+              <a:t>Say: The 9.1M-view question is “How do I undo the most recent local commits in Git?”. Dropping each command’s top two posts, revert, stash, clean and reset stay in the top 5 and reflog falls to #7 (our re-run): undo questions really are heavily viewed; reflog’s place rests on one post. Sarah: have they operationalized their measure well?</a:t>
             </a:r>
           </a:p>
           <a:p/>
@@ -674,7 +675,13 @@
           <a:p/>
           <a:p>
             <a:r>
-              <a:t>Hope to hear: They measured “this command appears near a question”. Often it is the fix, not the problem.</a:t>
+              <a:t>Hope to hear: They measured “this command appears near a question”. That mixes three things your labels separate.</a:t>
+            </a:r>
+          </a:p>
+          <a:p/>
+          <a:p>
+            <a:r>
+              <a:t>On screen in the app, not on this slide: Our re-run: one question with 9.1 million views names no command and counts for five. Without it, git reflog falls from #2 to #8.</a:t>
             </a:r>
           </a:p>
         </p:txBody>
@@ -744,19 +751,7 @@
           <a:lstStyle/>
           <a:p>
             <a:r>
-              <a:t>Say: Views are heavy-tailed: the median post of each of these commands has about 250 to 360 views (our re-run). Dropping each command’s single top post keeps all five in the top 5: undo questions really are the most viewed.</a:t>
-            </a:r>
-          </a:p>
-          <a:p/>
-          <a:p>
-            <a:r>
-              <a:t>Ask: Do you believe their answer to RQ3?</a:t>
-            </a:r>
-          </a:p>
-          <a:p/>
-          <a:p>
-            <a:r>
-              <a:t>Hope to hear: Partly. The most-viewed questions are about undo, even when the asker names the command. The typical undo question is not unusually viewed, and which command gets the credit depends on the rule.</a:t>
+              <a:t>Say: This is qualitative coding: the step the paper does not describe. Work alone, quickly.</a:t>
             </a:r>
           </a:p>
         </p:txBody>
@@ -826,7 +821,19 @@
           <a:lstStyle/>
           <a:p>
             <a:r>
-              <a:t>Say: Groups form when you press Next.</a:t>
+              <a:t>Say: Sarah: vibes are not an answer. Did they say what approach they used? Read out the comment you disagreed on most.</a:t>
+            </a:r>
+          </a:p>
+          <a:p/>
+          <a:p>
+            <a:r>
+              <a:t>Ask: What would make Table 8 trustworthy?</a:t>
+            </a:r>
+          </a:p>
+          <a:p/>
+          <a:p>
+            <a:r>
+              <a:t>Hope to hear: A named method (for example thematic analysis), a codebook, two independent coders and their agreement.</a:t>
             </a:r>
           </a:p>
         </p:txBody>
@@ -896,33 +903,7 @@
           <a:lstStyle/>
           <a:p>
             <a:r>
-              <a:t>Say: One claim per group. The paper is open on your laptops; the hint points to the section.</a:t>
-            </a:r>
-          </a:p>
-          <a:p/>
-          <a:p>
-            <a:r>
-              <a:t>The hint each group sees:</a:t>
-            </a:r>
-          </a:p>
-          <a:p>
-            <a:r>
-              <a:t>- "This suggests that even developers with years of development experience can have trouble using Git commands." Look at: How did they measure experience? (§2.1 Step 4; §5)</a:t>
-            </a:r>
-          </a:p>
-          <a:p>
-            <a:r>
-              <a:t>- "…for the more frequently-used commands, git credential and git submodule are among the most difficult ones." Look at: How does a post get counted for a command? Our re-run: 36.5% of all 80,370 Git questions have no accepted answer.</a:t>
-            </a:r>
-          </a:p>
-          <a:p>
-            <a:r>
-              <a:t>- "Self-learning is the primary learning approach." Look at: Who was invited, and how? (§2.2, Table 7)</a:t>
-            </a:r>
-          </a:p>
-          <a:p>
-            <a:r>
-              <a:t>- "the number of questions related to Git commands has been growing steadily" Look at: Fig. 2(a), Table 1 and §3.1.</a:t>
+              <a:t>Say: Before you press Next: everyone opens the /thu tab again, and “here” on your console matches the room. Groups form when you press Next.</a:t>
             </a:r>
           </a:p>
         </p:txBody>
@@ -992,45 +973,33 @@
           <a:lstStyle/>
           <a:p>
             <a:r>
-              <a:t>Say: Read each group’s sentence, then the model answer under it.</a:t>
+              <a:t>Say: One claim per group. The paper is open on your laptops; the hint points to the section.</a:t>
             </a:r>
           </a:p>
           <a:p/>
           <a:p>
             <a:r>
-              <a:t>Ask: Which claim survives best?</a:t>
-            </a:r>
-          </a:p>
-          <a:p/>
-          <a:p>
-            <a:r>
-              <a:t>Hope to hear: None, as written. Each shrinks to what was measured. Nobody was watched using Git.</a:t>
-            </a:r>
-          </a:p>
-          <a:p/>
-          <a:p>
-            <a:r>
-              <a:t>Each claim: what they measured, and why it shrinks.</a:t>
-            </a:r>
-          </a:p>
-          <a:p>
-            <a:r>
-              <a:t>- "This suggests that even developers with years of development experience can have trouble using Git commands." Measured: Years since the asker registered on Stack Overflow. Registration age is time on Stack Overflow, not experience with Git; §5 calls it a proxy. Experienced programmers can be new to Git: Paper 1 describes Microsoft teams switching from Source Depot and Team Foundation Server, for whom Git is "a small revolution". The data cannot tell "Git stays hard for experienced Git users" from "experienced programmers are new to Git".</a:t>
-            </a:r>
-          </a:p>
-          <a:p>
-            <a:r>
-              <a:t>- "…for the more frequently-used commands, git credential and git submodule are among the most difficult ones." Measured: The share of a command’s questions where the asker never marked an answer as accepted. An accepted answer is one click by the asker, and §5 notes askers may forget it. A post counted through its accepted answer has one by construction, so commands that appear in fixes look easy: git reflog lacks one in 20.7% of its posts, but in 46.3% of the posts whose asker names it (our re-run).</a:t>
-            </a:r>
-          </a:p>
-          <a:p>
-            <a:r>
-              <a:t>- "Self-learning is the primary learning approach." Measured: What 92 of 508 invited people ticked. The practitioners invited had recently asked a Git question on Stack Overflow. The paper reports both 81.7% of 197 ticks and 85 of 92 people. Either way, the respondents were found through Stack Overflow, so they use the internet by construction, and “how I learned” is a memory.</a:t>
-            </a:r>
-          </a:p>
-          <a:p>
-            <a:r>
-              <a:t>- "the number of questions related to Git commands has been growing steadily" Measured: Git questions per year (Fig. 2a), and their share of all Stack Overflow questions (Table 1). §3.1 itself says the number "dropped a bit from 2017", and the RQ1 answer says "relatively stable". The conclusion and the paper’s own data disagree.</a:t>
+              <a:t>The hint each group sees:</a:t>
+            </a:r>
+          </a:p>
+          <a:p>
+            <a:r>
+              <a:t>- "This suggests that even developers with years of development experience can have trouble using Git commands." Look at: How did they measure experience? (§2.1 Step 4; §5)</a:t>
+            </a:r>
+          </a:p>
+          <a:p>
+            <a:r>
+              <a:t>- "…for the more frequently-used commands, git credential and git submodule are among the most difficult ones." Look at: How does a post get counted for a command? Our re-run: 36.5% of all 80,370 Git questions have no accepted answer.</a:t>
+            </a:r>
+          </a:p>
+          <a:p>
+            <a:r>
+              <a:t>- "Self-learning is the primary learning approach." Look at: Who was invited, and how? (§2.2, Table 7)</a:t>
+            </a:r>
+          </a:p>
+          <a:p>
+            <a:r>
+              <a:t>- "This result, although surprising, is consistent with the conclusion we obtained in RQ2, indicating that even experienced developers still have doubts about Git usage." Look at: What is the evidence for “doubts”? (§3.5, Fig. 4)</a:t>
             </a:r>
           </a:p>
         </p:txBody>
@@ -1100,19 +1069,19 @@
           <a:lstStyle/>
           <a:p>
             <a:r>
-              <a:t>Say: Read each group’s sentence, then the model answer under it.</a:t>
+              <a:t>Say: Read each group’s sentence, then the model answer under it. Students see the reasons on their laptops.</a:t>
             </a:r>
           </a:p>
           <a:p/>
           <a:p>
             <a:r>
-              <a:t>Ask: Which claim survives best?</a:t>
+              <a:t>Ask: Which claim survives best, and why?</a:t>
             </a:r>
           </a:p>
           <a:p/>
           <a:p>
             <a:r>
-              <a:t>Hope to hear: None, as written. Each shrinks to what was measured. Nobody was watched using Git.</a:t>
+              <a:t>Hope to hear: The experience claim survives as written, because it is weak. The other three shrink to what was measured.</a:t>
             </a:r>
           </a:p>
           <a:p/>
@@ -1123,7 +1092,7 @@
           </a:p>
           <a:p>
             <a:r>
-              <a:t>- "This suggests that even developers with years of development experience can have trouble using Git commands." Measured: Years since the asker registered on Stack Overflow. Registration age is time on Stack Overflow, not experience with Git; §5 calls it a proxy. Experienced programmers can be new to Git: Paper 1 describes Microsoft teams switching from Source Depot and Team Foundation Server, for whom Git is "a small revolution". The data cannot tell "Git stays hard for experienced Git users" from "experienced programmers are new to Git".</a:t>
+              <a:t>- "This suggests that even developers with years of development experience can have trouble using Git commands." Measured: Years since the asker registered on Stack Overflow (§5 calls it a proxy), and two quoted askers ([37], [41]). It survives because “can have trouble” is a weak claim. It cannot say how common trouble is, or separate Git experience from programming experience: experienced programmers can be new to Git, as in Paper 1’s Microsoft teams switching from Source Depot and Team Foundation Server.</a:t>
             </a:r>
           </a:p>
           <a:p>
@@ -1133,12 +1102,12 @@
           </a:p>
           <a:p>
             <a:r>
-              <a:t>- "Self-learning is the primary learning approach." Measured: What 92 of 508 invited people ticked. The practitioners invited had recently asked a Git question on Stack Overflow. The paper reports both 81.7% of 197 ticks and 85 of 92 people. Either way, the respondents were found through Stack Overflow, so they use the internet by construction, and “how I learned” is a memory.</a:t>
-            </a:r>
-          </a:p>
-          <a:p>
-            <a:r>
-              <a:t>- "the number of questions related to Git commands has been growing steadily" Measured: Git questions per year (Fig. 2a), and their share of all Stack Overflow questions (Table 1). §3.1 itself says the number "dropped a bit from 2017", and the RQ1 answer says "relatively stable". The conclusion and the paper’s own data disagree.</a:t>
+              <a:t>- "Self-learning is the primary learning approach." Measured: What 92 of 508 invited people ticked. The practitioners invited had recently asked a Git question on Stack Overflow. Most respondents were found through Stack Overflow, which favours internet learners, although all 18 academics ticked the internet too. And “how I learned” is a memory, shaped by the options offered.</a:t>
+            </a:r>
+          </a:p>
+          <a:p>
+            <a:r>
+              <a:t>- "This result, although surprising, is consistent with the conclusion we obtained in RQ2, indicating that even experienced developers still have doubts about Git usage." Measured: A self-rated level on a five-step scale, novice to expert, from 92 respondents. A self-rating is a judgment: modesty, the labels offered and what “expert” means all move it. It measures neither doubts nor skill. Sarah: be nervous about Likert scales and introspection.</a:t>
             </a:r>
           </a:p>
         </p:txBody>
@@ -1208,7 +1177,45 @@
           <a:lstStyle/>
           <a:p>
             <a:r>
-              <a:t>Say: Sarah’s evaluative shape: does ⟨tool⟩ increase or decrease ⟨measure⟩ for ⟨audience⟩ doing ⟨task⟩? Then: how would you collect the data?</a:t>
+              <a:t>Say: Read each group’s sentence, then the model answer under it. Students see the reasons on their laptops.</a:t>
+            </a:r>
+          </a:p>
+          <a:p/>
+          <a:p>
+            <a:r>
+              <a:t>Ask: Which claim survives best, and why?</a:t>
+            </a:r>
+          </a:p>
+          <a:p/>
+          <a:p>
+            <a:r>
+              <a:t>Hope to hear: The experience claim survives as written, because it is weak. The other three shrink to what was measured.</a:t>
+            </a:r>
+          </a:p>
+          <a:p/>
+          <a:p>
+            <a:r>
+              <a:t>Each claim: what they measured, and why it shrinks.</a:t>
+            </a:r>
+          </a:p>
+          <a:p>
+            <a:r>
+              <a:t>- "This suggests that even developers with years of development experience can have trouble using Git commands." Measured: Years since the asker registered on Stack Overflow (§5 calls it a proxy), and two quoted askers ([37], [41]). It survives because “can have trouble” is a weak claim. It cannot say how common trouble is, or separate Git experience from programming experience: experienced programmers can be new to Git, as in Paper 1’s Microsoft teams switching from Source Depot and Team Foundation Server.</a:t>
+            </a:r>
+          </a:p>
+          <a:p>
+            <a:r>
+              <a:t>- "…for the more frequently-used commands, git credential and git submodule are among the most difficult ones." Measured: The share of a command’s questions where the asker never marked an answer as accepted. An accepted answer is one click by the asker, and §5 notes askers may forget it. A post counted through its accepted answer has one by construction, so commands that appear in fixes look easy: git reflog lacks one in 20.7% of its posts, but in 46.3% of the posts whose asker names it (our re-run).</a:t>
+            </a:r>
+          </a:p>
+          <a:p>
+            <a:r>
+              <a:t>- "Self-learning is the primary learning approach." Measured: What 92 of 508 invited people ticked. The practitioners invited had recently asked a Git question on Stack Overflow. Most respondents were found through Stack Overflow, which favours internet learners, although all 18 academics ticked the internet too. And “how I learned” is a memory, shaped by the options offered.</a:t>
+            </a:r>
+          </a:p>
+          <a:p>
+            <a:r>
+              <a:t>- "This result, although surprising, is consistent with the conclusion we obtained in RQ2, indicating that even experienced developers still have doubts about Git usage." Measured: A self-rated level on a five-step scale, novice to expert, from 92 respondents. A self-rating is a judgment: modesty, the labels offered and what “expert” means all move it. It measures neither doubts nor skill. Sarah: be nervous about Likert scales and introspection.</a:t>
             </a:r>
           </a:p>
         </p:txBody>
@@ -1278,19 +1285,7 @@
           <a:lstStyle/>
           <a:p>
             <a:r>
-              <a:t>Say: One group at a time: the change, the study, the data. Push on the data: watch, trace, or ask?</a:t>
-            </a:r>
-          </a:p>
-          <a:p/>
-          <a:p>
-            <a:r>
-              <a:t>Ask: Which of these could you test by watching people?</a:t>
-            </a:r>
-          </a:p>
-          <a:p/>
-          <a:p>
-            <a:r>
-              <a:t>Hope to hear: The ones with a measure you can see: time to recover, recoveries that succeed.</a:t>
+              <a:t>Say: Asking data is fine for finding a need; whether a fix works needs an evaluative study. Sarah’s shape: does ⟨tool⟩ increase or decrease ⟨measure⟩ for ⟨audience⟩ doing ⟨task⟩? Tuesday’s Safety diary was the reflog on screen.</a:t>
             </a:r>
           </a:p>
         </p:txBody>
@@ -1360,19 +1355,19 @@
           <a:lstStyle/>
           <a:p>
             <a:r>
-              <a:t>Say: A new command makes new questions. Whether it helped is an evaluative question, and nobody answers it by counting posts.</a:t>
+              <a:t>Say: One group at a time: the change, the study, the measure, the data.</a:t>
             </a:r>
           </a:p>
           <a:p/>
           <a:p>
             <a:r>
-              <a:t>Ask: Which data would convince Git’s maintainers your change works?</a:t>
+              <a:t>Ask: Which of these could you test by watching people? Which threat is hardest?</a:t>
             </a:r>
           </a:p>
           <a:p/>
           <a:p>
             <a:r>
-              <a:t>Hope to hear: Observation or traces of real use: time to recover, recoveries that succeed. Not a survey.</a:t>
+              <a:t>Hope to hear: The ones with a measure you can see: time to recover, recoveries that succeed. A learning effect, if the same people try both versions.</a:t>
             </a:r>
           </a:p>
         </p:txBody>
@@ -1512,7 +1507,19 @@
           <a:lstStyle/>
           <a:p>
             <a:r>
-              <a:t>Say: Sarah’s bar: nobody leaves without a new insight about designing tools for humans.</a:t>
+              <a:t>Say: A new command makes new questions. Whether it helped is an evaluative question, and nobody answers it by counting posts.</a:t>
+            </a:r>
+          </a:p>
+          <a:p/>
+          <a:p>
+            <a:r>
+              <a:t>Ask: Which data would convince Git’s maintainers your change works?</a:t>
+            </a:r>
+          </a:p>
+          <a:p/>
+          <a:p>
+            <a:r>
+              <a:t>Hope to hear: Observation or traces of real use: time to recover, recoveries that succeed. Not a survey.</a:t>
             </a:r>
           </a:p>
         </p:txBody>
@@ -1582,7 +1589,77 @@
           <a:lstStyle/>
           <a:p>
             <a:r>
-              <a:t>Say: Thank you. Export the answers from Details.</a:t>
+              <a:t>Say: Sarah’s bar: nobody leaves without a new insight about designing tools for humans.</a:t>
+            </a:r>
+          </a:p>
+        </p:txBody>
+      </p:sp>
+      <p:sp>
+        <p:nvSpPr>
+          <p:cNvPr id="4" name="Slide Number Placeholder 3"/>
+          <p:cNvSpPr>
+            <a:spLocks noGrp="1"/>
+          </p:cNvSpPr>
+          <p:nvPr>
+            <p:ph type="sldNum" idx="5" sz="quarter"/>
+          </p:nvPr>
+        </p:nvSpPr>
+        <p:spPr/>
+      </p:sp>
+    </p:spTree>
+  </p:cSld>
+  <p:clrMapOvr>
+    <a:masterClrMapping/>
+  </p:clrMapOvr>
+</p:notes>
+</file>
+
+<file path=ppt/notesSlides/notesSlide22.xml><?xml version="1.0" encoding="utf-8"?>
+<p:notes xmlns:a="http://schemas.openxmlformats.org/drawingml/2006/main" xmlns:p="http://schemas.openxmlformats.org/presentationml/2006/main" xmlns:r="http://schemas.openxmlformats.org/officeDocument/2006/relationships">
+  <p:cSld>
+    <p:spTree>
+      <p:nvGrpSpPr>
+        <p:cNvPr id="1" name=""/>
+        <p:cNvGrpSpPr/>
+        <p:nvPr/>
+      </p:nvGrpSpPr>
+      <p:grpSpPr>
+        <a:xfrm>
+          <a:off x="0" y="0"/>
+          <a:ext cx="0" cy="0"/>
+          <a:chOff x="0" y="0"/>
+          <a:chExt cx="0" cy="0"/>
+        </a:xfrm>
+      </p:grpSpPr>
+      <p:sp>
+        <p:nvSpPr>
+          <p:cNvPr id="2" name="Slide Image Placeholder 1"/>
+          <p:cNvSpPr>
+            <a:spLocks noGrp="1"/>
+          </p:cNvSpPr>
+          <p:nvPr>
+            <p:ph type="sldImg" idx="2"/>
+          </p:nvPr>
+        </p:nvSpPr>
+        <p:spPr/>
+      </p:sp>
+      <p:sp>
+        <p:nvSpPr>
+          <p:cNvPr id="3" name="Notes Placeholder 2"/>
+          <p:cNvSpPr>
+            <a:spLocks noGrp="1"/>
+          </p:cNvSpPr>
+          <p:nvPr>
+            <p:ph type="body" idx="3" sz="quarter"/>
+          </p:nvPr>
+        </p:nvSpPr>
+        <p:spPr/>
+        <p:txBody>
+          <a:bodyPr/>
+          <a:lstStyle/>
+          <a:p>
+            <a:r>
+              <a:t>Say: Thank you. Export the answers from Details, then Reset.</a:t>
             </a:r>
           </a:p>
         </p:txBody>
@@ -1792,7 +1869,7 @@
           <a:lstStyle/>
           <a:p>
             <a:r>
-              <a:t>Say: Vote on your laptop. Sarah’s three kinds.</a:t>
+              <a:t>Say: Vote on your laptop. Sarah’s three kinds of study.</a:t>
             </a:r>
           </a:p>
         </p:txBody>
@@ -1874,7 +1951,7 @@
           <a:p/>
           <a:p>
             <a:r>
-              <a:t>Hope to hear: Yes. Three of Stack Overflow’s five most-voted questions were about Git commands when the paper was written.</a:t>
+              <a:t>Hope to hear: Yes, if it tells tool designers which needs to design for. A ranking of command names alone does not.</a:t>
             </a:r>
           </a:p>
         </p:txBody>
@@ -1944,7 +2021,7 @@
           <a:lstStyle/>
           <a:p>
             <a:r>
-              <a:t>Say: Sarah’s ladder: watching beats traces, traces beat asking.</a:t>
+              <a:t>Say: Vote on your laptop.</a:t>
             </a:r>
           </a:p>
         </p:txBody>
@@ -2014,7 +2091,7 @@
           <a:lstStyle/>
           <a:p>
             <a:r>
-              <a:t>Say: Recruiting note (footnote 7): the authors found emails through GitHub accounts, say they were unaware that GitHub’s policy discourages emailing users this way, and recommend others not follow the practice.</a:t>
+              <a:t>Say: Accept “self-report” as a good argument: say why it is still a trace. Recruiting note (footnote 7): the authors found emails through GitHub accounts, say they were unaware that GitHub’s policy discourages emailing users this way, and recommend others not follow the practice.</a:t>
             </a:r>
           </a:p>
           <a:p/>
@@ -2096,19 +2173,19 @@
           <a:lstStyle/>
           <a:p>
             <a:r>
-              <a:t>Say: Sarah: we could learn false things. Questions shape responses, and people have no durable, reliable memory of facts. “How I learned Git” is one of those memories.</a:t>
+              <a:t>Say: Sarah: we could learn false things. Questions shape responses, and people have no durable, reliable memory of facts. Be nervous about Likert-style self-ratings.</a:t>
             </a:r>
           </a:p>
           <a:p/>
           <a:p>
             <a:r>
-              <a:t>Ask: Which of these numbers would you trust? Did Tuesday change your answer?</a:t>
+              <a:t>Ask: Your level, and how you learned: which would you trust?</a:t>
             </a:r>
           </a:p>
           <a:p/>
           <a:p>
             <a:r>
-              <a:t>Hope to hear: People found through Stack Overflow say they learn from the internet: the sample decides the answer. “How I learned” is a memory, and the options shape it.</a:t>
+              <a:t>Hope to hear: Neither fully. A level is a self-rated judgment on a scale; “how I learned” is a memory shaped by the options. And most of the 92 were found through Stack Overflow, which favours internet learners.</a:t>
             </a:r>
           </a:p>
         </p:txBody>
@@ -5257,7 +5334,7 @@
                 </a:solidFill>
                 <a:latin typeface="Inter"/>
               </a:rPr>
-              <a:t>CS294 Modern Programming Tools · Thursday · 80 minutes (78 + 2 of buffer)</a:t>
+              <a:t>CS294 Modern Programming Tools · Thursday · 80 minutes (74 + 6 of buffer)</a:t>
             </a:r>
           </a:p>
         </p:txBody>
@@ -5361,7 +5438,7 @@
                 </a:solidFill>
                 <a:latin typeface="Inter"/>
               </a:rPr>
-              <a:t>9 min</a:t>
+              <a:t>8 min</a:t>
             </a:r>
           </a:p>
         </p:txBody>
@@ -5415,7 +5492,7 @@
         <p:spPr>
           <a:xfrm>
             <a:off x="822960" y="1831441"/>
-            <a:ext cx="8647535" cy="1262927"/>
+            <a:ext cx="8647535" cy="1641570"/>
           </a:xfrm>
           <a:prstGeom prst="rect">
             <a:avLst/>
@@ -5478,21 +5555,90 @@
                 </a:solidFill>
                 <a:latin typeface="Inter"/>
               </a:rPr>
-              <a:t>For each post: is it really a question about that command?</a:t>
-            </a:r>
-          </a:p>
-        </p:txBody>
-      </p:sp>
-      <p:sp>
-        <p:nvSpPr>
-          <p:cNvPr id="6" name="TextBox 5"/>
-          <p:cNvSpPr txBox="1"/>
-          <p:nvPr/>
-        </p:nvSpPr>
-        <p:spPr>
-          <a:xfrm>
-            <a:off x="822960" y="3322968"/>
-            <a:ext cx="8647535" cy="1315394"/>
+              <a:t>For each post: is the asker stuck on that command, do they need it without knowing its name, or is it not about it?</a:t>
+            </a:r>
+          </a:p>
+        </p:txBody>
+      </p:sp>
+      <p:sp>
+        <p:nvSpPr>
+          <p:cNvPr id="6" name="Rounded Rectangle 5"/>
+          <p:cNvSpPr/>
+          <p:nvPr/>
+        </p:nvSpPr>
+        <p:spPr>
+          <a:xfrm>
+            <a:off x="822960" y="3701611"/>
+            <a:ext cx="3393338" cy="1021405"/>
+          </a:xfrm>
+          <a:prstGeom prst="roundRect">
+            <a:avLst>
+              <a:gd name="adj" fmla="val 6000"/>
+            </a:avLst>
+          </a:prstGeom>
+          <a:solidFill>
+            <a:srgbClr val="FFFFFF"/>
+          </a:solidFill>
+          <a:ln w="19050">
+            <a:solidFill>
+              <a:srgbClr val="D9D9DE"/>
+            </a:solidFill>
+          </a:ln>
+          <a:effectLst/>
+        </p:spPr>
+        <p:txBody>
+          <a:bodyPr rtlCol="0" anchor="ctr"/>
+          <a:lstStyle/>
+          <a:p/>
+        </p:txBody>
+      </p:sp>
+      <p:sp>
+        <p:nvSpPr>
+          <p:cNvPr id="7" name="TextBox 6"/>
+          <p:cNvSpPr txBox="1"/>
+          <p:nvPr/>
+        </p:nvSpPr>
+        <p:spPr>
+          <a:xfrm>
+            <a:off x="1005840" y="3838771"/>
+            <a:ext cx="3027578" cy="201168"/>
+          </a:xfrm>
+          <a:prstGeom prst="rect">
+            <a:avLst/>
+          </a:prstGeom>
+          <a:noFill/>
+        </p:spPr>
+        <p:txBody>
+          <a:bodyPr wrap="square" anchor="t" lIns="0" rIns="0" tIns="0" bIns="0"/>
+          <a:lstStyle/>
+          <a:p>
+            <a:pPr algn="l">
+              <a:lnSpc>
+                <a:spcPct val="110000"/>
+              </a:lnSpc>
+            </a:pPr>
+            <a:r>
+              <a:rPr sz="1100" b="1">
+                <a:solidFill>
+                  <a:srgbClr val="707078"/>
+                </a:solidFill>
+                <a:latin typeface="Inter"/>
+              </a:rPr>
+              <a:t>STUCK ON IT</a:t>
+            </a:r>
+          </a:p>
+        </p:txBody>
+      </p:sp>
+      <p:sp>
+        <p:nvSpPr>
+          <p:cNvPr id="8" name="TextBox 7"/>
+          <p:cNvSpPr txBox="1"/>
+          <p:nvPr/>
+        </p:nvSpPr>
+        <p:spPr>
+          <a:xfrm>
+            <a:off x="1005840" y="4058227"/>
+            <a:ext cx="3027578" cy="240954"/>
           </a:xfrm>
           <a:prstGeom prst="rect">
             <a:avLst/>
@@ -5512,12 +5658,270 @@
               </a:spcBef>
             </a:pPr>
             <a:r>
-              <a:rPr sz="1800" b="0" i="0">
+              <a:rPr sz="1400" b="0" i="0">
+                <a:solidFill>
+                  <a:srgbClr val="111111"/>
+                </a:solidFill>
+                <a:latin typeface="Inter"/>
+              </a:rPr>
+              <a:t>They ask about this command.</a:t>
+            </a:r>
+          </a:p>
+        </p:txBody>
+      </p:sp>
+      <p:sp>
+        <p:nvSpPr>
+          <p:cNvPr id="9" name="Rounded Rectangle 8"/>
+          <p:cNvSpPr/>
+          <p:nvPr/>
+        </p:nvSpPr>
+        <p:spPr>
+          <a:xfrm>
+            <a:off x="4399178" y="3701611"/>
+            <a:ext cx="3393338" cy="1021405"/>
+          </a:xfrm>
+          <a:prstGeom prst="roundRect">
+            <a:avLst>
+              <a:gd name="adj" fmla="val 6000"/>
+            </a:avLst>
+          </a:prstGeom>
+          <a:solidFill>
+            <a:srgbClr val="FFFFFF"/>
+          </a:solidFill>
+          <a:ln w="19050">
+            <a:solidFill>
+              <a:srgbClr val="D9D9DE"/>
+            </a:solidFill>
+          </a:ln>
+          <a:effectLst/>
+        </p:spPr>
+        <p:txBody>
+          <a:bodyPr rtlCol="0" anchor="ctr"/>
+          <a:lstStyle/>
+          <a:p/>
+        </p:txBody>
+      </p:sp>
+      <p:sp>
+        <p:nvSpPr>
+          <p:cNvPr id="10" name="TextBox 9"/>
+          <p:cNvSpPr txBox="1"/>
+          <p:nvPr/>
+        </p:nvSpPr>
+        <p:spPr>
+          <a:xfrm>
+            <a:off x="4582058" y="3838771"/>
+            <a:ext cx="3027578" cy="201168"/>
+          </a:xfrm>
+          <a:prstGeom prst="rect">
+            <a:avLst/>
+          </a:prstGeom>
+          <a:noFill/>
+        </p:spPr>
+        <p:txBody>
+          <a:bodyPr wrap="square" anchor="t" lIns="0" rIns="0" tIns="0" bIns="0"/>
+          <a:lstStyle/>
+          <a:p>
+            <a:pPr algn="l">
+              <a:lnSpc>
+                <a:spcPct val="110000"/>
+              </a:lnSpc>
+            </a:pPr>
+            <a:r>
+              <a:rPr sz="1100" b="1">
                 <a:solidFill>
                   <a:srgbClr val="707078"/>
                 </a:solidFill>
                 <a:latin typeface="Inter"/>
               </a:rPr>
+              <a:t>NEEDS IT, CAN’T NAME IT</a:t>
+            </a:r>
+          </a:p>
+        </p:txBody>
+      </p:sp>
+      <p:sp>
+        <p:nvSpPr>
+          <p:cNvPr id="11" name="TextBox 10"/>
+          <p:cNvSpPr txBox="1"/>
+          <p:nvPr/>
+        </p:nvSpPr>
+        <p:spPr>
+          <a:xfrm>
+            <a:off x="4582058" y="4058227"/>
+            <a:ext cx="3027578" cy="481909"/>
+          </a:xfrm>
+          <a:prstGeom prst="rect">
+            <a:avLst/>
+          </a:prstGeom>
+          <a:noFill/>
+        </p:spPr>
+        <p:txBody>
+          <a:bodyPr wrap="square" anchor="t" lIns="0" rIns="0" tIns="0" bIns="0"/>
+          <a:lstStyle/>
+          <a:p>
+            <a:pPr algn="l">
+              <a:lnSpc>
+                <a:spcPct val="112000"/>
+              </a:lnSpc>
+              <a:spcBef>
+                <a:spcPts val="0"/>
+              </a:spcBef>
+            </a:pPr>
+            <a:r>
+              <a:rPr sz="1400" b="0" i="0">
+                <a:solidFill>
+                  <a:srgbClr val="111111"/>
+                </a:solidFill>
+                <a:latin typeface="Inter"/>
+              </a:rPr>
+              <a:t>It would solve their problem; they don’t know it.</a:t>
+            </a:r>
+          </a:p>
+        </p:txBody>
+      </p:sp>
+      <p:sp>
+        <p:nvSpPr>
+          <p:cNvPr id="12" name="Rounded Rectangle 11"/>
+          <p:cNvSpPr/>
+          <p:nvPr/>
+        </p:nvSpPr>
+        <p:spPr>
+          <a:xfrm>
+            <a:off x="7975396" y="3701611"/>
+            <a:ext cx="3393338" cy="1021405"/>
+          </a:xfrm>
+          <a:prstGeom prst="roundRect">
+            <a:avLst>
+              <a:gd name="adj" fmla="val 6000"/>
+            </a:avLst>
+          </a:prstGeom>
+          <a:solidFill>
+            <a:srgbClr val="FFFFFF"/>
+          </a:solidFill>
+          <a:ln w="19050">
+            <a:solidFill>
+              <a:srgbClr val="D9D9DE"/>
+            </a:solidFill>
+          </a:ln>
+          <a:effectLst/>
+        </p:spPr>
+        <p:txBody>
+          <a:bodyPr rtlCol="0" anchor="ctr"/>
+          <a:lstStyle/>
+          <a:p/>
+        </p:txBody>
+      </p:sp>
+      <p:sp>
+        <p:nvSpPr>
+          <p:cNvPr id="13" name="TextBox 12"/>
+          <p:cNvSpPr txBox="1"/>
+          <p:nvPr/>
+        </p:nvSpPr>
+        <p:spPr>
+          <a:xfrm>
+            <a:off x="8158276" y="3838771"/>
+            <a:ext cx="3027578" cy="201168"/>
+          </a:xfrm>
+          <a:prstGeom prst="rect">
+            <a:avLst/>
+          </a:prstGeom>
+          <a:noFill/>
+        </p:spPr>
+        <p:txBody>
+          <a:bodyPr wrap="square" anchor="t" lIns="0" rIns="0" tIns="0" bIns="0"/>
+          <a:lstStyle/>
+          <a:p>
+            <a:pPr algn="l">
+              <a:lnSpc>
+                <a:spcPct val="110000"/>
+              </a:lnSpc>
+            </a:pPr>
+            <a:r>
+              <a:rPr sz="1100" b="1">
+                <a:solidFill>
+                  <a:srgbClr val="707078"/>
+                </a:solidFill>
+                <a:latin typeface="Inter"/>
+              </a:rPr>
+              <a:t>NOT ABOUT IT</a:t>
+            </a:r>
+          </a:p>
+        </p:txBody>
+      </p:sp>
+      <p:sp>
+        <p:nvSpPr>
+          <p:cNvPr id="14" name="TextBox 13"/>
+          <p:cNvSpPr txBox="1"/>
+          <p:nvPr/>
+        </p:nvSpPr>
+        <p:spPr>
+          <a:xfrm>
+            <a:off x="8158276" y="4058227"/>
+            <a:ext cx="3027578" cy="240954"/>
+          </a:xfrm>
+          <a:prstGeom prst="rect">
+            <a:avLst/>
+          </a:prstGeom>
+          <a:noFill/>
+        </p:spPr>
+        <p:txBody>
+          <a:bodyPr wrap="square" anchor="t" lIns="0" rIns="0" tIns="0" bIns="0"/>
+          <a:lstStyle/>
+          <a:p>
+            <a:pPr algn="l">
+              <a:lnSpc>
+                <a:spcPct val="112000"/>
+              </a:lnSpc>
+              <a:spcBef>
+                <a:spcPts val="0"/>
+              </a:spcBef>
+            </a:pPr>
+            <a:r>
+              <a:rPr sz="1400" b="0" i="0">
+                <a:solidFill>
+                  <a:srgbClr val="111111"/>
+                </a:solidFill>
+                <a:latin typeface="Inter"/>
+              </a:rPr>
+              <a:t>It is only mentioned.</a:t>
+            </a:r>
+          </a:p>
+        </p:txBody>
+      </p:sp>
+      <p:sp>
+        <p:nvSpPr>
+          <p:cNvPr id="15" name="TextBox 14"/>
+          <p:cNvSpPr txBox="1"/>
+          <p:nvPr/>
+        </p:nvSpPr>
+        <p:spPr>
+          <a:xfrm>
+            <a:off x="822960" y="4951616"/>
+            <a:ext cx="8647535" cy="1152306"/>
+          </a:xfrm>
+          <a:prstGeom prst="rect">
+            <a:avLst/>
+          </a:prstGeom>
+          <a:noFill/>
+        </p:spPr>
+        <p:txBody>
+          <a:bodyPr wrap="square" anchor="t" lIns="0" rIns="0" tIns="0" bIns="0"/>
+          <a:lstStyle/>
+          <a:p>
+            <a:pPr algn="l">
+              <a:lnSpc>
+                <a:spcPct val="112000"/>
+              </a:lnSpc>
+              <a:spcBef>
+                <a:spcPts val="0"/>
+              </a:spcBef>
+            </a:pPr>
+            <a:r>
+              <a:rPr sz="1600" b="0" i="0">
+                <a:solidFill>
+                  <a:srgbClr val="707078"/>
+                </a:solidFill>
+                <a:latin typeface="Inter"/>
+              </a:rPr>
               <a:t>On your laptop: 8 posts, each with the question, the accepted answer, and the command the paper counted it for.</a:t>
             </a:r>
           </a:p>
@@ -5527,17 +5931,17 @@
                 <a:spcPct val="112000"/>
               </a:lnSpc>
               <a:spcBef>
-                <a:spcPts val="600"/>
-              </a:spcBef>
-            </a:pPr>
-            <a:r>
-              <a:rPr sz="1800" b="0" i="0">
+                <a:spcPts val="400"/>
+              </a:spcBef>
+            </a:pPr>
+            <a:r>
+              <a:rPr sz="1600" b="0" i="0">
                 <a:solidFill>
                   <a:srgbClr val="707078"/>
                 </a:solidFill>
                 <a:latin typeface="Inter"/>
               </a:rPr>
-              <a:t>Randomly sampled from the paper’s own data (analysis/thursday_numbers.py, seed 294).</a:t>
+              <a:t>Drawn at random from short, answered posts credited to the top-5 commands (analysis/thursday_numbers.py, seed 294).</a:t>
             </a:r>
           </a:p>
         </p:txBody>
@@ -5654,7 +6058,7 @@
         <p:spPr>
           <a:xfrm>
             <a:off x="822960" y="1831441"/>
-            <a:ext cx="10545775" cy="1004762"/>
+            <a:ext cx="10545775" cy="901496"/>
           </a:xfrm>
           <a:prstGeom prst="rect">
             <a:avLst/>
@@ -5674,13 +6078,13 @@
               </a:spcBef>
             </a:pPr>
             <a:r>
-              <a:rPr sz="1700" b="0" i="0">
-                <a:solidFill>
-                  <a:srgbClr val="111111"/>
-                </a:solidFill>
-                <a:latin typeface="Inter"/>
-              </a:rPr>
-              <a:t>The rule counts all 8 posts. In 5, the command appears only in the answer.</a:t>
+              <a:rPr sz="1500" b="0" i="0">
+                <a:solidFill>
+                  <a:srgbClr val="111111"/>
+                </a:solidFill>
+                <a:latin typeface="Inter"/>
+              </a:rPr>
+              <a:t>The rule counts all 8 posts the same. In 5, only the accepted answer names the command.</a:t>
             </a:r>
           </a:p>
           <a:p>
@@ -5693,67 +6097,13 @@
               </a:spcBef>
             </a:pPr>
             <a:r>
-              <a:rPr sz="1700" b="0" i="0">
-                <a:solidFill>
-                  <a:srgbClr val="111111"/>
-                </a:solidFill>
-                <a:latin typeface="Inter"/>
-              </a:rPr>
-              <a:t>Our re-run on all 80,370 posts: the command is only in the answer for 55% of </a:t>
-            </a:r>
-            <a:r>
-              <a:rPr sz="1700" b="0" i="0">
-                <a:solidFill>
-                  <a:srgbClr val="111111"/>
-                </a:solidFill>
-                <a:latin typeface="Noto Sans Mono"/>
-              </a:rPr>
-              <a:t>git reflog</a:t>
-            </a:r>
-            <a:r>
-              <a:rPr sz="1700" b="0" i="0">
-                <a:solidFill>
-                  <a:srgbClr val="111111"/>
-                </a:solidFill>
-                <a:latin typeface="Inter"/>
-              </a:rPr>
-              <a:t> posts, 44% of </a:t>
-            </a:r>
-            <a:r>
-              <a:rPr sz="1700" b="0" i="0">
-                <a:solidFill>
-                  <a:srgbClr val="111111"/>
-                </a:solidFill>
-                <a:latin typeface="Noto Sans Mono"/>
-              </a:rPr>
-              <a:t>git revert</a:t>
-            </a:r>
-            <a:r>
-              <a:rPr sz="1700" b="0" i="0">
-                <a:solidFill>
-                  <a:srgbClr val="111111"/>
-                </a:solidFill>
-                <a:latin typeface="Inter"/>
-              </a:rPr>
-              <a:t>, 44% of </a:t>
-            </a:r>
-            <a:r>
-              <a:rPr sz="1700" b="0" i="0">
-                <a:solidFill>
-                  <a:srgbClr val="111111"/>
-                </a:solidFill>
-                <a:latin typeface="Noto Sans Mono"/>
-              </a:rPr>
-              <a:t>git reset</a:t>
-            </a:r>
-            <a:r>
-              <a:rPr sz="1700" b="0" i="0">
-                <a:solidFill>
-                  <a:srgbClr val="111111"/>
-                </a:solidFill>
-                <a:latin typeface="Inter"/>
-              </a:rPr>
-              <a:t>.</a:t>
+              <a:rPr sz="1500" b="0" i="0">
+                <a:solidFill>
+                  <a:srgbClr val="111111"/>
+                </a:solidFill>
+                <a:latin typeface="Inter"/>
+              </a:rPr>
+              <a:t>“Stuck on it” is evidence a command is confusing. “Needs it, can’t name it” supports the paper’s own idea of recommending commands (§4.1).</a:t>
             </a:r>
           </a:p>
         </p:txBody>
@@ -5766,7 +6116,7 @@
         </p:nvSpPr>
         <p:spPr>
           <a:xfrm>
-            <a:off x="868680" y="3019083"/>
+            <a:off x="868680" y="2897529"/>
             <a:ext cx="6613855" cy="206532"/>
           </a:xfrm>
           <a:prstGeom prst="rect">
@@ -5806,7 +6156,7 @@
         </p:nvSpPr>
         <p:spPr>
           <a:xfrm>
-            <a:off x="7573975" y="3019083"/>
+            <a:off x="7573975" y="2897529"/>
             <a:ext cx="1920240" cy="206532"/>
           </a:xfrm>
           <a:prstGeom prst="rect">
@@ -5846,7 +6196,7 @@
         </p:nvSpPr>
         <p:spPr>
           <a:xfrm>
-            <a:off x="9585655" y="3019083"/>
+            <a:off x="9585655" y="2897529"/>
             <a:ext cx="1737360" cy="206532"/>
           </a:xfrm>
           <a:prstGeom prst="rect">
@@ -5886,7 +6236,7 @@
         </p:nvSpPr>
         <p:spPr>
           <a:xfrm>
-            <a:off x="822960" y="3271335"/>
+            <a:off x="822960" y="3149781"/>
             <a:ext cx="10545775" cy="9525"/>
           </a:xfrm>
           <a:prstGeom prst="rect">
@@ -5915,7 +6265,7 @@
         </p:nvSpPr>
         <p:spPr>
           <a:xfrm>
-            <a:off x="868680" y="3317055"/>
+            <a:off x="868680" y="3195501"/>
             <a:ext cx="6613855" cy="206532"/>
           </a:xfrm>
           <a:prstGeom prst="rect">
@@ -5955,7 +6305,7 @@
         </p:nvSpPr>
         <p:spPr>
           <a:xfrm>
-            <a:off x="7573975" y="3317055"/>
+            <a:off x="7573975" y="3195501"/>
             <a:ext cx="1920240" cy="206532"/>
           </a:xfrm>
           <a:prstGeom prst="rect">
@@ -5995,7 +6345,7 @@
         </p:nvSpPr>
         <p:spPr>
           <a:xfrm>
-            <a:off x="9585655" y="3317055"/>
+            <a:off x="9585655" y="3195501"/>
             <a:ext cx="1737360" cy="206532"/>
           </a:xfrm>
           <a:prstGeom prst="rect">
@@ -6035,7 +6385,7 @@
         </p:nvSpPr>
         <p:spPr>
           <a:xfrm>
-            <a:off x="822960" y="3569307"/>
+            <a:off x="822960" y="3447753"/>
             <a:ext cx="10545775" cy="9525"/>
           </a:xfrm>
           <a:prstGeom prst="rect">
@@ -6064,7 +6414,7 @@
         </p:nvSpPr>
         <p:spPr>
           <a:xfrm>
-            <a:off x="868680" y="3615027"/>
+            <a:off x="868680" y="3493473"/>
             <a:ext cx="6613855" cy="206532"/>
           </a:xfrm>
           <a:prstGeom prst="rect">
@@ -6104,7 +6454,7 @@
         </p:nvSpPr>
         <p:spPr>
           <a:xfrm>
-            <a:off x="7573975" y="3615027"/>
+            <a:off x="7573975" y="3493473"/>
             <a:ext cx="1920240" cy="206532"/>
           </a:xfrm>
           <a:prstGeom prst="rect">
@@ -6144,7 +6494,7 @@
         </p:nvSpPr>
         <p:spPr>
           <a:xfrm>
-            <a:off x="9585655" y="3615027"/>
+            <a:off x="9585655" y="3493473"/>
             <a:ext cx="1737360" cy="206532"/>
           </a:xfrm>
           <a:prstGeom prst="rect">
@@ -6184,7 +6534,7 @@
         </p:nvSpPr>
         <p:spPr>
           <a:xfrm>
-            <a:off x="822960" y="3867279"/>
+            <a:off x="822960" y="3745725"/>
             <a:ext cx="10545775" cy="9525"/>
           </a:xfrm>
           <a:prstGeom prst="rect">
@@ -6213,7 +6563,7 @@
         </p:nvSpPr>
         <p:spPr>
           <a:xfrm>
-            <a:off x="868680" y="3912999"/>
+            <a:off x="868680" y="3791445"/>
             <a:ext cx="6613855" cy="206532"/>
           </a:xfrm>
           <a:prstGeom prst="rect">
@@ -6253,7 +6603,7 @@
         </p:nvSpPr>
         <p:spPr>
           <a:xfrm>
-            <a:off x="7573975" y="3912999"/>
+            <a:off x="7573975" y="3791445"/>
             <a:ext cx="1920240" cy="206532"/>
           </a:xfrm>
           <a:prstGeom prst="rect">
@@ -6293,7 +6643,7 @@
         </p:nvSpPr>
         <p:spPr>
           <a:xfrm>
-            <a:off x="9585655" y="3912999"/>
+            <a:off x="9585655" y="3791445"/>
             <a:ext cx="1737360" cy="206532"/>
           </a:xfrm>
           <a:prstGeom prst="rect">
@@ -6333,7 +6683,7 @@
         </p:nvSpPr>
         <p:spPr>
           <a:xfrm>
-            <a:off x="822960" y="4165251"/>
+            <a:off x="822960" y="4043697"/>
             <a:ext cx="10545775" cy="9525"/>
           </a:xfrm>
           <a:prstGeom prst="rect">
@@ -6362,7 +6712,7 @@
         </p:nvSpPr>
         <p:spPr>
           <a:xfrm>
-            <a:off x="868680" y="4210971"/>
+            <a:off x="868680" y="4089417"/>
             <a:ext cx="6613855" cy="206532"/>
           </a:xfrm>
           <a:prstGeom prst="rect">
@@ -6402,7 +6752,7 @@
         </p:nvSpPr>
         <p:spPr>
           <a:xfrm>
-            <a:off x="7573975" y="4210971"/>
+            <a:off x="7573975" y="4089417"/>
             <a:ext cx="1920240" cy="206532"/>
           </a:xfrm>
           <a:prstGeom prst="rect">
@@ -6442,7 +6792,7 @@
         </p:nvSpPr>
         <p:spPr>
           <a:xfrm>
-            <a:off x="9585655" y="4210971"/>
+            <a:off x="9585655" y="4089417"/>
             <a:ext cx="1737360" cy="206532"/>
           </a:xfrm>
           <a:prstGeom prst="rect">
@@ -6482,7 +6832,7 @@
         </p:nvSpPr>
         <p:spPr>
           <a:xfrm>
-            <a:off x="822960" y="4463223"/>
+            <a:off x="822960" y="4341669"/>
             <a:ext cx="10545775" cy="9525"/>
           </a:xfrm>
           <a:prstGeom prst="rect">
@@ -6511,7 +6861,7 @@
         </p:nvSpPr>
         <p:spPr>
           <a:xfrm>
-            <a:off x="868680" y="4508943"/>
+            <a:off x="868680" y="4387389"/>
             <a:ext cx="6613855" cy="206532"/>
           </a:xfrm>
           <a:prstGeom prst="rect">
@@ -6551,7 +6901,7 @@
         </p:nvSpPr>
         <p:spPr>
           <a:xfrm>
-            <a:off x="7573975" y="4508943"/>
+            <a:off x="7573975" y="4387389"/>
             <a:ext cx="1920240" cy="206532"/>
           </a:xfrm>
           <a:prstGeom prst="rect">
@@ -6591,7 +6941,7 @@
         </p:nvSpPr>
         <p:spPr>
           <a:xfrm>
-            <a:off x="9585655" y="4508943"/>
+            <a:off x="9585655" y="4387389"/>
             <a:ext cx="1737360" cy="206532"/>
           </a:xfrm>
           <a:prstGeom prst="rect">
@@ -6631,7 +6981,7 @@
         </p:nvSpPr>
         <p:spPr>
           <a:xfrm>
-            <a:off x="822960" y="4761195"/>
+            <a:off x="822960" y="4639641"/>
             <a:ext cx="10545775" cy="9525"/>
           </a:xfrm>
           <a:prstGeom prst="rect">
@@ -6660,7 +7010,7 @@
         </p:nvSpPr>
         <p:spPr>
           <a:xfrm>
-            <a:off x="868680" y="4806915"/>
+            <a:off x="868680" y="4685361"/>
             <a:ext cx="6613855" cy="206532"/>
           </a:xfrm>
           <a:prstGeom prst="rect">
@@ -6700,7 +7050,7 @@
         </p:nvSpPr>
         <p:spPr>
           <a:xfrm>
-            <a:off x="7573975" y="4806915"/>
+            <a:off x="7573975" y="4685361"/>
             <a:ext cx="1920240" cy="206532"/>
           </a:xfrm>
           <a:prstGeom prst="rect">
@@ -6740,7 +7090,7 @@
         </p:nvSpPr>
         <p:spPr>
           <a:xfrm>
-            <a:off x="9585655" y="4806915"/>
+            <a:off x="9585655" y="4685361"/>
             <a:ext cx="1737360" cy="206532"/>
           </a:xfrm>
           <a:prstGeom prst="rect">
@@ -6780,7 +7130,7 @@
         </p:nvSpPr>
         <p:spPr>
           <a:xfrm>
-            <a:off x="822960" y="5059167"/>
+            <a:off x="822960" y="4937613"/>
             <a:ext cx="10545775" cy="9525"/>
           </a:xfrm>
           <a:prstGeom prst="rect">
@@ -6809,7 +7159,7 @@
         </p:nvSpPr>
         <p:spPr>
           <a:xfrm>
-            <a:off x="868680" y="5104887"/>
+            <a:off x="868680" y="4983333"/>
             <a:ext cx="6613855" cy="206532"/>
           </a:xfrm>
           <a:prstGeom prst="rect">
@@ -6849,7 +7199,7 @@
         </p:nvSpPr>
         <p:spPr>
           <a:xfrm>
-            <a:off x="7573975" y="5104887"/>
+            <a:off x="7573975" y="4983333"/>
             <a:ext cx="1920240" cy="206532"/>
           </a:xfrm>
           <a:prstGeom prst="rect">
@@ -6889,7 +7239,7 @@
         </p:nvSpPr>
         <p:spPr>
           <a:xfrm>
-            <a:off x="9585655" y="5104887"/>
+            <a:off x="9585655" y="4983333"/>
             <a:ext cx="1737360" cy="206532"/>
           </a:xfrm>
           <a:prstGeom prst="rect">
@@ -6929,7 +7279,7 @@
         </p:nvSpPr>
         <p:spPr>
           <a:xfrm>
-            <a:off x="822960" y="5357139"/>
+            <a:off x="822960" y="5235585"/>
             <a:ext cx="10545775" cy="9525"/>
           </a:xfrm>
           <a:prstGeom prst="rect">
@@ -6958,7 +7308,7 @@
         </p:nvSpPr>
         <p:spPr>
           <a:xfrm>
-            <a:off x="868680" y="5402859"/>
+            <a:off x="868680" y="5281305"/>
             <a:ext cx="6613855" cy="206532"/>
           </a:xfrm>
           <a:prstGeom prst="rect">
@@ -6998,7 +7348,7 @@
         </p:nvSpPr>
         <p:spPr>
           <a:xfrm>
-            <a:off x="7573975" y="5402859"/>
+            <a:off x="7573975" y="5281305"/>
             <a:ext cx="1920240" cy="206532"/>
           </a:xfrm>
           <a:prstGeom prst="rect">
@@ -7038,7 +7388,7 @@
         </p:nvSpPr>
         <p:spPr>
           <a:xfrm>
-            <a:off x="9585655" y="5402859"/>
+            <a:off x="9585655" y="5281305"/>
             <a:ext cx="1737360" cy="206532"/>
           </a:xfrm>
           <a:prstGeom prst="rect">
@@ -7124,7 +7474,7 @@
     <p:bg>
       <p:bgPr>
         <a:solidFill>
-          <a:srgbClr val="FFFFFF"/>
+          <a:srgbClr val="F4ECFB"/>
         </a:solidFill>
         <a:effectLst/>
       </p:bgPr>
@@ -7175,292 +7525,55 @@
       </p:sp>
       <p:sp>
         <p:nvSpPr>
-          <p:cNvPr id="3" name="TextBox 2"/>
-          <p:cNvSpPr txBox="1"/>
-          <p:nvPr/>
-        </p:nvSpPr>
-        <p:spPr>
-          <a:xfrm>
-            <a:off x="822960" y="868680"/>
-            <a:ext cx="10545775" cy="688441"/>
-          </a:xfrm>
-          <a:prstGeom prst="rect">
-            <a:avLst/>
-          </a:prstGeom>
-          <a:noFill/>
-        </p:spPr>
-        <p:txBody>
-          <a:bodyPr wrap="square" anchor="t" lIns="0" rIns="0" tIns="0" bIns="0"/>
-          <a:lstStyle/>
-          <a:p>
-            <a:pPr algn="l">
-              <a:lnSpc>
-                <a:spcPct val="112000"/>
-              </a:lnSpc>
-              <a:spcBef>
-                <a:spcPts val="0"/>
-              </a:spcBef>
-            </a:pPr>
-            <a:r>
-              <a:rPr sz="4000" b="1" i="0">
-                <a:solidFill>
-                  <a:srgbClr val="111111"/>
-                </a:solidFill>
-                <a:latin typeface="Inter"/>
-              </a:rPr>
-              <a:t>One question, 9.1 million views</a:t>
-            </a:r>
-          </a:p>
-        </p:txBody>
-      </p:sp>
-      <p:sp>
-        <p:nvSpPr>
-          <p:cNvPr id="4" name="TextBox 3"/>
-          <p:cNvSpPr txBox="1"/>
-          <p:nvPr/>
-        </p:nvSpPr>
-        <p:spPr>
-          <a:xfrm>
-            <a:off x="822960" y="1831441"/>
-            <a:ext cx="10545775" cy="688441"/>
-          </a:xfrm>
-          <a:prstGeom prst="rect">
-            <a:avLst/>
-          </a:prstGeom>
-          <a:noFill/>
-        </p:spPr>
-        <p:txBody>
-          <a:bodyPr wrap="square" anchor="t" lIns="0" rIns="0" tIns="0" bIns="0"/>
-          <a:lstStyle/>
-          <a:p>
-            <a:pPr algn="l">
-              <a:lnSpc>
-                <a:spcPct val="112000"/>
-              </a:lnSpc>
-              <a:spcBef>
-                <a:spcPts val="0"/>
-              </a:spcBef>
-            </a:pPr>
-            <a:r>
-              <a:rPr sz="2000" b="0" i="0">
-                <a:solidFill>
-                  <a:srgbClr val="111111"/>
-                </a:solidFill>
-                <a:latin typeface="Inter"/>
-              </a:rPr>
-              <a:t>“How do I undo the most recent local commits in Git?” names no command. Its accepted answer counts it for five. Without it, </a:t>
-            </a:r>
-            <a:r>
-              <a:rPr sz="2000" b="0" i="0">
-                <a:solidFill>
-                  <a:srgbClr val="111111"/>
-                </a:solidFill>
-                <a:latin typeface="Noto Sans Mono"/>
-              </a:rPr>
-              <a:t>git reflog</a:t>
-            </a:r>
-            <a:r>
-              <a:rPr sz="2000" b="0" i="0">
-                <a:solidFill>
-                  <a:srgbClr val="111111"/>
-                </a:solidFill>
-                <a:latin typeface="Inter"/>
-              </a:rPr>
-              <a:t> falls from #2 to #8.</a:t>
-            </a:r>
-          </a:p>
-        </p:txBody>
-      </p:sp>
-      <p:sp>
-        <p:nvSpPr>
-          <p:cNvPr id="5" name="TextBox 4"/>
-          <p:cNvSpPr txBox="1"/>
-          <p:nvPr/>
-        </p:nvSpPr>
-        <p:spPr>
-          <a:xfrm>
-            <a:off x="914400" y="2839922"/>
-            <a:ext cx="2560320" cy="206532"/>
-          </a:xfrm>
-          <a:prstGeom prst="rect">
-            <a:avLst/>
-          </a:prstGeom>
-          <a:noFill/>
-        </p:spPr>
-        <p:txBody>
-          <a:bodyPr wrap="square" anchor="t" lIns="0" rIns="0" tIns="0" bIns="0"/>
-          <a:lstStyle/>
-          <a:p>
-            <a:pPr algn="l">
-              <a:lnSpc>
-                <a:spcPct val="112000"/>
-              </a:lnSpc>
-              <a:spcBef>
-                <a:spcPts val="0"/>
-              </a:spcBef>
-            </a:pPr>
-          </a:p>
-        </p:txBody>
-      </p:sp>
-      <p:sp>
-        <p:nvSpPr>
-          <p:cNvPr id="6" name="TextBox 5"/>
-          <p:cNvSpPr txBox="1"/>
-          <p:nvPr/>
-        </p:nvSpPr>
-        <p:spPr>
-          <a:xfrm>
-            <a:off x="3657600" y="2839922"/>
-            <a:ext cx="2417978" cy="206532"/>
-          </a:xfrm>
-          <a:prstGeom prst="rect">
-            <a:avLst/>
-          </a:prstGeom>
-          <a:noFill/>
-        </p:spPr>
-        <p:txBody>
-          <a:bodyPr wrap="square" anchor="t" lIns="0" rIns="0" tIns="0" bIns="0"/>
-          <a:lstStyle/>
-          <a:p>
-            <a:pPr algn="ctr">
-              <a:lnSpc>
-                <a:spcPct val="112000"/>
-              </a:lnSpc>
-              <a:spcBef>
-                <a:spcPts val="0"/>
-              </a:spcBef>
-            </a:pPr>
-            <a:r>
-              <a:rPr sz="1200" b="1" i="0">
-                <a:solidFill>
-                  <a:srgbClr val="707078"/>
-                </a:solidFill>
-                <a:latin typeface="Inter"/>
-              </a:rPr>
-              <a:t>PAPER: MEAN VIEWS</a:t>
-            </a:r>
-          </a:p>
-        </p:txBody>
-      </p:sp>
-      <p:sp>
-        <p:nvSpPr>
-          <p:cNvPr id="7" name="TextBox 6"/>
-          <p:cNvSpPr txBox="1"/>
-          <p:nvPr/>
-        </p:nvSpPr>
-        <p:spPr>
-          <a:xfrm>
-            <a:off x="6258458" y="2839922"/>
-            <a:ext cx="2417978" cy="206532"/>
-          </a:xfrm>
-          <a:prstGeom prst="rect">
-            <a:avLst/>
-          </a:prstGeom>
-          <a:noFill/>
-        </p:spPr>
-        <p:txBody>
-          <a:bodyPr wrap="square" anchor="t" lIns="0" rIns="0" tIns="0" bIns="0"/>
-          <a:lstStyle/>
-          <a:p>
-            <a:pPr algn="ctr">
-              <a:lnSpc>
-                <a:spcPct val="112000"/>
-              </a:lnSpc>
-              <a:spcBef>
-                <a:spcPts val="0"/>
-              </a:spcBef>
-            </a:pPr>
-            <a:r>
-              <a:rPr sz="1200" b="1" i="0">
-                <a:solidFill>
-                  <a:srgbClr val="707078"/>
-                </a:solidFill>
-                <a:latin typeface="Inter"/>
-              </a:rPr>
-              <a:t>MEDIAN VIEWS</a:t>
-            </a:r>
-          </a:p>
-        </p:txBody>
-      </p:sp>
-      <p:sp>
-        <p:nvSpPr>
-          <p:cNvPr id="8" name="TextBox 7"/>
-          <p:cNvSpPr txBox="1"/>
-          <p:nvPr/>
-        </p:nvSpPr>
-        <p:spPr>
-          <a:xfrm>
-            <a:off x="8859316" y="2839922"/>
-            <a:ext cx="2417978" cy="206532"/>
-          </a:xfrm>
-          <a:prstGeom prst="rect">
-            <a:avLst/>
-          </a:prstGeom>
-          <a:noFill/>
-        </p:spPr>
-        <p:txBody>
-          <a:bodyPr wrap="square" anchor="t" lIns="0" rIns="0" tIns="0" bIns="0"/>
-          <a:lstStyle/>
-          <a:p>
-            <a:pPr algn="ctr">
-              <a:lnSpc>
-                <a:spcPct val="112000"/>
-              </a:lnSpc>
-              <a:spcBef>
-                <a:spcPts val="0"/>
-              </a:spcBef>
-            </a:pPr>
-            <a:r>
-              <a:rPr sz="1200" b="1" i="0">
-                <a:solidFill>
-                  <a:srgbClr val="707078"/>
-                </a:solidFill>
-                <a:latin typeface="Inter"/>
-              </a:rPr>
-              <a:t>ASKER NAMES IT</a:t>
-            </a:r>
-          </a:p>
-        </p:txBody>
-      </p:sp>
-      <p:sp>
-        <p:nvSpPr>
-          <p:cNvPr id="9" name="Rectangle 8"/>
+          <p:cNvPr id="3" name="Rounded Rectangle 2"/>
           <p:cNvSpPr/>
           <p:nvPr/>
         </p:nvSpPr>
         <p:spPr>
           <a:xfrm>
-            <a:off x="822960" y="3137894"/>
-            <a:ext cx="10545774" cy="9525"/>
-          </a:xfrm>
-          <a:prstGeom prst="rect">
-            <a:avLst/>
+            <a:off x="9997135" y="457200"/>
+            <a:ext cx="1371600" cy="457200"/>
+          </a:xfrm>
+          <a:prstGeom prst="roundRect">
+            <a:avLst>
+              <a:gd name="adj" fmla="val 50000"/>
+            </a:avLst>
           </a:prstGeom>
           <a:solidFill>
-            <a:srgbClr val="D9D9DE"/>
+            <a:srgbClr val="FFFFFF"/>
           </a:solidFill>
           <a:ln>
             <a:noFill/>
           </a:ln>
-        </p:spPr>
-        <p:txBody>
-          <a:bodyPr rtlCol="0" anchor="ctr"/>
+          <a:effectLst/>
+        </p:spPr>
+        <p:txBody>
+          <a:bodyPr rtlCol="0" anchor="ctr" lIns="0" rIns="0" tIns="0" bIns="0"/>
           <a:lstStyle/>
           <a:p>
             <a:pPr algn="ctr"/>
-          </a:p>
-        </p:txBody>
-      </p:sp>
-      <p:sp>
-        <p:nvSpPr>
-          <p:cNvPr id="10" name="TextBox 9"/>
-          <p:cNvSpPr txBox="1"/>
-          <p:nvPr/>
-        </p:nvSpPr>
-        <p:spPr>
-          <a:xfrm>
-            <a:off x="914400" y="3229334"/>
-            <a:ext cx="2560320" cy="292587"/>
+            <a:r>
+              <a:rPr sz="1600" b="1">
+                <a:solidFill>
+                  <a:srgbClr val="111111"/>
+                </a:solidFill>
+                <a:latin typeface="Inter"/>
+              </a:rPr>
+              <a:t>5 min</a:t>
+            </a:r>
+          </a:p>
+        </p:txBody>
+      </p:sp>
+      <p:sp>
+        <p:nvSpPr>
+          <p:cNvPr id="4" name="TextBox 3"/>
+          <p:cNvSpPr txBox="1"/>
+          <p:nvPr/>
+        </p:nvSpPr>
+        <p:spPr>
+          <a:xfrm>
+            <a:off x="822960" y="868680"/>
+            <a:ext cx="8899855" cy="688441"/>
           </a:xfrm>
           <a:prstGeom prst="rect">
             <a:avLst/>
@@ -7480,38 +7593,38 @@
               </a:spcBef>
             </a:pPr>
             <a:r>
-              <a:rPr sz="1700" b="1" i="0">
-                <a:solidFill>
-                  <a:srgbClr val="111111"/>
-                </a:solidFill>
-                <a:latin typeface="Noto Sans Mono"/>
-              </a:rPr>
-              <a:t>git revert</a:t>
-            </a:r>
-          </a:p>
-        </p:txBody>
-      </p:sp>
-      <p:sp>
-        <p:nvSpPr>
-          <p:cNvPr id="11" name="TextBox 10"/>
-          <p:cNvSpPr txBox="1"/>
-          <p:nvPr/>
-        </p:nvSpPr>
-        <p:spPr>
-          <a:xfrm>
-            <a:off x="3657600" y="3229334"/>
-            <a:ext cx="2417978" cy="292587"/>
-          </a:xfrm>
-          <a:prstGeom prst="rect">
-            <a:avLst/>
-          </a:prstGeom>
-          <a:noFill/>
-        </p:spPr>
-        <p:txBody>
-          <a:bodyPr wrap="square" anchor="t" lIns="0" rIns="0" tIns="0" bIns="0"/>
-          <a:lstStyle/>
-          <a:p>
-            <a:pPr algn="ctr">
+              <a:rPr sz="4000" b="1" i="0">
+                <a:solidFill>
+                  <a:srgbClr val="111111"/>
+                </a:solidFill>
+                <a:latin typeface="Inter"/>
+              </a:rPr>
+              <a:t>Code the comments yourself</a:t>
+            </a:r>
+          </a:p>
+        </p:txBody>
+      </p:sp>
+      <p:sp>
+        <p:nvSpPr>
+          <p:cNvPr id="5" name="TextBox 4"/>
+          <p:cNvSpPr txBox="1"/>
+          <p:nvPr/>
+        </p:nvSpPr>
+        <p:spPr>
+          <a:xfrm>
+            <a:off x="822960" y="1831441"/>
+            <a:ext cx="8647535" cy="1641570"/>
+          </a:xfrm>
+          <a:prstGeom prst="rect">
+            <a:avLst/>
+          </a:prstGeom>
+          <a:noFill/>
+        </p:spPr>
+        <p:txBody>
+          <a:bodyPr wrap="square" anchor="t" lIns="0" rIns="0" tIns="0" bIns="0"/>
+          <a:lstStyle/>
+          <a:p>
+            <a:pPr algn="l">
               <a:lnSpc>
                 <a:spcPct val="112000"/>
               </a:lnSpc>
@@ -7520,38 +7633,57 @@
               </a:spcBef>
             </a:pPr>
             <a:r>
-              <a:rPr sz="1700" b="1" i="0">
-                <a:solidFill>
-                  <a:srgbClr val="8B3DFF"/>
-                </a:solidFill>
-                <a:latin typeface="Inter"/>
-              </a:rPr>
-              <a:t>#1</a:t>
-            </a:r>
-          </a:p>
-        </p:txBody>
-      </p:sp>
-      <p:sp>
-        <p:nvSpPr>
-          <p:cNvPr id="12" name="TextBox 11"/>
-          <p:cNvSpPr txBox="1"/>
-          <p:nvPr/>
-        </p:nvSpPr>
-        <p:spPr>
-          <a:xfrm>
-            <a:off x="6258458" y="3229334"/>
-            <a:ext cx="2417978" cy="292587"/>
-          </a:xfrm>
-          <a:prstGeom prst="rect">
-            <a:avLst/>
-          </a:prstGeom>
-          <a:noFill/>
-        </p:spPr>
-        <p:txBody>
-          <a:bodyPr wrap="square" anchor="t" lIns="0" rIns="0" tIns="0" bIns="0"/>
-          <a:lstStyle/>
-          <a:p>
-            <a:pPr algn="ctr">
+              <a:rPr sz="2200" b="0" i="0">
+                <a:solidFill>
+                  <a:srgbClr val="111111"/>
+                </a:solidFill>
+                <a:latin typeface="Inter"/>
+              </a:rPr>
+              <a:t>The paper’s Table 8: seven survey comments, each placed in one of six categories.</a:t>
+            </a:r>
+          </a:p>
+          <a:p>
+            <a:pPr algn="l">
+              <a:lnSpc>
+                <a:spcPct val="112000"/>
+              </a:lnSpc>
+              <a:spcBef>
+                <a:spcPts val="1000"/>
+              </a:spcBef>
+            </a:pPr>
+            <a:r>
+              <a:rPr sz="2200" b="0" i="0">
+                <a:solidFill>
+                  <a:srgbClr val="111111"/>
+                </a:solidFill>
+                <a:latin typeface="Inter"/>
+              </a:rPr>
+              <a:t>Put each comment where you would. Then we compare with the paper, and with each other.</a:t>
+            </a:r>
+          </a:p>
+        </p:txBody>
+      </p:sp>
+      <p:sp>
+        <p:nvSpPr>
+          <p:cNvPr id="6" name="TextBox 5"/>
+          <p:cNvSpPr txBox="1"/>
+          <p:nvPr/>
+        </p:nvSpPr>
+        <p:spPr>
+          <a:xfrm>
+            <a:off x="822960" y="3701611"/>
+            <a:ext cx="8647535" cy="275376"/>
+          </a:xfrm>
+          <a:prstGeom prst="rect">
+            <a:avLst/>
+          </a:prstGeom>
+          <a:noFill/>
+        </p:spPr>
+        <p:txBody>
+          <a:bodyPr wrap="square" anchor="t" lIns="0" rIns="0" tIns="0" bIns="0"/>
+          <a:lstStyle/>
+          <a:p>
+            <a:pPr algn="l">
               <a:lnSpc>
                 <a:spcPct val="112000"/>
               </a:lnSpc>
@@ -7560,38 +7692,38 @@
               </a:spcBef>
             </a:pPr>
             <a:r>
-              <a:rPr sz="1700" b="0" i="0">
-                <a:solidFill>
-                  <a:srgbClr val="111111"/>
-                </a:solidFill>
-                <a:latin typeface="Inter"/>
-              </a:rPr>
-              <a:t>#60</a:t>
-            </a:r>
-          </a:p>
-        </p:txBody>
-      </p:sp>
-      <p:sp>
-        <p:nvSpPr>
-          <p:cNvPr id="13" name="TextBox 12"/>
-          <p:cNvSpPr txBox="1"/>
-          <p:nvPr/>
-        </p:nvSpPr>
-        <p:spPr>
-          <a:xfrm>
-            <a:off x="8859316" y="3229334"/>
-            <a:ext cx="2417978" cy="292587"/>
-          </a:xfrm>
-          <a:prstGeom prst="rect">
-            <a:avLst/>
-          </a:prstGeom>
-          <a:noFill/>
-        </p:spPr>
-        <p:txBody>
-          <a:bodyPr wrap="square" anchor="t" lIns="0" rIns="0" tIns="0" bIns="0"/>
-          <a:lstStyle/>
-          <a:p>
-            <a:pPr algn="ctr">
+              <a:rPr sz="1600" b="0" i="0">
+                <a:solidFill>
+                  <a:srgbClr val="707078"/>
+                </a:solidFill>
+                <a:latin typeface="Inter"/>
+              </a:rPr>
+              <a:t>The paper’s six categories:</a:t>
+            </a:r>
+          </a:p>
+        </p:txBody>
+      </p:sp>
+      <p:sp>
+        <p:nvSpPr>
+          <p:cNvPr id="7" name="TextBox 6"/>
+          <p:cNvSpPr txBox="1"/>
+          <p:nvPr/>
+        </p:nvSpPr>
+        <p:spPr>
+          <a:xfrm>
+            <a:off x="822960" y="4050139"/>
+            <a:ext cx="8647535" cy="1842756"/>
+          </a:xfrm>
+          <a:prstGeom prst="rect">
+            <a:avLst/>
+          </a:prstGeom>
+          <a:noFill/>
+        </p:spPr>
+        <p:txBody>
+          <a:bodyPr wrap="square" anchor="t" lIns="0" rIns="0" tIns="0" bIns="0"/>
+          <a:lstStyle/>
+          <a:p>
+            <a:pPr algn="l">
               <a:lnSpc>
                 <a:spcPct val="112000"/>
               </a:lnSpc>
@@ -7600,849 +7732,108 @@
               </a:spcBef>
             </a:pPr>
             <a:r>
-              <a:rPr sz="1700" b="0" i="0">
-                <a:solidFill>
-                  <a:srgbClr val="111111"/>
-                </a:solidFill>
-                <a:latin typeface="Inter"/>
-              </a:rPr>
-              <a:t>#1</a:t>
-            </a:r>
-          </a:p>
-        </p:txBody>
-      </p:sp>
-      <p:sp>
-        <p:nvSpPr>
-          <p:cNvPr id="14" name="Rectangle 13"/>
-          <p:cNvSpPr/>
-          <p:nvPr/>
-        </p:nvSpPr>
-        <p:spPr>
-          <a:xfrm>
-            <a:off x="822960" y="3613361"/>
-            <a:ext cx="10545774" cy="9525"/>
-          </a:xfrm>
-          <a:prstGeom prst="rect">
-            <a:avLst/>
-          </a:prstGeom>
-          <a:solidFill>
-            <a:srgbClr val="D9D9DE"/>
-          </a:solidFill>
-          <a:ln>
-            <a:noFill/>
-          </a:ln>
-        </p:spPr>
-        <p:txBody>
-          <a:bodyPr rtlCol="0" anchor="ctr"/>
-          <a:lstStyle/>
-          <a:p>
-            <a:pPr algn="ctr"/>
-          </a:p>
-        </p:txBody>
-      </p:sp>
-      <p:sp>
-        <p:nvSpPr>
-          <p:cNvPr id="15" name="TextBox 14"/>
-          <p:cNvSpPr txBox="1"/>
-          <p:nvPr/>
-        </p:nvSpPr>
-        <p:spPr>
-          <a:xfrm>
-            <a:off x="914400" y="3704801"/>
-            <a:ext cx="2560320" cy="292587"/>
-          </a:xfrm>
-          <a:prstGeom prst="rect">
-            <a:avLst/>
-          </a:prstGeom>
-          <a:noFill/>
-        </p:spPr>
-        <p:txBody>
-          <a:bodyPr wrap="square" anchor="t" lIns="0" rIns="0" tIns="0" bIns="0"/>
-          <a:lstStyle/>
-          <a:p>
-            <a:pPr algn="l">
-              <a:lnSpc>
-                <a:spcPct val="112000"/>
-              </a:lnSpc>
-              <a:spcBef>
-                <a:spcPts val="0"/>
-              </a:spcBef>
-            </a:pPr>
-            <a:r>
-              <a:rPr sz="1700" b="1" i="0">
-                <a:solidFill>
-                  <a:srgbClr val="111111"/>
-                </a:solidFill>
-                <a:latin typeface="Noto Sans Mono"/>
-              </a:rPr>
-              <a:t>git reflog</a:t>
-            </a:r>
-          </a:p>
-        </p:txBody>
-      </p:sp>
-      <p:sp>
-        <p:nvSpPr>
-          <p:cNvPr id="16" name="TextBox 15"/>
-          <p:cNvSpPr txBox="1"/>
-          <p:nvPr/>
-        </p:nvSpPr>
-        <p:spPr>
-          <a:xfrm>
-            <a:off x="3657600" y="3704801"/>
-            <a:ext cx="2417978" cy="292587"/>
-          </a:xfrm>
-          <a:prstGeom prst="rect">
-            <a:avLst/>
-          </a:prstGeom>
-          <a:noFill/>
-        </p:spPr>
-        <p:txBody>
-          <a:bodyPr wrap="square" anchor="t" lIns="0" rIns="0" tIns="0" bIns="0"/>
-          <a:lstStyle/>
-          <a:p>
-            <a:pPr algn="ctr">
-              <a:lnSpc>
-                <a:spcPct val="112000"/>
-              </a:lnSpc>
-              <a:spcBef>
-                <a:spcPts val="0"/>
-              </a:spcBef>
-            </a:pPr>
-            <a:r>
-              <a:rPr sz="1700" b="1" i="0">
-                <a:solidFill>
-                  <a:srgbClr val="8B3DFF"/>
-                </a:solidFill>
-                <a:latin typeface="Inter"/>
-              </a:rPr>
-              <a:t>#2</a:t>
-            </a:r>
-          </a:p>
-        </p:txBody>
-      </p:sp>
-      <p:sp>
-        <p:nvSpPr>
-          <p:cNvPr id="17" name="TextBox 16"/>
-          <p:cNvSpPr txBox="1"/>
-          <p:nvPr/>
-        </p:nvSpPr>
-        <p:spPr>
-          <a:xfrm>
-            <a:off x="6258458" y="3704801"/>
-            <a:ext cx="2417978" cy="292587"/>
-          </a:xfrm>
-          <a:prstGeom prst="rect">
-            <a:avLst/>
-          </a:prstGeom>
-          <a:noFill/>
-        </p:spPr>
-        <p:txBody>
-          <a:bodyPr wrap="square" anchor="t" lIns="0" rIns="0" tIns="0" bIns="0"/>
-          <a:lstStyle/>
-          <a:p>
-            <a:pPr algn="ctr">
-              <a:lnSpc>
-                <a:spcPct val="112000"/>
-              </a:lnSpc>
-              <a:spcBef>
-                <a:spcPts val="0"/>
-              </a:spcBef>
-            </a:pPr>
-            <a:r>
-              <a:rPr sz="1700" b="0" i="0">
-                <a:solidFill>
-                  <a:srgbClr val="111111"/>
-                </a:solidFill>
-                <a:latin typeface="Inter"/>
-              </a:rPr>
-              <a:t>#57</a:t>
-            </a:r>
-          </a:p>
-        </p:txBody>
-      </p:sp>
-      <p:sp>
-        <p:nvSpPr>
-          <p:cNvPr id="18" name="TextBox 17"/>
-          <p:cNvSpPr txBox="1"/>
-          <p:nvPr/>
-        </p:nvSpPr>
-        <p:spPr>
-          <a:xfrm>
-            <a:off x="8859316" y="3704801"/>
-            <a:ext cx="2417978" cy="292587"/>
-          </a:xfrm>
-          <a:prstGeom prst="rect">
-            <a:avLst/>
-          </a:prstGeom>
-          <a:noFill/>
-        </p:spPr>
-        <p:txBody>
-          <a:bodyPr wrap="square" anchor="t" lIns="0" rIns="0" tIns="0" bIns="0"/>
-          <a:lstStyle/>
-          <a:p>
-            <a:pPr algn="ctr">
-              <a:lnSpc>
-                <a:spcPct val="112000"/>
-              </a:lnSpc>
-              <a:spcBef>
-                <a:spcPts val="0"/>
-              </a:spcBef>
-            </a:pPr>
-            <a:r>
-              <a:rPr sz="1700" b="0" i="0">
-                <a:solidFill>
-                  <a:srgbClr val="111111"/>
-                </a:solidFill>
-                <a:latin typeface="Inter"/>
-              </a:rPr>
-              <a:t>#40</a:t>
-            </a:r>
-          </a:p>
-        </p:txBody>
-      </p:sp>
-      <p:sp>
-        <p:nvSpPr>
-          <p:cNvPr id="19" name="Rectangle 18"/>
-          <p:cNvSpPr/>
-          <p:nvPr/>
-        </p:nvSpPr>
-        <p:spPr>
-          <a:xfrm>
-            <a:off x="822960" y="4088828"/>
-            <a:ext cx="10545774" cy="9525"/>
-          </a:xfrm>
-          <a:prstGeom prst="rect">
-            <a:avLst/>
-          </a:prstGeom>
-          <a:solidFill>
-            <a:srgbClr val="D9D9DE"/>
-          </a:solidFill>
-          <a:ln>
-            <a:noFill/>
-          </a:ln>
-        </p:spPr>
-        <p:txBody>
-          <a:bodyPr rtlCol="0" anchor="ctr"/>
-          <a:lstStyle/>
-          <a:p>
-            <a:pPr algn="ctr"/>
-          </a:p>
-        </p:txBody>
-      </p:sp>
-      <p:sp>
-        <p:nvSpPr>
-          <p:cNvPr id="20" name="TextBox 19"/>
-          <p:cNvSpPr txBox="1"/>
-          <p:nvPr/>
-        </p:nvSpPr>
-        <p:spPr>
-          <a:xfrm>
-            <a:off x="914400" y="4180268"/>
-            <a:ext cx="2560320" cy="292587"/>
-          </a:xfrm>
-          <a:prstGeom prst="rect">
-            <a:avLst/>
-          </a:prstGeom>
-          <a:noFill/>
-        </p:spPr>
-        <p:txBody>
-          <a:bodyPr wrap="square" anchor="t" lIns="0" rIns="0" tIns="0" bIns="0"/>
-          <a:lstStyle/>
-          <a:p>
-            <a:pPr algn="l">
-              <a:lnSpc>
-                <a:spcPct val="112000"/>
-              </a:lnSpc>
-              <a:spcBef>
-                <a:spcPts val="0"/>
-              </a:spcBef>
-            </a:pPr>
-            <a:r>
-              <a:rPr sz="1700" b="1" i="0">
-                <a:solidFill>
-                  <a:srgbClr val="111111"/>
-                </a:solidFill>
-                <a:latin typeface="Noto Sans Mono"/>
-              </a:rPr>
-              <a:t>git stash</a:t>
-            </a:r>
-          </a:p>
-        </p:txBody>
-      </p:sp>
-      <p:sp>
-        <p:nvSpPr>
-          <p:cNvPr id="21" name="TextBox 20"/>
-          <p:cNvSpPr txBox="1"/>
-          <p:nvPr/>
-        </p:nvSpPr>
-        <p:spPr>
-          <a:xfrm>
-            <a:off x="3657600" y="4180268"/>
-            <a:ext cx="2417978" cy="292587"/>
-          </a:xfrm>
-          <a:prstGeom prst="rect">
-            <a:avLst/>
-          </a:prstGeom>
-          <a:noFill/>
-        </p:spPr>
-        <p:txBody>
-          <a:bodyPr wrap="square" anchor="t" lIns="0" rIns="0" tIns="0" bIns="0"/>
-          <a:lstStyle/>
-          <a:p>
-            <a:pPr algn="ctr">
-              <a:lnSpc>
-                <a:spcPct val="112000"/>
-              </a:lnSpc>
-              <a:spcBef>
-                <a:spcPts val="0"/>
-              </a:spcBef>
-            </a:pPr>
-            <a:r>
-              <a:rPr sz="1700" b="1" i="0">
-                <a:solidFill>
-                  <a:srgbClr val="8B3DFF"/>
-                </a:solidFill>
-                <a:latin typeface="Inter"/>
-              </a:rPr>
-              <a:t>#3</a:t>
-            </a:r>
-          </a:p>
-        </p:txBody>
-      </p:sp>
-      <p:sp>
-        <p:nvSpPr>
-          <p:cNvPr id="22" name="TextBox 21"/>
-          <p:cNvSpPr txBox="1"/>
-          <p:nvPr/>
-        </p:nvSpPr>
-        <p:spPr>
-          <a:xfrm>
-            <a:off x="6258458" y="4180268"/>
-            <a:ext cx="2417978" cy="292587"/>
-          </a:xfrm>
-          <a:prstGeom prst="rect">
-            <a:avLst/>
-          </a:prstGeom>
-          <a:noFill/>
-        </p:spPr>
-        <p:txBody>
-          <a:bodyPr wrap="square" anchor="t" lIns="0" rIns="0" tIns="0" bIns="0"/>
-          <a:lstStyle/>
-          <a:p>
-            <a:pPr algn="ctr">
-              <a:lnSpc>
-                <a:spcPct val="112000"/>
-              </a:lnSpc>
-              <a:spcBef>
-                <a:spcPts val="0"/>
-              </a:spcBef>
-            </a:pPr>
-            <a:r>
-              <a:rPr sz="1700" b="0" i="0">
-                <a:solidFill>
-                  <a:srgbClr val="111111"/>
-                </a:solidFill>
-                <a:latin typeface="Inter"/>
-              </a:rPr>
-              <a:t>#39</a:t>
-            </a:r>
-          </a:p>
-        </p:txBody>
-      </p:sp>
-      <p:sp>
-        <p:nvSpPr>
-          <p:cNvPr id="23" name="TextBox 22"/>
-          <p:cNvSpPr txBox="1"/>
-          <p:nvPr/>
-        </p:nvSpPr>
-        <p:spPr>
-          <a:xfrm>
-            <a:off x="8859316" y="4180268"/>
-            <a:ext cx="2417978" cy="292587"/>
-          </a:xfrm>
-          <a:prstGeom prst="rect">
-            <a:avLst/>
-          </a:prstGeom>
-          <a:noFill/>
-        </p:spPr>
-        <p:txBody>
-          <a:bodyPr wrap="square" anchor="t" lIns="0" rIns="0" tIns="0" bIns="0"/>
-          <a:lstStyle/>
-          <a:p>
-            <a:pPr algn="ctr">
-              <a:lnSpc>
-                <a:spcPct val="112000"/>
-              </a:lnSpc>
-              <a:spcBef>
-                <a:spcPts val="0"/>
-              </a:spcBef>
-            </a:pPr>
-            <a:r>
-              <a:rPr sz="1700" b="0" i="0">
-                <a:solidFill>
-                  <a:srgbClr val="111111"/>
-                </a:solidFill>
-                <a:latin typeface="Inter"/>
-              </a:rPr>
-              <a:t>#6</a:t>
-            </a:r>
-          </a:p>
-        </p:txBody>
-      </p:sp>
-      <p:sp>
-        <p:nvSpPr>
-          <p:cNvPr id="24" name="Rectangle 23"/>
-          <p:cNvSpPr/>
-          <p:nvPr/>
-        </p:nvSpPr>
-        <p:spPr>
-          <a:xfrm>
-            <a:off x="822960" y="4564295"/>
-            <a:ext cx="10545774" cy="9525"/>
-          </a:xfrm>
-          <a:prstGeom prst="rect">
-            <a:avLst/>
-          </a:prstGeom>
-          <a:solidFill>
-            <a:srgbClr val="D9D9DE"/>
-          </a:solidFill>
-          <a:ln>
-            <a:noFill/>
-          </a:ln>
-        </p:spPr>
-        <p:txBody>
-          <a:bodyPr rtlCol="0" anchor="ctr"/>
-          <a:lstStyle/>
-          <a:p>
-            <a:pPr algn="ctr"/>
-          </a:p>
-        </p:txBody>
-      </p:sp>
-      <p:sp>
-        <p:nvSpPr>
-          <p:cNvPr id="25" name="TextBox 24"/>
-          <p:cNvSpPr txBox="1"/>
-          <p:nvPr/>
-        </p:nvSpPr>
-        <p:spPr>
-          <a:xfrm>
-            <a:off x="914400" y="4655735"/>
-            <a:ext cx="2560320" cy="292587"/>
-          </a:xfrm>
-          <a:prstGeom prst="rect">
-            <a:avLst/>
-          </a:prstGeom>
-          <a:noFill/>
-        </p:spPr>
-        <p:txBody>
-          <a:bodyPr wrap="square" anchor="t" lIns="0" rIns="0" tIns="0" bIns="0"/>
-          <a:lstStyle/>
-          <a:p>
-            <a:pPr algn="l">
-              <a:lnSpc>
-                <a:spcPct val="112000"/>
-              </a:lnSpc>
-              <a:spcBef>
-                <a:spcPts val="0"/>
-              </a:spcBef>
-            </a:pPr>
-            <a:r>
-              <a:rPr sz="1700" b="1" i="0">
-                <a:solidFill>
-                  <a:srgbClr val="111111"/>
-                </a:solidFill>
-                <a:latin typeface="Noto Sans Mono"/>
-              </a:rPr>
-              <a:t>git clean</a:t>
-            </a:r>
-          </a:p>
-        </p:txBody>
-      </p:sp>
-      <p:sp>
-        <p:nvSpPr>
-          <p:cNvPr id="26" name="TextBox 25"/>
-          <p:cNvSpPr txBox="1"/>
-          <p:nvPr/>
-        </p:nvSpPr>
-        <p:spPr>
-          <a:xfrm>
-            <a:off x="3657600" y="4655735"/>
-            <a:ext cx="2417978" cy="292587"/>
-          </a:xfrm>
-          <a:prstGeom prst="rect">
-            <a:avLst/>
-          </a:prstGeom>
-          <a:noFill/>
-        </p:spPr>
-        <p:txBody>
-          <a:bodyPr wrap="square" anchor="t" lIns="0" rIns="0" tIns="0" bIns="0"/>
-          <a:lstStyle/>
-          <a:p>
-            <a:pPr algn="ctr">
-              <a:lnSpc>
-                <a:spcPct val="112000"/>
-              </a:lnSpc>
-              <a:spcBef>
-                <a:spcPts val="0"/>
-              </a:spcBef>
-            </a:pPr>
-            <a:r>
-              <a:rPr sz="1700" b="1" i="0">
-                <a:solidFill>
-                  <a:srgbClr val="8B3DFF"/>
-                </a:solidFill>
-                <a:latin typeface="Inter"/>
-              </a:rPr>
-              <a:t>#4</a:t>
-            </a:r>
-          </a:p>
-        </p:txBody>
-      </p:sp>
-      <p:sp>
-        <p:nvSpPr>
-          <p:cNvPr id="27" name="TextBox 26"/>
-          <p:cNvSpPr txBox="1"/>
-          <p:nvPr/>
-        </p:nvSpPr>
-        <p:spPr>
-          <a:xfrm>
-            <a:off x="6258458" y="4655735"/>
-            <a:ext cx="2417978" cy="292587"/>
-          </a:xfrm>
-          <a:prstGeom prst="rect">
-            <a:avLst/>
-          </a:prstGeom>
-          <a:noFill/>
-        </p:spPr>
-        <p:txBody>
-          <a:bodyPr wrap="square" anchor="t" lIns="0" rIns="0" tIns="0" bIns="0"/>
-          <a:lstStyle/>
-          <a:p>
-            <a:pPr algn="ctr">
-              <a:lnSpc>
-                <a:spcPct val="112000"/>
-              </a:lnSpc>
-              <a:spcBef>
-                <a:spcPts val="0"/>
-              </a:spcBef>
-            </a:pPr>
-            <a:r>
-              <a:rPr sz="1700" b="0" i="0">
-                <a:solidFill>
-                  <a:srgbClr val="111111"/>
-                </a:solidFill>
-                <a:latin typeface="Inter"/>
-              </a:rPr>
-              <a:t>#27</a:t>
-            </a:r>
-          </a:p>
-        </p:txBody>
-      </p:sp>
-      <p:sp>
-        <p:nvSpPr>
-          <p:cNvPr id="28" name="TextBox 27"/>
-          <p:cNvSpPr txBox="1"/>
-          <p:nvPr/>
-        </p:nvSpPr>
-        <p:spPr>
-          <a:xfrm>
-            <a:off x="8859316" y="4655735"/>
-            <a:ext cx="2417978" cy="292587"/>
-          </a:xfrm>
-          <a:prstGeom prst="rect">
-            <a:avLst/>
-          </a:prstGeom>
-          <a:noFill/>
-        </p:spPr>
-        <p:txBody>
-          <a:bodyPr wrap="square" anchor="t" lIns="0" rIns="0" tIns="0" bIns="0"/>
-          <a:lstStyle/>
-          <a:p>
-            <a:pPr algn="ctr">
-              <a:lnSpc>
-                <a:spcPct val="112000"/>
-              </a:lnSpc>
-              <a:spcBef>
-                <a:spcPts val="0"/>
-              </a:spcBef>
-            </a:pPr>
-            <a:r>
-              <a:rPr sz="1700" b="0" i="0">
-                <a:solidFill>
-                  <a:srgbClr val="111111"/>
-                </a:solidFill>
-                <a:latin typeface="Inter"/>
-              </a:rPr>
-              <a:t>#42</a:t>
-            </a:r>
-          </a:p>
-        </p:txBody>
-      </p:sp>
-      <p:sp>
-        <p:nvSpPr>
-          <p:cNvPr id="29" name="Rectangle 28"/>
-          <p:cNvSpPr/>
-          <p:nvPr/>
-        </p:nvSpPr>
-        <p:spPr>
-          <a:xfrm>
-            <a:off x="822960" y="5039762"/>
-            <a:ext cx="10545774" cy="9525"/>
-          </a:xfrm>
-          <a:prstGeom prst="rect">
-            <a:avLst/>
-          </a:prstGeom>
-          <a:solidFill>
-            <a:srgbClr val="D9D9DE"/>
-          </a:solidFill>
-          <a:ln>
-            <a:noFill/>
-          </a:ln>
-        </p:spPr>
-        <p:txBody>
-          <a:bodyPr rtlCol="0" anchor="ctr"/>
-          <a:lstStyle/>
-          <a:p>
-            <a:pPr algn="ctr"/>
-          </a:p>
-        </p:txBody>
-      </p:sp>
-      <p:sp>
-        <p:nvSpPr>
-          <p:cNvPr id="30" name="TextBox 29"/>
-          <p:cNvSpPr txBox="1"/>
-          <p:nvPr/>
-        </p:nvSpPr>
-        <p:spPr>
-          <a:xfrm>
-            <a:off x="914400" y="5131202"/>
-            <a:ext cx="2560320" cy="292587"/>
-          </a:xfrm>
-          <a:prstGeom prst="rect">
-            <a:avLst/>
-          </a:prstGeom>
-          <a:noFill/>
-        </p:spPr>
-        <p:txBody>
-          <a:bodyPr wrap="square" anchor="t" lIns="0" rIns="0" tIns="0" bIns="0"/>
-          <a:lstStyle/>
-          <a:p>
-            <a:pPr algn="l">
-              <a:lnSpc>
-                <a:spcPct val="112000"/>
-              </a:lnSpc>
-              <a:spcBef>
-                <a:spcPts val="0"/>
-              </a:spcBef>
-            </a:pPr>
-            <a:r>
-              <a:rPr sz="1700" b="1" i="0">
-                <a:solidFill>
-                  <a:srgbClr val="111111"/>
-                </a:solidFill>
-                <a:latin typeface="Noto Sans Mono"/>
-              </a:rPr>
-              <a:t>git reset</a:t>
-            </a:r>
-          </a:p>
-        </p:txBody>
-      </p:sp>
-      <p:sp>
-        <p:nvSpPr>
-          <p:cNvPr id="31" name="TextBox 30"/>
-          <p:cNvSpPr txBox="1"/>
-          <p:nvPr/>
-        </p:nvSpPr>
-        <p:spPr>
-          <a:xfrm>
-            <a:off x="3657600" y="5131202"/>
-            <a:ext cx="2417978" cy="292587"/>
-          </a:xfrm>
-          <a:prstGeom prst="rect">
-            <a:avLst/>
-          </a:prstGeom>
-          <a:noFill/>
-        </p:spPr>
-        <p:txBody>
-          <a:bodyPr wrap="square" anchor="t" lIns="0" rIns="0" tIns="0" bIns="0"/>
-          <a:lstStyle/>
-          <a:p>
-            <a:pPr algn="ctr">
-              <a:lnSpc>
-                <a:spcPct val="112000"/>
-              </a:lnSpc>
-              <a:spcBef>
-                <a:spcPts val="0"/>
-              </a:spcBef>
-            </a:pPr>
-            <a:r>
-              <a:rPr sz="1700" b="1" i="0">
-                <a:solidFill>
-                  <a:srgbClr val="8B3DFF"/>
-                </a:solidFill>
-                <a:latin typeface="Inter"/>
-              </a:rPr>
-              <a:t>#5</a:t>
-            </a:r>
-          </a:p>
-        </p:txBody>
-      </p:sp>
-      <p:sp>
-        <p:nvSpPr>
-          <p:cNvPr id="32" name="TextBox 31"/>
-          <p:cNvSpPr txBox="1"/>
-          <p:nvPr/>
-        </p:nvSpPr>
-        <p:spPr>
-          <a:xfrm>
-            <a:off x="6258458" y="5131202"/>
-            <a:ext cx="2417978" cy="292587"/>
-          </a:xfrm>
-          <a:prstGeom prst="rect">
-            <a:avLst/>
-          </a:prstGeom>
-          <a:noFill/>
-        </p:spPr>
-        <p:txBody>
-          <a:bodyPr wrap="square" anchor="t" lIns="0" rIns="0" tIns="0" bIns="0"/>
-          <a:lstStyle/>
-          <a:p>
-            <a:pPr algn="ctr">
-              <a:lnSpc>
-                <a:spcPct val="112000"/>
-              </a:lnSpc>
-              <a:spcBef>
-                <a:spcPts val="0"/>
-              </a:spcBef>
-            </a:pPr>
-            <a:r>
-              <a:rPr sz="1700" b="0" i="0">
-                <a:solidFill>
-                  <a:srgbClr val="111111"/>
-                </a:solidFill>
-                <a:latin typeface="Inter"/>
-              </a:rPr>
-              <a:t>#43</a:t>
-            </a:r>
-          </a:p>
-        </p:txBody>
-      </p:sp>
-      <p:sp>
-        <p:nvSpPr>
-          <p:cNvPr id="33" name="TextBox 32"/>
-          <p:cNvSpPr txBox="1"/>
-          <p:nvPr/>
-        </p:nvSpPr>
-        <p:spPr>
-          <a:xfrm>
-            <a:off x="8859316" y="5131202"/>
-            <a:ext cx="2417978" cy="292587"/>
-          </a:xfrm>
-          <a:prstGeom prst="rect">
-            <a:avLst/>
-          </a:prstGeom>
-          <a:noFill/>
-        </p:spPr>
-        <p:txBody>
-          <a:bodyPr wrap="square" anchor="t" lIns="0" rIns="0" tIns="0" bIns="0"/>
-          <a:lstStyle/>
-          <a:p>
-            <a:pPr algn="ctr">
-              <a:lnSpc>
-                <a:spcPct val="112000"/>
-              </a:lnSpc>
-              <a:spcBef>
-                <a:spcPts val="0"/>
-              </a:spcBef>
-            </a:pPr>
-            <a:r>
-              <a:rPr sz="1700" b="0" i="0">
-                <a:solidFill>
-                  <a:srgbClr val="111111"/>
-                </a:solidFill>
-                <a:latin typeface="Inter"/>
-              </a:rPr>
-              <a:t>#4</a:t>
-            </a:r>
-          </a:p>
-        </p:txBody>
-      </p:sp>
-      <p:sp>
-        <p:nvSpPr>
-          <p:cNvPr id="34" name="TextBox 33"/>
-          <p:cNvSpPr txBox="1"/>
-          <p:nvPr/>
-        </p:nvSpPr>
-        <p:spPr>
-          <a:xfrm>
-            <a:off x="822960" y="5560949"/>
-            <a:ext cx="10545775" cy="223743"/>
-          </a:xfrm>
-          <a:prstGeom prst="rect">
-            <a:avLst/>
-          </a:prstGeom>
-          <a:noFill/>
-        </p:spPr>
-        <p:txBody>
-          <a:bodyPr wrap="square" anchor="t" lIns="0" rIns="0" tIns="0" bIns="0"/>
-          <a:lstStyle/>
-          <a:p>
-            <a:pPr algn="l">
-              <a:lnSpc>
-                <a:spcPct val="112000"/>
-              </a:lnSpc>
-              <a:spcBef>
-                <a:spcPts val="0"/>
-              </a:spcBef>
-            </a:pPr>
-            <a:r>
-              <a:rPr sz="1300" b="0" i="0">
-                <a:solidFill>
-                  <a:srgbClr val="707078"/>
-                </a:solidFill>
-                <a:latin typeface="Inter"/>
-              </a:rPr>
-              <a:t>Our re-run of the paper’s rule on its data. Rank among the 62 commands in 200+ questions, the paper’s filter.</a:t>
-            </a:r>
-          </a:p>
-        </p:txBody>
-      </p:sp>
-      <p:sp>
-        <p:nvSpPr>
-          <p:cNvPr id="35" name="TextBox 34"/>
-          <p:cNvSpPr txBox="1"/>
-          <p:nvPr/>
-        </p:nvSpPr>
-        <p:spPr>
-          <a:xfrm>
-            <a:off x="822960" y="6022158"/>
-            <a:ext cx="10545775" cy="378642"/>
-          </a:xfrm>
-          <a:prstGeom prst="rect">
-            <a:avLst/>
-          </a:prstGeom>
-          <a:noFill/>
-        </p:spPr>
-        <p:txBody>
-          <a:bodyPr wrap="square" anchor="t" lIns="0" rIns="0" tIns="0" bIns="0"/>
-          <a:lstStyle/>
-          <a:p>
-            <a:pPr algn="l">
-              <a:lnSpc>
-                <a:spcPct val="112000"/>
-              </a:lnSpc>
-              <a:spcBef>
-                <a:spcPts val="0"/>
-              </a:spcBef>
-            </a:pPr>
-            <a:r>
-              <a:rPr sz="2200" b="0" i="1">
-                <a:solidFill>
-                  <a:srgbClr val="707078"/>
-                </a:solidFill>
-                <a:latin typeface="Inter"/>
-              </a:rPr>
-              <a:t>Do you believe their answer to RQ3?</a:t>
+              <a:rPr sz="1600" b="0" i="0">
+                <a:solidFill>
+                  <a:srgbClr val="111111"/>
+                </a:solidFill>
+                <a:latin typeface="Inter"/>
+              </a:rPr>
+              <a:t>Learning and improving from practice (18)</a:t>
+            </a:r>
+          </a:p>
+          <a:p>
+            <a:pPr algn="l">
+              <a:lnSpc>
+                <a:spcPct val="112000"/>
+              </a:lnSpc>
+              <a:spcBef>
+                <a:spcPts val="300"/>
+              </a:spcBef>
+            </a:pPr>
+            <a:r>
+              <a:rPr sz="1600" b="0" i="0">
+                <a:solidFill>
+                  <a:srgbClr val="111111"/>
+                </a:solidFill>
+                <a:latin typeface="Inter"/>
+              </a:rPr>
+              <a:t>Making the best use of the internet (17)</a:t>
+            </a:r>
+          </a:p>
+          <a:p>
+            <a:pPr algn="l">
+              <a:lnSpc>
+                <a:spcPct val="112000"/>
+              </a:lnSpc>
+              <a:spcBef>
+                <a:spcPts val="300"/>
+              </a:spcBef>
+            </a:pPr>
+            <a:r>
+              <a:rPr sz="1600" b="0" i="0">
+                <a:solidFill>
+                  <a:srgbClr val="111111"/>
+                </a:solidFill>
+                <a:latin typeface="Inter"/>
+              </a:rPr>
+              <a:t>Understanding basic concepts and principles first (14)</a:t>
+            </a:r>
+          </a:p>
+          <a:p>
+            <a:pPr algn="l">
+              <a:lnSpc>
+                <a:spcPct val="112000"/>
+              </a:lnSpc>
+              <a:spcBef>
+                <a:spcPts val="300"/>
+              </a:spcBef>
+            </a:pPr>
+            <a:r>
+              <a:rPr sz="1600" b="0" i="0">
+                <a:solidFill>
+                  <a:srgbClr val="111111"/>
+                </a:solidFill>
+                <a:latin typeface="Inter"/>
+              </a:rPr>
+              <a:t>Emphasizing the importance of Git (9)</a:t>
+            </a:r>
+          </a:p>
+          <a:p>
+            <a:pPr algn="l">
+              <a:lnSpc>
+                <a:spcPct val="112000"/>
+              </a:lnSpc>
+              <a:spcBef>
+                <a:spcPts val="300"/>
+              </a:spcBef>
+            </a:pPr>
+            <a:r>
+              <a:rPr sz="1600" b="0" i="0">
+                <a:solidFill>
+                  <a:srgbClr val="111111"/>
+                </a:solidFill>
+                <a:latin typeface="Inter"/>
+              </a:rPr>
+              <a:t>Mastering only the basic commands (5)</a:t>
+            </a:r>
+          </a:p>
+          <a:p>
+            <a:pPr algn="l">
+              <a:lnSpc>
+                <a:spcPct val="112000"/>
+              </a:lnSpc>
+              <a:spcBef>
+                <a:spcPts val="300"/>
+              </a:spcBef>
+            </a:pPr>
+            <a:r>
+              <a:rPr sz="1600" b="0" i="0">
+                <a:solidFill>
+                  <a:srgbClr val="111111"/>
+                </a:solidFill>
+                <a:latin typeface="Inter"/>
+              </a:rPr>
+              <a:t>Having the basic needs satisfied by Git GUI tools (2)</a:t>
             </a:r>
           </a:p>
         </p:txBody>
@@ -8505,7 +7896,7 @@
                 </a:solidFill>
                 <a:latin typeface="Inter"/>
               </a:rPr>
-              <a:t>BREAK</a:t>
+              <a:t>3 · THE ANALYSIS</a:t>
             </a:r>
           </a:p>
         </p:txBody>
@@ -8518,8 +7909,8 @@
         </p:nvSpPr>
         <p:spPr>
           <a:xfrm>
-            <a:off x="822960" y="2103120"/>
-            <a:ext cx="10545775" cy="1135928"/>
+            <a:off x="822960" y="868680"/>
+            <a:ext cx="10545775" cy="688441"/>
           </a:xfrm>
           <a:prstGeom prst="rect">
             <a:avLst/>
@@ -8539,13 +7930,13 @@
               </a:spcBef>
             </a:pPr>
             <a:r>
-              <a:rPr sz="6600" b="1" i="0">
-                <a:solidFill>
-                  <a:srgbClr val="111111"/>
-                </a:solidFill>
-                <a:latin typeface="Inter"/>
-              </a:rPr>
-              <a:t>Break</a:t>
+              <a:rPr sz="4000" b="1" i="0">
+                <a:solidFill>
+                  <a:srgbClr val="111111"/>
+                </a:solidFill>
+                <a:latin typeface="Inter"/>
+              </a:rPr>
+              <a:t>Coding without a method</a:t>
             </a:r>
           </a:p>
         </p:txBody>
@@ -8558,8 +7949,8 @@
         </p:nvSpPr>
         <p:spPr>
           <a:xfrm>
-            <a:off x="822960" y="3559088"/>
-            <a:ext cx="8647535" cy="447487"/>
+            <a:off x="822960" y="1831441"/>
+            <a:ext cx="10545775" cy="1297350"/>
           </a:xfrm>
           <a:prstGeom prst="rect">
             <a:avLst/>
@@ -8579,13 +7970,915 @@
               </a:spcBef>
             </a:pPr>
             <a:r>
-              <a:rPr sz="2600" b="0" i="0">
+              <a:rPr sz="1700" b="0" i="0">
+                <a:solidFill>
+                  <a:srgbClr val="111111"/>
+                </a:solidFill>
+                <a:latin typeface="Inter"/>
+              </a:rPr>
+              <a:t>The paper sorted 65 comments into 6 categories “for better delivery purposes”. It names no method and reports no second coder or agreement.</a:t>
+            </a:r>
+          </a:p>
+          <a:p>
+            <a:pPr algn="l">
+              <a:lnSpc>
+                <a:spcPct val="112000"/>
+              </a:lnSpc>
+              <a:spcBef>
+                <a:spcPts val="1000"/>
+              </a:spcBef>
+            </a:pPr>
+            <a:r>
+              <a:rPr sz="1700" b="0" i="0">
+                <a:solidFill>
+                  <a:srgbClr val="111111"/>
+                </a:solidFill>
+                <a:latin typeface="Inter"/>
+              </a:rPr>
+              <a:t>It did measure agreement elsewhere: Cohen’s kappa 0.844 for which posts are about Git commands (§2.1).</a:t>
+            </a:r>
+          </a:p>
+        </p:txBody>
+      </p:sp>
+      <p:sp>
+        <p:nvSpPr>
+          <p:cNvPr id="5" name="TextBox 4"/>
+          <p:cNvSpPr txBox="1"/>
+          <p:nvPr/>
+        </p:nvSpPr>
+        <p:spPr>
+          <a:xfrm>
+            <a:off x="868680" y="3329959"/>
+            <a:ext cx="6248095" cy="206532"/>
+          </a:xfrm>
+          <a:prstGeom prst="rect">
+            <a:avLst/>
+          </a:prstGeom>
+          <a:noFill/>
+        </p:spPr>
+        <p:txBody>
+          <a:bodyPr wrap="square" anchor="t" lIns="0" rIns="0" tIns="0" bIns="0"/>
+          <a:lstStyle/>
+          <a:p>
+            <a:pPr algn="l">
+              <a:lnSpc>
+                <a:spcPct val="112000"/>
+              </a:lnSpc>
+              <a:spcBef>
+                <a:spcPts val="0"/>
+              </a:spcBef>
+            </a:pPr>
+            <a:r>
+              <a:rPr sz="1200" b="1" i="0">
                 <a:solidFill>
                   <a:srgbClr val="707078"/>
                 </a:solidFill>
                 <a:latin typeface="Inter"/>
               </a:rPr>
-              <a:t>5 minutes. Then groups.</a:t>
+              <a:t>COMMENT</a:t>
+            </a:r>
+          </a:p>
+        </p:txBody>
+      </p:sp>
+      <p:sp>
+        <p:nvSpPr>
+          <p:cNvPr id="6" name="TextBox 5"/>
+          <p:cNvSpPr txBox="1"/>
+          <p:nvPr/>
+        </p:nvSpPr>
+        <p:spPr>
+          <a:xfrm>
+            <a:off x="7208215" y="3329959"/>
+            <a:ext cx="4114800" cy="206532"/>
+          </a:xfrm>
+          <a:prstGeom prst="rect">
+            <a:avLst/>
+          </a:prstGeom>
+          <a:noFill/>
+        </p:spPr>
+        <p:txBody>
+          <a:bodyPr wrap="square" anchor="t" lIns="0" rIns="0" tIns="0" bIns="0"/>
+          <a:lstStyle/>
+          <a:p>
+            <a:pPr algn="l">
+              <a:lnSpc>
+                <a:spcPct val="112000"/>
+              </a:lnSpc>
+              <a:spcBef>
+                <a:spcPts val="0"/>
+              </a:spcBef>
+            </a:pPr>
+            <a:r>
+              <a:rPr sz="1200" b="1" i="0">
+                <a:solidFill>
+                  <a:srgbClr val="707078"/>
+                </a:solidFill>
+                <a:latin typeface="Inter"/>
+              </a:rPr>
+              <a:t>THE PAPER’S CATEGORY</a:t>
+            </a:r>
+          </a:p>
+        </p:txBody>
+      </p:sp>
+      <p:sp>
+        <p:nvSpPr>
+          <p:cNvPr id="7" name="Rectangle 6"/>
+          <p:cNvSpPr/>
+          <p:nvPr/>
+        </p:nvSpPr>
+        <p:spPr>
+          <a:xfrm>
+            <a:off x="822960" y="3582211"/>
+            <a:ext cx="10545775" cy="9525"/>
+          </a:xfrm>
+          <a:prstGeom prst="rect">
+            <a:avLst/>
+          </a:prstGeom>
+          <a:solidFill>
+            <a:srgbClr val="D9D9DE"/>
+          </a:solidFill>
+          <a:ln>
+            <a:noFill/>
+          </a:ln>
+        </p:spPr>
+        <p:txBody>
+          <a:bodyPr rtlCol="0" anchor="ctr"/>
+          <a:lstStyle/>
+          <a:p>
+            <a:pPr algn="ctr"/>
+          </a:p>
+        </p:txBody>
+      </p:sp>
+      <p:sp>
+        <p:nvSpPr>
+          <p:cNvPr id="8" name="TextBox 7"/>
+          <p:cNvSpPr txBox="1"/>
+          <p:nvPr/>
+        </p:nvSpPr>
+        <p:spPr>
+          <a:xfrm>
+            <a:off x="868680" y="3627931"/>
+            <a:ext cx="6248095" cy="206532"/>
+          </a:xfrm>
+          <a:prstGeom prst="rect">
+            <a:avLst/>
+          </a:prstGeom>
+          <a:noFill/>
+        </p:spPr>
+        <p:txBody>
+          <a:bodyPr wrap="square" anchor="t" lIns="0" rIns="0" tIns="0" bIns="0"/>
+          <a:lstStyle/>
+          <a:p>
+            <a:pPr algn="l">
+              <a:lnSpc>
+                <a:spcPct val="112000"/>
+              </a:lnSpc>
+              <a:spcBef>
+                <a:spcPts val="0"/>
+              </a:spcBef>
+            </a:pPr>
+            <a:r>
+              <a:rPr sz="1200" b="0" i="0">
+                <a:solidFill>
+                  <a:srgbClr val="111111"/>
+                </a:solidFill>
+                <a:latin typeface="Inter"/>
+              </a:rPr>
+              <a:t>#56 “Git is an extremely important tool to our routine as software …”</a:t>
+            </a:r>
+          </a:p>
+        </p:txBody>
+      </p:sp>
+      <p:sp>
+        <p:nvSpPr>
+          <p:cNvPr id="9" name="TextBox 8"/>
+          <p:cNvSpPr txBox="1"/>
+          <p:nvPr/>
+        </p:nvSpPr>
+        <p:spPr>
+          <a:xfrm>
+            <a:off x="7208215" y="3627931"/>
+            <a:ext cx="4114800" cy="206532"/>
+          </a:xfrm>
+          <a:prstGeom prst="rect">
+            <a:avLst/>
+          </a:prstGeom>
+          <a:noFill/>
+        </p:spPr>
+        <p:txBody>
+          <a:bodyPr wrap="square" anchor="t" lIns="0" rIns="0" tIns="0" bIns="0"/>
+          <a:lstStyle/>
+          <a:p>
+            <a:pPr algn="l">
+              <a:lnSpc>
+                <a:spcPct val="112000"/>
+              </a:lnSpc>
+              <a:spcBef>
+                <a:spcPts val="0"/>
+              </a:spcBef>
+            </a:pPr>
+            <a:r>
+              <a:rPr sz="1200" b="0" i="0">
+                <a:solidFill>
+                  <a:srgbClr val="111111"/>
+                </a:solidFill>
+                <a:latin typeface="Inter"/>
+              </a:rPr>
+              <a:t>Emphasizing the importance of Git</a:t>
+            </a:r>
+          </a:p>
+        </p:txBody>
+      </p:sp>
+      <p:sp>
+        <p:nvSpPr>
+          <p:cNvPr id="10" name="Rectangle 9"/>
+          <p:cNvSpPr/>
+          <p:nvPr/>
+        </p:nvSpPr>
+        <p:spPr>
+          <a:xfrm>
+            <a:off x="822960" y="3880183"/>
+            <a:ext cx="10545775" cy="9525"/>
+          </a:xfrm>
+          <a:prstGeom prst="rect">
+            <a:avLst/>
+          </a:prstGeom>
+          <a:solidFill>
+            <a:srgbClr val="D9D9DE"/>
+          </a:solidFill>
+          <a:ln>
+            <a:noFill/>
+          </a:ln>
+        </p:spPr>
+        <p:txBody>
+          <a:bodyPr rtlCol="0" anchor="ctr"/>
+          <a:lstStyle/>
+          <a:p>
+            <a:pPr algn="ctr"/>
+          </a:p>
+        </p:txBody>
+      </p:sp>
+      <p:sp>
+        <p:nvSpPr>
+          <p:cNvPr id="11" name="TextBox 10"/>
+          <p:cNvSpPr txBox="1"/>
+          <p:nvPr/>
+        </p:nvSpPr>
+        <p:spPr>
+          <a:xfrm>
+            <a:off x="868680" y="3925903"/>
+            <a:ext cx="6248095" cy="206532"/>
+          </a:xfrm>
+          <a:prstGeom prst="rect">
+            <a:avLst/>
+          </a:prstGeom>
+          <a:noFill/>
+        </p:spPr>
+        <p:txBody>
+          <a:bodyPr wrap="square" anchor="t" lIns="0" rIns="0" tIns="0" bIns="0"/>
+          <a:lstStyle/>
+          <a:p>
+            <a:pPr algn="l">
+              <a:lnSpc>
+                <a:spcPct val="112000"/>
+              </a:lnSpc>
+              <a:spcBef>
+                <a:spcPts val="0"/>
+              </a:spcBef>
+            </a:pPr>
+            <a:r>
+              <a:rPr sz="1200" b="0" i="0">
+                <a:solidFill>
+                  <a:srgbClr val="111111"/>
+                </a:solidFill>
+                <a:latin typeface="Inter"/>
+              </a:rPr>
+              <a:t>#32 “There are so many commands, I think it is better to learn them in …”</a:t>
+            </a:r>
+          </a:p>
+        </p:txBody>
+      </p:sp>
+      <p:sp>
+        <p:nvSpPr>
+          <p:cNvPr id="12" name="TextBox 11"/>
+          <p:cNvSpPr txBox="1"/>
+          <p:nvPr/>
+        </p:nvSpPr>
+        <p:spPr>
+          <a:xfrm>
+            <a:off x="7208215" y="3925903"/>
+            <a:ext cx="4114800" cy="206532"/>
+          </a:xfrm>
+          <a:prstGeom prst="rect">
+            <a:avLst/>
+          </a:prstGeom>
+          <a:noFill/>
+        </p:spPr>
+        <p:txBody>
+          <a:bodyPr wrap="square" anchor="t" lIns="0" rIns="0" tIns="0" bIns="0"/>
+          <a:lstStyle/>
+          <a:p>
+            <a:pPr algn="l">
+              <a:lnSpc>
+                <a:spcPct val="112000"/>
+              </a:lnSpc>
+              <a:spcBef>
+                <a:spcPts val="0"/>
+              </a:spcBef>
+            </a:pPr>
+            <a:r>
+              <a:rPr sz="1200" b="0" i="0">
+                <a:solidFill>
+                  <a:srgbClr val="111111"/>
+                </a:solidFill>
+                <a:latin typeface="Inter"/>
+              </a:rPr>
+              <a:t>Learning and improving from practice</a:t>
+            </a:r>
+          </a:p>
+        </p:txBody>
+      </p:sp>
+      <p:sp>
+        <p:nvSpPr>
+          <p:cNvPr id="13" name="Rectangle 12"/>
+          <p:cNvSpPr/>
+          <p:nvPr/>
+        </p:nvSpPr>
+        <p:spPr>
+          <a:xfrm>
+            <a:off x="822960" y="4178155"/>
+            <a:ext cx="10545775" cy="9525"/>
+          </a:xfrm>
+          <a:prstGeom prst="rect">
+            <a:avLst/>
+          </a:prstGeom>
+          <a:solidFill>
+            <a:srgbClr val="D9D9DE"/>
+          </a:solidFill>
+          <a:ln>
+            <a:noFill/>
+          </a:ln>
+        </p:spPr>
+        <p:txBody>
+          <a:bodyPr rtlCol="0" anchor="ctr"/>
+          <a:lstStyle/>
+          <a:p>
+            <a:pPr algn="ctr"/>
+          </a:p>
+        </p:txBody>
+      </p:sp>
+      <p:sp>
+        <p:nvSpPr>
+          <p:cNvPr id="14" name="TextBox 13"/>
+          <p:cNvSpPr txBox="1"/>
+          <p:nvPr/>
+        </p:nvSpPr>
+        <p:spPr>
+          <a:xfrm>
+            <a:off x="868680" y="4223875"/>
+            <a:ext cx="6248095" cy="206532"/>
+          </a:xfrm>
+          <a:prstGeom prst="rect">
+            <a:avLst/>
+          </a:prstGeom>
+          <a:noFill/>
+        </p:spPr>
+        <p:txBody>
+          <a:bodyPr wrap="square" anchor="t" lIns="0" rIns="0" tIns="0" bIns="0"/>
+          <a:lstStyle/>
+          <a:p>
+            <a:pPr algn="l">
+              <a:lnSpc>
+                <a:spcPct val="112000"/>
+              </a:lnSpc>
+              <a:spcBef>
+                <a:spcPts val="0"/>
+              </a:spcBef>
+            </a:pPr>
+            <a:r>
+              <a:rPr sz="1200" b="0" i="0">
+                <a:solidFill>
+                  <a:srgbClr val="111111"/>
+                </a:solidFill>
+                <a:latin typeface="Inter"/>
+              </a:rPr>
+              <a:t>#89 “Git is not a tool you have to go pretty deep to learn. Since it is a …”</a:t>
+            </a:r>
+          </a:p>
+        </p:txBody>
+      </p:sp>
+      <p:sp>
+        <p:nvSpPr>
+          <p:cNvPr id="15" name="TextBox 14"/>
+          <p:cNvSpPr txBox="1"/>
+          <p:nvPr/>
+        </p:nvSpPr>
+        <p:spPr>
+          <a:xfrm>
+            <a:off x="7208215" y="4223875"/>
+            <a:ext cx="4114800" cy="206532"/>
+          </a:xfrm>
+          <a:prstGeom prst="rect">
+            <a:avLst/>
+          </a:prstGeom>
+          <a:noFill/>
+        </p:spPr>
+        <p:txBody>
+          <a:bodyPr wrap="square" anchor="t" lIns="0" rIns="0" tIns="0" bIns="0"/>
+          <a:lstStyle/>
+          <a:p>
+            <a:pPr algn="l">
+              <a:lnSpc>
+                <a:spcPct val="112000"/>
+              </a:lnSpc>
+              <a:spcBef>
+                <a:spcPts val="0"/>
+              </a:spcBef>
+            </a:pPr>
+            <a:r>
+              <a:rPr sz="1200" b="0" i="0">
+                <a:solidFill>
+                  <a:srgbClr val="111111"/>
+                </a:solidFill>
+                <a:latin typeface="Inter"/>
+              </a:rPr>
+              <a:t>Mastering only the basic commands</a:t>
+            </a:r>
+          </a:p>
+        </p:txBody>
+      </p:sp>
+      <p:sp>
+        <p:nvSpPr>
+          <p:cNvPr id="16" name="Rectangle 15"/>
+          <p:cNvSpPr/>
+          <p:nvPr/>
+        </p:nvSpPr>
+        <p:spPr>
+          <a:xfrm>
+            <a:off x="822960" y="4476127"/>
+            <a:ext cx="10545775" cy="9525"/>
+          </a:xfrm>
+          <a:prstGeom prst="rect">
+            <a:avLst/>
+          </a:prstGeom>
+          <a:solidFill>
+            <a:srgbClr val="D9D9DE"/>
+          </a:solidFill>
+          <a:ln>
+            <a:noFill/>
+          </a:ln>
+        </p:spPr>
+        <p:txBody>
+          <a:bodyPr rtlCol="0" anchor="ctr"/>
+          <a:lstStyle/>
+          <a:p>
+            <a:pPr algn="ctr"/>
+          </a:p>
+        </p:txBody>
+      </p:sp>
+      <p:sp>
+        <p:nvSpPr>
+          <p:cNvPr id="17" name="TextBox 16"/>
+          <p:cNvSpPr txBox="1"/>
+          <p:nvPr/>
+        </p:nvSpPr>
+        <p:spPr>
+          <a:xfrm>
+            <a:off x="868680" y="4521847"/>
+            <a:ext cx="6248095" cy="206532"/>
+          </a:xfrm>
+          <a:prstGeom prst="rect">
+            <a:avLst/>
+          </a:prstGeom>
+          <a:noFill/>
+        </p:spPr>
+        <p:txBody>
+          <a:bodyPr wrap="square" anchor="t" lIns="0" rIns="0" tIns="0" bIns="0"/>
+          <a:lstStyle/>
+          <a:p>
+            <a:pPr algn="l">
+              <a:lnSpc>
+                <a:spcPct val="112000"/>
+              </a:lnSpc>
+              <a:spcBef>
+                <a:spcPts val="0"/>
+              </a:spcBef>
+            </a:pPr>
+            <a:r>
+              <a:rPr sz="1200" b="0" i="0">
+                <a:solidFill>
+                  <a:srgbClr val="111111"/>
+                </a:solidFill>
+                <a:latin typeface="Inter"/>
+              </a:rPr>
+              <a:t>#26 “The difficulty with git is that when problems arise, you have to dive …”</a:t>
+            </a:r>
+          </a:p>
+        </p:txBody>
+      </p:sp>
+      <p:sp>
+        <p:nvSpPr>
+          <p:cNvPr id="18" name="TextBox 17"/>
+          <p:cNvSpPr txBox="1"/>
+          <p:nvPr/>
+        </p:nvSpPr>
+        <p:spPr>
+          <a:xfrm>
+            <a:off x="7208215" y="4521847"/>
+            <a:ext cx="4114800" cy="206532"/>
+          </a:xfrm>
+          <a:prstGeom prst="rect">
+            <a:avLst/>
+          </a:prstGeom>
+          <a:noFill/>
+        </p:spPr>
+        <p:txBody>
+          <a:bodyPr wrap="square" anchor="t" lIns="0" rIns="0" tIns="0" bIns="0"/>
+          <a:lstStyle/>
+          <a:p>
+            <a:pPr algn="l">
+              <a:lnSpc>
+                <a:spcPct val="112000"/>
+              </a:lnSpc>
+              <a:spcBef>
+                <a:spcPts val="0"/>
+              </a:spcBef>
+            </a:pPr>
+            <a:r>
+              <a:rPr sz="1200" b="0" i="0">
+                <a:solidFill>
+                  <a:srgbClr val="111111"/>
+                </a:solidFill>
+                <a:latin typeface="Inter"/>
+              </a:rPr>
+              <a:t>Understanding basic concepts and principles first</a:t>
+            </a:r>
+          </a:p>
+        </p:txBody>
+      </p:sp>
+      <p:sp>
+        <p:nvSpPr>
+          <p:cNvPr id="19" name="Rectangle 18"/>
+          <p:cNvSpPr/>
+          <p:nvPr/>
+        </p:nvSpPr>
+        <p:spPr>
+          <a:xfrm>
+            <a:off x="822960" y="4774099"/>
+            <a:ext cx="10545775" cy="9525"/>
+          </a:xfrm>
+          <a:prstGeom prst="rect">
+            <a:avLst/>
+          </a:prstGeom>
+          <a:solidFill>
+            <a:srgbClr val="D9D9DE"/>
+          </a:solidFill>
+          <a:ln>
+            <a:noFill/>
+          </a:ln>
+        </p:spPr>
+        <p:txBody>
+          <a:bodyPr rtlCol="0" anchor="ctr"/>
+          <a:lstStyle/>
+          <a:p>
+            <a:pPr algn="ctr"/>
+          </a:p>
+        </p:txBody>
+      </p:sp>
+      <p:sp>
+        <p:nvSpPr>
+          <p:cNvPr id="20" name="TextBox 19"/>
+          <p:cNvSpPr txBox="1"/>
+          <p:nvPr/>
+        </p:nvSpPr>
+        <p:spPr>
+          <a:xfrm>
+            <a:off x="868680" y="4819819"/>
+            <a:ext cx="6248095" cy="206532"/>
+          </a:xfrm>
+          <a:prstGeom prst="rect">
+            <a:avLst/>
+          </a:prstGeom>
+          <a:noFill/>
+        </p:spPr>
+        <p:txBody>
+          <a:bodyPr wrap="square" anchor="t" lIns="0" rIns="0" tIns="0" bIns="0"/>
+          <a:lstStyle/>
+          <a:p>
+            <a:pPr algn="l">
+              <a:lnSpc>
+                <a:spcPct val="112000"/>
+              </a:lnSpc>
+              <a:spcBef>
+                <a:spcPts val="0"/>
+              </a:spcBef>
+            </a:pPr>
+            <a:r>
+              <a:rPr sz="1200" b="0" i="0">
+                <a:solidFill>
+                  <a:srgbClr val="111111"/>
+                </a:solidFill>
+                <a:latin typeface="Inter"/>
+              </a:rPr>
+              <a:t>#21 “All I want is to concentrate on my development, and dump the code …”</a:t>
+            </a:r>
+          </a:p>
+        </p:txBody>
+      </p:sp>
+      <p:sp>
+        <p:nvSpPr>
+          <p:cNvPr id="21" name="TextBox 20"/>
+          <p:cNvSpPr txBox="1"/>
+          <p:nvPr/>
+        </p:nvSpPr>
+        <p:spPr>
+          <a:xfrm>
+            <a:off x="7208215" y="4819819"/>
+            <a:ext cx="4114800" cy="206532"/>
+          </a:xfrm>
+          <a:prstGeom prst="rect">
+            <a:avLst/>
+          </a:prstGeom>
+          <a:noFill/>
+        </p:spPr>
+        <p:txBody>
+          <a:bodyPr wrap="square" anchor="t" lIns="0" rIns="0" tIns="0" bIns="0"/>
+          <a:lstStyle/>
+          <a:p>
+            <a:pPr algn="l">
+              <a:lnSpc>
+                <a:spcPct val="112000"/>
+              </a:lnSpc>
+              <a:spcBef>
+                <a:spcPts val="0"/>
+              </a:spcBef>
+            </a:pPr>
+            <a:r>
+              <a:rPr sz="1200" b="0" i="0">
+                <a:solidFill>
+                  <a:srgbClr val="111111"/>
+                </a:solidFill>
+                <a:latin typeface="Inter"/>
+              </a:rPr>
+              <a:t>Having the basic needs satisfied by Git GUI tools</a:t>
+            </a:r>
+          </a:p>
+        </p:txBody>
+      </p:sp>
+      <p:sp>
+        <p:nvSpPr>
+          <p:cNvPr id="22" name="Rectangle 21"/>
+          <p:cNvSpPr/>
+          <p:nvPr/>
+        </p:nvSpPr>
+        <p:spPr>
+          <a:xfrm>
+            <a:off x="822960" y="5072071"/>
+            <a:ext cx="10545775" cy="9525"/>
+          </a:xfrm>
+          <a:prstGeom prst="rect">
+            <a:avLst/>
+          </a:prstGeom>
+          <a:solidFill>
+            <a:srgbClr val="D9D9DE"/>
+          </a:solidFill>
+          <a:ln>
+            <a:noFill/>
+          </a:ln>
+        </p:spPr>
+        <p:txBody>
+          <a:bodyPr rtlCol="0" anchor="ctr"/>
+          <a:lstStyle/>
+          <a:p>
+            <a:pPr algn="ctr"/>
+          </a:p>
+        </p:txBody>
+      </p:sp>
+      <p:sp>
+        <p:nvSpPr>
+          <p:cNvPr id="23" name="TextBox 22"/>
+          <p:cNvSpPr txBox="1"/>
+          <p:nvPr/>
+        </p:nvSpPr>
+        <p:spPr>
+          <a:xfrm>
+            <a:off x="868680" y="5117791"/>
+            <a:ext cx="6248095" cy="206532"/>
+          </a:xfrm>
+          <a:prstGeom prst="rect">
+            <a:avLst/>
+          </a:prstGeom>
+          <a:noFill/>
+        </p:spPr>
+        <p:txBody>
+          <a:bodyPr wrap="square" anchor="t" lIns="0" rIns="0" tIns="0" bIns="0"/>
+          <a:lstStyle/>
+          <a:p>
+            <a:pPr algn="l">
+              <a:lnSpc>
+                <a:spcPct val="112000"/>
+              </a:lnSpc>
+              <a:spcBef>
+                <a:spcPts val="0"/>
+              </a:spcBef>
+            </a:pPr>
+            <a:r>
+              <a:rPr sz="1200" b="0" i="0">
+                <a:solidFill>
+                  <a:srgbClr val="111111"/>
+                </a:solidFill>
+                <a:latin typeface="Inter"/>
+              </a:rPr>
+              <a:t>#77 “Git is my VCS of choice, as I’ve learned how it works and have use …”</a:t>
+            </a:r>
+          </a:p>
+        </p:txBody>
+      </p:sp>
+      <p:sp>
+        <p:nvSpPr>
+          <p:cNvPr id="24" name="TextBox 23"/>
+          <p:cNvSpPr txBox="1"/>
+          <p:nvPr/>
+        </p:nvSpPr>
+        <p:spPr>
+          <a:xfrm>
+            <a:off x="7208215" y="5117791"/>
+            <a:ext cx="4114800" cy="206532"/>
+          </a:xfrm>
+          <a:prstGeom prst="rect">
+            <a:avLst/>
+          </a:prstGeom>
+          <a:noFill/>
+        </p:spPr>
+        <p:txBody>
+          <a:bodyPr wrap="square" anchor="t" lIns="0" rIns="0" tIns="0" bIns="0"/>
+          <a:lstStyle/>
+          <a:p>
+            <a:pPr algn="l">
+              <a:lnSpc>
+                <a:spcPct val="112000"/>
+              </a:lnSpc>
+              <a:spcBef>
+                <a:spcPts val="0"/>
+              </a:spcBef>
+            </a:pPr>
+            <a:r>
+              <a:rPr sz="1200" b="0" i="0">
+                <a:solidFill>
+                  <a:srgbClr val="111111"/>
+                </a:solidFill>
+                <a:latin typeface="Inter"/>
+              </a:rPr>
+              <a:t>Learning and improving from practice</a:t>
+            </a:r>
+          </a:p>
+        </p:txBody>
+      </p:sp>
+      <p:sp>
+        <p:nvSpPr>
+          <p:cNvPr id="25" name="Rectangle 24"/>
+          <p:cNvSpPr/>
+          <p:nvPr/>
+        </p:nvSpPr>
+        <p:spPr>
+          <a:xfrm>
+            <a:off x="822960" y="5370043"/>
+            <a:ext cx="10545775" cy="9525"/>
+          </a:xfrm>
+          <a:prstGeom prst="rect">
+            <a:avLst/>
+          </a:prstGeom>
+          <a:solidFill>
+            <a:srgbClr val="D9D9DE"/>
+          </a:solidFill>
+          <a:ln>
+            <a:noFill/>
+          </a:ln>
+        </p:spPr>
+        <p:txBody>
+          <a:bodyPr rtlCol="0" anchor="ctr"/>
+          <a:lstStyle/>
+          <a:p>
+            <a:pPr algn="ctr"/>
+          </a:p>
+        </p:txBody>
+      </p:sp>
+      <p:sp>
+        <p:nvSpPr>
+          <p:cNvPr id="26" name="TextBox 25"/>
+          <p:cNvSpPr txBox="1"/>
+          <p:nvPr/>
+        </p:nvSpPr>
+        <p:spPr>
+          <a:xfrm>
+            <a:off x="868680" y="5415763"/>
+            <a:ext cx="6248095" cy="206532"/>
+          </a:xfrm>
+          <a:prstGeom prst="rect">
+            <a:avLst/>
+          </a:prstGeom>
+          <a:noFill/>
+        </p:spPr>
+        <p:txBody>
+          <a:bodyPr wrap="square" anchor="t" lIns="0" rIns="0" tIns="0" bIns="0"/>
+          <a:lstStyle/>
+          <a:p>
+            <a:pPr algn="l">
+              <a:lnSpc>
+                <a:spcPct val="112000"/>
+              </a:lnSpc>
+              <a:spcBef>
+                <a:spcPts val="0"/>
+              </a:spcBef>
+            </a:pPr>
+            <a:r>
+              <a:rPr sz="1200" b="0" i="0">
+                <a:solidFill>
+                  <a:srgbClr val="111111"/>
+                </a:solidFill>
+                <a:latin typeface="Inter"/>
+              </a:rPr>
+              <a:t>#42 “Years on, I still constantly have to search the internet for help …”</a:t>
+            </a:r>
+          </a:p>
+        </p:txBody>
+      </p:sp>
+      <p:sp>
+        <p:nvSpPr>
+          <p:cNvPr id="27" name="TextBox 26"/>
+          <p:cNvSpPr txBox="1"/>
+          <p:nvPr/>
+        </p:nvSpPr>
+        <p:spPr>
+          <a:xfrm>
+            <a:off x="7208215" y="5415763"/>
+            <a:ext cx="4114800" cy="206532"/>
+          </a:xfrm>
+          <a:prstGeom prst="rect">
+            <a:avLst/>
+          </a:prstGeom>
+          <a:noFill/>
+        </p:spPr>
+        <p:txBody>
+          <a:bodyPr wrap="square" anchor="t" lIns="0" rIns="0" tIns="0" bIns="0"/>
+          <a:lstStyle/>
+          <a:p>
+            <a:pPr algn="l">
+              <a:lnSpc>
+                <a:spcPct val="112000"/>
+              </a:lnSpc>
+              <a:spcBef>
+                <a:spcPts val="0"/>
+              </a:spcBef>
+            </a:pPr>
+            <a:r>
+              <a:rPr sz="1200" b="0" i="0">
+                <a:solidFill>
+                  <a:srgbClr val="111111"/>
+                </a:solidFill>
+                <a:latin typeface="Inter"/>
+              </a:rPr>
+              <a:t>Making the best use of the internet</a:t>
+            </a:r>
+          </a:p>
+        </p:txBody>
+      </p:sp>
+      <p:sp>
+        <p:nvSpPr>
+          <p:cNvPr id="28" name="TextBox 27"/>
+          <p:cNvSpPr txBox="1"/>
+          <p:nvPr/>
+        </p:nvSpPr>
+        <p:spPr>
+          <a:xfrm>
+            <a:off x="822960" y="6022158"/>
+            <a:ext cx="10545775" cy="378642"/>
+          </a:xfrm>
+          <a:prstGeom prst="rect">
+            <a:avLst/>
+          </a:prstGeom>
+          <a:noFill/>
+        </p:spPr>
+        <p:txBody>
+          <a:bodyPr wrap="square" anchor="t" lIns="0" rIns="0" tIns="0" bIns="0"/>
+          <a:lstStyle/>
+          <a:p>
+            <a:pPr algn="l">
+              <a:lnSpc>
+                <a:spcPct val="112000"/>
+              </a:lnSpc>
+              <a:spcBef>
+                <a:spcPts val="0"/>
+              </a:spcBef>
+            </a:pPr>
+            <a:r>
+              <a:rPr sz="2200" b="0" i="1">
+                <a:solidFill>
+                  <a:srgbClr val="707078"/>
+                </a:solidFill>
+                <a:latin typeface="Inter"/>
+              </a:rPr>
+              <a:t>What would make Table 8 trustworthy?</a:t>
             </a:r>
           </a:p>
         </p:txBody>
@@ -8599,6 +8892,149 @@
 </file>
 
 <file path=ppt/slides/slide14.xml><?xml version="1.0" encoding="utf-8"?>
+<p:sld xmlns:a="http://schemas.openxmlformats.org/drawingml/2006/main" xmlns:p="http://schemas.openxmlformats.org/presentationml/2006/main" xmlns:r="http://schemas.openxmlformats.org/officeDocument/2006/relationships">
+  <p:cSld>
+    <p:bg>
+      <p:bgPr>
+        <a:solidFill>
+          <a:srgbClr val="FFFFFF"/>
+        </a:solidFill>
+        <a:effectLst/>
+      </p:bgPr>
+    </p:bg>
+    <p:spTree>
+      <p:nvGrpSpPr>
+        <p:cNvPr id="1" name=""/>
+        <p:cNvGrpSpPr/>
+        <p:nvPr/>
+      </p:nvGrpSpPr>
+      <p:grpSpPr/>
+      <p:sp>
+        <p:nvSpPr>
+          <p:cNvPr id="2" name="TextBox 1"/>
+          <p:cNvSpPr txBox="1"/>
+          <p:nvPr/>
+        </p:nvSpPr>
+        <p:spPr>
+          <a:xfrm>
+            <a:off x="822960" y="502920"/>
+            <a:ext cx="10545775" cy="320040"/>
+          </a:xfrm>
+          <a:prstGeom prst="rect">
+            <a:avLst/>
+          </a:prstGeom>
+          <a:noFill/>
+        </p:spPr>
+        <p:txBody>
+          <a:bodyPr wrap="square" anchor="t" lIns="0" rIns="0" tIns="0" bIns="0"/>
+          <a:lstStyle/>
+          <a:p>
+            <a:pPr algn="l">
+              <a:lnSpc>
+                <a:spcPct val="110000"/>
+              </a:lnSpc>
+            </a:pPr>
+            <a:r>
+              <a:rPr sz="1600" b="1">
+                <a:solidFill>
+                  <a:srgbClr val="8B3DFF"/>
+                </a:solidFill>
+                <a:latin typeface="Inter"/>
+              </a:rPr>
+              <a:t>BREAK</a:t>
+            </a:r>
+          </a:p>
+        </p:txBody>
+      </p:sp>
+      <p:sp>
+        <p:nvSpPr>
+          <p:cNvPr id="3" name="TextBox 2"/>
+          <p:cNvSpPr txBox="1"/>
+          <p:nvPr/>
+        </p:nvSpPr>
+        <p:spPr>
+          <a:xfrm>
+            <a:off x="822960" y="2103120"/>
+            <a:ext cx="10545775" cy="1135928"/>
+          </a:xfrm>
+          <a:prstGeom prst="rect">
+            <a:avLst/>
+          </a:prstGeom>
+          <a:noFill/>
+        </p:spPr>
+        <p:txBody>
+          <a:bodyPr wrap="square" anchor="t" lIns="0" rIns="0" tIns="0" bIns="0"/>
+          <a:lstStyle/>
+          <a:p>
+            <a:pPr algn="l">
+              <a:lnSpc>
+                <a:spcPct val="112000"/>
+              </a:lnSpc>
+              <a:spcBef>
+                <a:spcPts val="0"/>
+              </a:spcBef>
+            </a:pPr>
+            <a:r>
+              <a:rPr sz="6600" b="1" i="0">
+                <a:solidFill>
+                  <a:srgbClr val="111111"/>
+                </a:solidFill>
+                <a:latin typeface="Inter"/>
+              </a:rPr>
+              <a:t>Break</a:t>
+            </a:r>
+          </a:p>
+        </p:txBody>
+      </p:sp>
+      <p:sp>
+        <p:nvSpPr>
+          <p:cNvPr id="4" name="TextBox 3"/>
+          <p:cNvSpPr txBox="1"/>
+          <p:nvPr/>
+        </p:nvSpPr>
+        <p:spPr>
+          <a:xfrm>
+            <a:off x="822960" y="3559088"/>
+            <a:ext cx="8647535" cy="447487"/>
+          </a:xfrm>
+          <a:prstGeom prst="rect">
+            <a:avLst/>
+          </a:prstGeom>
+          <a:noFill/>
+        </p:spPr>
+        <p:txBody>
+          <a:bodyPr wrap="square" anchor="t" lIns="0" rIns="0" tIns="0" bIns="0"/>
+          <a:lstStyle/>
+          <a:p>
+            <a:pPr algn="l">
+              <a:lnSpc>
+                <a:spcPct val="112000"/>
+              </a:lnSpc>
+              <a:spcBef>
+                <a:spcPts val="0"/>
+              </a:spcBef>
+            </a:pPr>
+            <a:r>
+              <a:rPr sz="2600" b="0" i="0">
+                <a:solidFill>
+                  <a:srgbClr val="707078"/>
+                </a:solidFill>
+                <a:latin typeface="Inter"/>
+              </a:rPr>
+              <a:t>5 minutes. Then groups.</a:t>
+            </a:r>
+          </a:p>
+        </p:txBody>
+      </p:sp>
+    </p:spTree>
+  </p:cSld>
+  <p:clrMapOvr>
+    <a:masterClrMapping/>
+  </p:clrMapOvr>
+</p:sld>
+</file>
+
+<file path=ppt/slides/slide15.xml><?xml version="1.0" encoding="utf-8"?>
 <p:sld xmlns:a="http://schemas.openxmlformats.org/drawingml/2006/main" xmlns:p="http://schemas.openxmlformats.org/presentationml/2006/main" xmlns:r="http://schemas.openxmlformats.org/officeDocument/2006/relationships">
   <p:cSld>
     <p:bg>
@@ -8689,7 +9125,7 @@
                 </a:solidFill>
                 <a:latin typeface="Inter"/>
               </a:rPr>
-              <a:t>8 min</a:t>
+              <a:t>7 min</a:t>
             </a:r>
           </a:p>
         </p:txBody>
@@ -8769,7 +9205,7 @@
                 </a:solidFill>
                 <a:latin typeface="Inter"/>
               </a:rPr>
-              <a:t>Your group gets one of the paper’s claims.</a:t>
+              <a:t>Your group gets one of the paper’s claims. One person types.</a:t>
             </a:r>
           </a:p>
           <a:p>
@@ -9020,7 +9456,7 @@
         <p:spPr>
           <a:xfrm>
             <a:off x="822960" y="4716574"/>
-            <a:ext cx="5181447" cy="1055827"/>
+            <a:ext cx="5181447" cy="1572158"/>
           </a:xfrm>
           <a:prstGeom prst="roundRect">
             <a:avLst>
@@ -9129,7 +9565,7 @@
         <p:spPr>
           <a:xfrm>
             <a:off x="6187287" y="4716574"/>
-            <a:ext cx="5181447" cy="1055827"/>
+            <a:ext cx="5181447" cy="1572158"/>
           </a:xfrm>
           <a:prstGeom prst="roundRect">
             <a:avLst>
@@ -9184,7 +9620,7 @@
                 </a:solidFill>
                 <a:latin typeface="Inter"/>
               </a:rPr>
-              <a:t>CONCLUSION, §7</a:t>
+              <a:t>§3.5</a:t>
             </a:r>
           </a:p>
         </p:txBody>
@@ -9198,7 +9634,7 @@
         <p:spPr>
           <a:xfrm>
             <a:off x="6370167" y="5073190"/>
-            <a:ext cx="4815687" cy="516331"/>
+            <a:ext cx="4815687" cy="1032662"/>
           </a:xfrm>
           <a:prstGeom prst="rect">
             <a:avLst/>
@@ -9224,702 +9660,7 @@
                 </a:solidFill>
                 <a:latin typeface="Inter"/>
               </a:rPr>
-              <a:t>“the number of questions related to Git commands has been growing steadily”</a:t>
-            </a:r>
-          </a:p>
-        </p:txBody>
-      </p:sp>
-    </p:spTree>
-  </p:cSld>
-  <p:clrMapOvr>
-    <a:masterClrMapping/>
-  </p:clrMapOvr>
-</p:sld>
-</file>
-
-<file path=ppt/slides/slide15.xml><?xml version="1.0" encoding="utf-8"?>
-<p:sld xmlns:a="http://schemas.openxmlformats.org/drawingml/2006/main" xmlns:p="http://schemas.openxmlformats.org/presentationml/2006/main" xmlns:r="http://schemas.openxmlformats.org/officeDocument/2006/relationships">
-  <p:cSld>
-    <p:bg>
-      <p:bgPr>
-        <a:solidFill>
-          <a:srgbClr val="FFFFFF"/>
-        </a:solidFill>
-        <a:effectLst/>
-      </p:bgPr>
-    </p:bg>
-    <p:spTree>
-      <p:nvGrpSpPr>
-        <p:cNvPr id="1" name=""/>
-        <p:cNvGrpSpPr/>
-        <p:nvPr/>
-      </p:nvGrpSpPr>
-      <p:grpSpPr/>
-      <p:sp>
-        <p:nvSpPr>
-          <p:cNvPr id="2" name="TextBox 1"/>
-          <p:cNvSpPr txBox="1"/>
-          <p:nvPr/>
-        </p:nvSpPr>
-        <p:spPr>
-          <a:xfrm>
-            <a:off x="822960" y="502920"/>
-            <a:ext cx="10545775" cy="320040"/>
-          </a:xfrm>
-          <a:prstGeom prst="rect">
-            <a:avLst/>
-          </a:prstGeom>
-          <a:noFill/>
-        </p:spPr>
-        <p:txBody>
-          <a:bodyPr wrap="square" anchor="t" lIns="0" rIns="0" tIns="0" bIns="0"/>
-          <a:lstStyle/>
-          <a:p>
-            <a:pPr algn="l">
-              <a:lnSpc>
-                <a:spcPct val="110000"/>
-              </a:lnSpc>
-            </a:pPr>
-            <a:r>
-              <a:rPr sz="1600" b="1">
-                <a:solidFill>
-                  <a:srgbClr val="8B3DFF"/>
-                </a:solidFill>
-                <a:latin typeface="Inter"/>
-              </a:rPr>
-              <a:t>4 · DO YOU BELIEVE IT?</a:t>
-            </a:r>
-          </a:p>
-        </p:txBody>
-      </p:sp>
-      <p:sp>
-        <p:nvSpPr>
-          <p:cNvPr id="3" name="TextBox 2"/>
-          <p:cNvSpPr txBox="1"/>
-          <p:nvPr/>
-        </p:nvSpPr>
-        <p:spPr>
-          <a:xfrm>
-            <a:off x="822960" y="868680"/>
-            <a:ext cx="10545775" cy="688441"/>
-          </a:xfrm>
-          <a:prstGeom prst="rect">
-            <a:avLst/>
-          </a:prstGeom>
-          <a:noFill/>
-        </p:spPr>
-        <p:txBody>
-          <a:bodyPr wrap="square" anchor="t" lIns="0" rIns="0" tIns="0" bIns="0"/>
-          <a:lstStyle/>
-          <a:p>
-            <a:pPr algn="l">
-              <a:lnSpc>
-                <a:spcPct val="112000"/>
-              </a:lnSpc>
-              <a:spcBef>
-                <a:spcPts val="0"/>
-              </a:spcBef>
-            </a:pPr>
-            <a:r>
-              <a:rPr sz="4000" b="1" i="0">
-                <a:solidFill>
-                  <a:srgbClr val="111111"/>
-                </a:solidFill>
-                <a:latin typeface="Inter"/>
-              </a:rPr>
-              <a:t>The verdicts (1/2)</a:t>
-            </a:r>
-          </a:p>
-        </p:txBody>
-      </p:sp>
-      <p:sp>
-        <p:nvSpPr>
-          <p:cNvPr id="4" name="TextBox 3"/>
-          <p:cNvSpPr txBox="1"/>
-          <p:nvPr/>
-        </p:nvSpPr>
-        <p:spPr>
-          <a:xfrm>
-            <a:off x="822960" y="1831441"/>
-            <a:ext cx="10545775" cy="619597"/>
-          </a:xfrm>
-          <a:prstGeom prst="rect">
-            <a:avLst/>
-          </a:prstGeom>
-          <a:noFill/>
-        </p:spPr>
-        <p:txBody>
-          <a:bodyPr wrap="square" anchor="t" lIns="0" rIns="0" tIns="0" bIns="0"/>
-          <a:lstStyle/>
-          <a:p>
-            <a:pPr algn="l">
-              <a:lnSpc>
-                <a:spcPct val="112000"/>
-              </a:lnSpc>
-              <a:spcBef>
-                <a:spcPts val="0"/>
-              </a:spcBef>
-            </a:pPr>
-            <a:r>
-              <a:rPr sz="1800" b="0" i="0">
-                <a:solidFill>
-                  <a:srgbClr val="111111"/>
-                </a:solidFill>
-                <a:latin typeface="Inter"/>
-              </a:rPr>
-              <a:t>The title asks whether developers know how to use Git commands. Nothing in the paper watches anyone use one.</a:t>
-            </a:r>
-          </a:p>
-        </p:txBody>
-      </p:sp>
-      <p:sp>
-        <p:nvSpPr>
-          <p:cNvPr id="5" name="Rounded Rectangle 4"/>
-          <p:cNvSpPr/>
-          <p:nvPr/>
-        </p:nvSpPr>
-        <p:spPr>
-          <a:xfrm>
-            <a:off x="822960" y="2679638"/>
-            <a:ext cx="5181447" cy="3085692"/>
-          </a:xfrm>
-          <a:prstGeom prst="roundRect">
-            <a:avLst>
-              <a:gd name="adj" fmla="val 6000"/>
-            </a:avLst>
-          </a:prstGeom>
-          <a:solidFill>
-            <a:srgbClr val="FFFFFF"/>
-          </a:solidFill>
-          <a:ln w="19050">
-            <a:solidFill>
-              <a:srgbClr val="D9D9DE"/>
-            </a:solidFill>
-          </a:ln>
-          <a:effectLst/>
-        </p:spPr>
-        <p:txBody>
-          <a:bodyPr rtlCol="0" anchor="ctr"/>
-          <a:lstStyle/>
-          <a:p/>
-        </p:txBody>
-      </p:sp>
-      <p:sp>
-        <p:nvSpPr>
-          <p:cNvPr id="6" name="TextBox 5"/>
-          <p:cNvSpPr txBox="1"/>
-          <p:nvPr/>
-        </p:nvSpPr>
-        <p:spPr>
-          <a:xfrm>
-            <a:off x="1005840" y="2816798"/>
-            <a:ext cx="4815687" cy="774496"/>
-          </a:xfrm>
-          <a:prstGeom prst="rect">
-            <a:avLst/>
-          </a:prstGeom>
-          <a:noFill/>
-        </p:spPr>
-        <p:txBody>
-          <a:bodyPr wrap="square" anchor="t" lIns="0" rIns="0" tIns="0" bIns="0"/>
-          <a:lstStyle/>
-          <a:p>
-            <a:pPr algn="l">
-              <a:lnSpc>
-                <a:spcPct val="112000"/>
-              </a:lnSpc>
-              <a:spcBef>
-                <a:spcPts val="0"/>
-              </a:spcBef>
-            </a:pPr>
-            <a:r>
-              <a:rPr sz="1500" b="0" i="1">
-                <a:solidFill>
-                  <a:srgbClr val="111111"/>
-                </a:solidFill>
-                <a:latin typeface="Inter"/>
-              </a:rPr>
-              <a:t>“This suggests that even developers with years of development experience can have trouble using Git commands.”</a:t>
-            </a:r>
-          </a:p>
-        </p:txBody>
-      </p:sp>
-      <p:sp>
-        <p:nvSpPr>
-          <p:cNvPr id="7" name="TextBox 6"/>
-          <p:cNvSpPr txBox="1"/>
-          <p:nvPr/>
-        </p:nvSpPr>
-        <p:spPr>
-          <a:xfrm>
-            <a:off x="1005840" y="3682734"/>
-            <a:ext cx="4815687" cy="201168"/>
-          </a:xfrm>
-          <a:prstGeom prst="rect">
-            <a:avLst/>
-          </a:prstGeom>
-          <a:noFill/>
-        </p:spPr>
-        <p:txBody>
-          <a:bodyPr wrap="square" anchor="t" lIns="0" rIns="0" tIns="0" bIns="0"/>
-          <a:lstStyle/>
-          <a:p>
-            <a:pPr algn="l">
-              <a:lnSpc>
-                <a:spcPct val="110000"/>
-              </a:lnSpc>
-            </a:pPr>
-            <a:r>
-              <a:rPr sz="1100" b="1">
-                <a:solidFill>
-                  <a:srgbClr val="707078"/>
-                </a:solidFill>
-                <a:latin typeface="Inter"/>
-              </a:rPr>
-              <a:t>THEY MEASURED</a:t>
-            </a:r>
-          </a:p>
-        </p:txBody>
-      </p:sp>
-      <p:sp>
-        <p:nvSpPr>
-          <p:cNvPr id="8" name="TextBox 7"/>
-          <p:cNvSpPr txBox="1"/>
-          <p:nvPr/>
-        </p:nvSpPr>
-        <p:spPr>
-          <a:xfrm>
-            <a:off x="1005840" y="3902190"/>
-            <a:ext cx="4815687" cy="240954"/>
-          </a:xfrm>
-          <a:prstGeom prst="rect">
-            <a:avLst/>
-          </a:prstGeom>
-          <a:noFill/>
-        </p:spPr>
-        <p:txBody>
-          <a:bodyPr wrap="square" anchor="t" lIns="0" rIns="0" tIns="0" bIns="0"/>
-          <a:lstStyle/>
-          <a:p>
-            <a:pPr algn="l">
-              <a:lnSpc>
-                <a:spcPct val="112000"/>
-              </a:lnSpc>
-              <a:spcBef>
-                <a:spcPts val="0"/>
-              </a:spcBef>
-            </a:pPr>
-            <a:r>
-              <a:rPr sz="1400" b="0" i="0">
-                <a:solidFill>
-                  <a:srgbClr val="111111"/>
-                </a:solidFill>
-                <a:latin typeface="Inter"/>
-              </a:rPr>
-              <a:t>Years since the asker registered on Stack Overflow.</a:t>
-            </a:r>
-          </a:p>
-        </p:txBody>
-      </p:sp>
-      <p:sp>
-        <p:nvSpPr>
-          <p:cNvPr id="9" name="Rounded Rectangle 8"/>
-          <p:cNvSpPr/>
-          <p:nvPr/>
-        </p:nvSpPr>
-        <p:spPr>
-          <a:xfrm>
-            <a:off x="1005840" y="4234584"/>
-            <a:ext cx="4815687" cy="865957"/>
-          </a:xfrm>
-          <a:prstGeom prst="roundRect">
-            <a:avLst>
-              <a:gd name="adj" fmla="val 10000"/>
-            </a:avLst>
-          </a:prstGeom>
-          <a:solidFill>
-            <a:srgbClr val="F4ECFB"/>
-          </a:solidFill>
-          <a:ln>
-            <a:noFill/>
-          </a:ln>
-          <a:effectLst/>
-        </p:spPr>
-        <p:txBody>
-          <a:bodyPr rtlCol="0" anchor="ctr"/>
-          <a:lstStyle/>
-          <a:p/>
-        </p:txBody>
-      </p:sp>
-      <p:sp>
-        <p:nvSpPr>
-          <p:cNvPr id="10" name="TextBox 9"/>
-          <p:cNvSpPr txBox="1"/>
-          <p:nvPr/>
-        </p:nvSpPr>
-        <p:spPr>
-          <a:xfrm>
-            <a:off x="1097280" y="4289448"/>
-            <a:ext cx="4815687" cy="228600"/>
-          </a:xfrm>
-          <a:prstGeom prst="rect">
-            <a:avLst/>
-          </a:prstGeom>
-          <a:noFill/>
-        </p:spPr>
-        <p:txBody>
-          <a:bodyPr wrap="square" anchor="t" lIns="0" rIns="0" tIns="0" bIns="0"/>
-          <a:lstStyle/>
-          <a:p>
-            <a:pPr algn="l">
-              <a:lnSpc>
-                <a:spcPct val="110000"/>
-              </a:lnSpc>
-            </a:pPr>
-            <a:r>
-              <a:rPr sz="1100" b="1">
-                <a:solidFill>
-                  <a:srgbClr val="8B3DFF"/>
-                </a:solidFill>
-                <a:latin typeface="Inter"/>
-              </a:rPr>
-              <a:t>THE DATA SUPPORTS</a:t>
-            </a:r>
-          </a:p>
-        </p:txBody>
-      </p:sp>
-      <p:sp>
-        <p:nvSpPr>
-          <p:cNvPr id="11" name="TextBox 10"/>
-          <p:cNvSpPr txBox="1"/>
-          <p:nvPr/>
-        </p:nvSpPr>
-        <p:spPr>
-          <a:xfrm>
-            <a:off x="1097280" y="4508904"/>
-            <a:ext cx="4632807" cy="481909"/>
-          </a:xfrm>
-          <a:prstGeom prst="rect">
-            <a:avLst/>
-          </a:prstGeom>
-          <a:noFill/>
-        </p:spPr>
-        <p:txBody>
-          <a:bodyPr wrap="square" anchor="t" lIns="0" rIns="0" tIns="0" bIns="0"/>
-          <a:lstStyle/>
-          <a:p>
-            <a:pPr algn="l">
-              <a:lnSpc>
-                <a:spcPct val="112000"/>
-              </a:lnSpc>
-              <a:spcBef>
-                <a:spcPts val="0"/>
-              </a:spcBef>
-            </a:pPr>
-            <a:r>
-              <a:rPr sz="1400" b="0" i="0">
-                <a:solidFill>
-                  <a:srgbClr val="111111"/>
-                </a:solidFill>
-                <a:latin typeface="Inter"/>
-              </a:rPr>
-              <a:t>Many Git questions come from Stack Overflow accounts that are years old.</a:t>
-            </a:r>
-          </a:p>
-        </p:txBody>
-      </p:sp>
-      <p:sp>
-        <p:nvSpPr>
-          <p:cNvPr id="12" name="Rounded Rectangle 11"/>
-          <p:cNvSpPr/>
-          <p:nvPr/>
-        </p:nvSpPr>
-        <p:spPr>
-          <a:xfrm>
-            <a:off x="6187287" y="2679638"/>
-            <a:ext cx="5181447" cy="3085692"/>
-          </a:xfrm>
-          <a:prstGeom prst="roundRect">
-            <a:avLst>
-              <a:gd name="adj" fmla="val 6000"/>
-            </a:avLst>
-          </a:prstGeom>
-          <a:solidFill>
-            <a:srgbClr val="FFFFFF"/>
-          </a:solidFill>
-          <a:ln w="19050">
-            <a:solidFill>
-              <a:srgbClr val="D9D9DE"/>
-            </a:solidFill>
-          </a:ln>
-          <a:effectLst/>
-        </p:spPr>
-        <p:txBody>
-          <a:bodyPr rtlCol="0" anchor="ctr"/>
-          <a:lstStyle/>
-          <a:p/>
-        </p:txBody>
-      </p:sp>
-      <p:sp>
-        <p:nvSpPr>
-          <p:cNvPr id="13" name="TextBox 12"/>
-          <p:cNvSpPr txBox="1"/>
-          <p:nvPr/>
-        </p:nvSpPr>
-        <p:spPr>
-          <a:xfrm>
-            <a:off x="6370167" y="2816798"/>
-            <a:ext cx="4815687" cy="774496"/>
-          </a:xfrm>
-          <a:prstGeom prst="rect">
-            <a:avLst/>
-          </a:prstGeom>
-          <a:noFill/>
-        </p:spPr>
-        <p:txBody>
-          <a:bodyPr wrap="square" anchor="t" lIns="0" rIns="0" tIns="0" bIns="0"/>
-          <a:lstStyle/>
-          <a:p>
-            <a:pPr algn="l">
-              <a:lnSpc>
-                <a:spcPct val="112000"/>
-              </a:lnSpc>
-              <a:spcBef>
-                <a:spcPts val="0"/>
-              </a:spcBef>
-            </a:pPr>
-            <a:r>
-              <a:rPr sz="1500" b="0" i="1">
-                <a:solidFill>
-                  <a:srgbClr val="111111"/>
-                </a:solidFill>
-                <a:latin typeface="Inter"/>
-              </a:rPr>
-              <a:t>“…for the more frequently-used commands, git credential and git submodule are among the most difficult ones.”</a:t>
-            </a:r>
-          </a:p>
-        </p:txBody>
-      </p:sp>
-      <p:sp>
-        <p:nvSpPr>
-          <p:cNvPr id="14" name="TextBox 13"/>
-          <p:cNvSpPr txBox="1"/>
-          <p:nvPr/>
-        </p:nvSpPr>
-        <p:spPr>
-          <a:xfrm>
-            <a:off x="6370167" y="3682734"/>
-            <a:ext cx="4815687" cy="201168"/>
-          </a:xfrm>
-          <a:prstGeom prst="rect">
-            <a:avLst/>
-          </a:prstGeom>
-          <a:noFill/>
-        </p:spPr>
-        <p:txBody>
-          <a:bodyPr wrap="square" anchor="t" lIns="0" rIns="0" tIns="0" bIns="0"/>
-          <a:lstStyle/>
-          <a:p>
-            <a:pPr algn="l">
-              <a:lnSpc>
-                <a:spcPct val="110000"/>
-              </a:lnSpc>
-            </a:pPr>
-            <a:r>
-              <a:rPr sz="1100" b="1">
-                <a:solidFill>
-                  <a:srgbClr val="707078"/>
-                </a:solidFill>
-                <a:latin typeface="Inter"/>
-              </a:rPr>
-              <a:t>THEY MEASURED</a:t>
-            </a:r>
-          </a:p>
-        </p:txBody>
-      </p:sp>
-      <p:sp>
-        <p:nvSpPr>
-          <p:cNvPr id="15" name="TextBox 14"/>
-          <p:cNvSpPr txBox="1"/>
-          <p:nvPr/>
-        </p:nvSpPr>
-        <p:spPr>
-          <a:xfrm>
-            <a:off x="6370167" y="3902190"/>
-            <a:ext cx="4815687" cy="481909"/>
-          </a:xfrm>
-          <a:prstGeom prst="rect">
-            <a:avLst/>
-          </a:prstGeom>
-          <a:noFill/>
-        </p:spPr>
-        <p:txBody>
-          <a:bodyPr wrap="square" anchor="t" lIns="0" rIns="0" tIns="0" bIns="0"/>
-          <a:lstStyle/>
-          <a:p>
-            <a:pPr algn="l">
-              <a:lnSpc>
-                <a:spcPct val="112000"/>
-              </a:lnSpc>
-              <a:spcBef>
-                <a:spcPts val="0"/>
-              </a:spcBef>
-            </a:pPr>
-            <a:r>
-              <a:rPr sz="1400" b="0" i="0">
-                <a:solidFill>
-                  <a:srgbClr val="111111"/>
-                </a:solidFill>
-                <a:latin typeface="Inter"/>
-              </a:rPr>
-              <a:t>The share of a command’s questions where the asker never marked an answer as accepted.</a:t>
-            </a:r>
-          </a:p>
-        </p:txBody>
-      </p:sp>
-      <p:sp>
-        <p:nvSpPr>
-          <p:cNvPr id="16" name="Rounded Rectangle 15"/>
-          <p:cNvSpPr/>
-          <p:nvPr/>
-        </p:nvSpPr>
-        <p:spPr>
-          <a:xfrm>
-            <a:off x="6370167" y="4475539"/>
-            <a:ext cx="4815687" cy="1106911"/>
-          </a:xfrm>
-          <a:prstGeom prst="roundRect">
-            <a:avLst>
-              <a:gd name="adj" fmla="val 10000"/>
-            </a:avLst>
-          </a:prstGeom>
-          <a:solidFill>
-            <a:srgbClr val="F4ECFB"/>
-          </a:solidFill>
-          <a:ln>
-            <a:noFill/>
-          </a:ln>
-          <a:effectLst/>
-        </p:spPr>
-        <p:txBody>
-          <a:bodyPr rtlCol="0" anchor="ctr"/>
-          <a:lstStyle/>
-          <a:p/>
-        </p:txBody>
-      </p:sp>
-      <p:sp>
-        <p:nvSpPr>
-          <p:cNvPr id="17" name="TextBox 16"/>
-          <p:cNvSpPr txBox="1"/>
-          <p:nvPr/>
-        </p:nvSpPr>
-        <p:spPr>
-          <a:xfrm>
-            <a:off x="6461607" y="4530403"/>
-            <a:ext cx="4815687" cy="228600"/>
-          </a:xfrm>
-          <a:prstGeom prst="rect">
-            <a:avLst/>
-          </a:prstGeom>
-          <a:noFill/>
-        </p:spPr>
-        <p:txBody>
-          <a:bodyPr wrap="square" anchor="t" lIns="0" rIns="0" tIns="0" bIns="0"/>
-          <a:lstStyle/>
-          <a:p>
-            <a:pPr algn="l">
-              <a:lnSpc>
-                <a:spcPct val="110000"/>
-              </a:lnSpc>
-            </a:pPr>
-            <a:r>
-              <a:rPr sz="1100" b="1">
-                <a:solidFill>
-                  <a:srgbClr val="8B3DFF"/>
-                </a:solidFill>
-                <a:latin typeface="Inter"/>
-              </a:rPr>
-              <a:t>THE DATA SUPPORTS</a:t>
-            </a:r>
-          </a:p>
-        </p:txBody>
-      </p:sp>
-      <p:sp>
-        <p:nvSpPr>
-          <p:cNvPr id="18" name="TextBox 17"/>
-          <p:cNvSpPr txBox="1"/>
-          <p:nvPr/>
-        </p:nvSpPr>
-        <p:spPr>
-          <a:xfrm>
-            <a:off x="6461607" y="4749859"/>
-            <a:ext cx="4632807" cy="722863"/>
-          </a:xfrm>
-          <a:prstGeom prst="rect">
-            <a:avLst/>
-          </a:prstGeom>
-          <a:noFill/>
-        </p:spPr>
-        <p:txBody>
-          <a:bodyPr wrap="square" anchor="t" lIns="0" rIns="0" tIns="0" bIns="0"/>
-          <a:lstStyle/>
-          <a:p>
-            <a:pPr algn="l">
-              <a:lnSpc>
-                <a:spcPct val="112000"/>
-              </a:lnSpc>
-              <a:spcBef>
-                <a:spcPts val="0"/>
-              </a:spcBef>
-            </a:pPr>
-            <a:r>
-              <a:rPr sz="1400" b="0" i="0">
-                <a:solidFill>
-                  <a:srgbClr val="111111"/>
-                </a:solidFill>
-                <a:latin typeface="Inter"/>
-              </a:rPr>
-              <a:t>These questions end without an accepted answer more often (43.0%, 37.5%) than Git questions overall (36.5%, our re-run).</a:t>
-            </a:r>
-          </a:p>
-        </p:txBody>
-      </p:sp>
-      <p:sp>
-        <p:nvSpPr>
-          <p:cNvPr id="19" name="TextBox 18"/>
-          <p:cNvSpPr txBox="1"/>
-          <p:nvPr/>
-        </p:nvSpPr>
-        <p:spPr>
-          <a:xfrm>
-            <a:off x="822960" y="6022158"/>
-            <a:ext cx="10545775" cy="378642"/>
-          </a:xfrm>
-          <a:prstGeom prst="rect">
-            <a:avLst/>
-          </a:prstGeom>
-          <a:noFill/>
-        </p:spPr>
-        <p:txBody>
-          <a:bodyPr wrap="square" anchor="t" lIns="0" rIns="0" tIns="0" bIns="0"/>
-          <a:lstStyle/>
-          <a:p>
-            <a:pPr algn="l">
-              <a:lnSpc>
-                <a:spcPct val="112000"/>
-              </a:lnSpc>
-              <a:spcBef>
-                <a:spcPts val="0"/>
-              </a:spcBef>
-            </a:pPr>
-            <a:r>
-              <a:rPr sz="2200" b="0" i="1">
-                <a:solidFill>
-                  <a:srgbClr val="707078"/>
-                </a:solidFill>
-                <a:latin typeface="Inter"/>
-              </a:rPr>
-              <a:t>Which claim survives best?</a:t>
+              <a:t>“This result, although surprising, is consistent with the conclusion we obtained in RQ2, indicating that even experienced developers still have doubts about Git usage.”</a:t>
             </a:r>
           </a:p>
         </p:txBody>
@@ -10022,7 +9763,7 @@
                 </a:solidFill>
                 <a:latin typeface="Inter"/>
               </a:rPr>
-              <a:t>The verdicts (2/2)</a:t>
+              <a:t>The verdicts (1/2)</a:t>
             </a:r>
           </a:p>
         </p:txBody>
@@ -10076,7 +9817,7 @@
         <p:spPr>
           <a:xfrm>
             <a:off x="822960" y="2679638"/>
-            <a:ext cx="5181447" cy="2827527"/>
+            <a:ext cx="5181447" cy="2533842"/>
           </a:xfrm>
           <a:prstGeom prst="roundRect">
             <a:avLst>
@@ -10108,7 +9849,7 @@
         <p:spPr>
           <a:xfrm>
             <a:off x="1005840" y="2816798"/>
-            <a:ext cx="4815687" cy="258165"/>
+            <a:ext cx="4815687" cy="774496"/>
           </a:xfrm>
           <a:prstGeom prst="rect">
             <a:avLst/>
@@ -10134,97 +9875,20 @@
                 </a:solidFill>
                 <a:latin typeface="Inter"/>
               </a:rPr>
-              <a:t>“Self-learning is the primary learning approach.”</a:t>
-            </a:r>
-          </a:p>
-        </p:txBody>
-      </p:sp>
-      <p:sp>
-        <p:nvSpPr>
-          <p:cNvPr id="7" name="TextBox 6"/>
-          <p:cNvSpPr txBox="1"/>
-          <p:nvPr/>
-        </p:nvSpPr>
-        <p:spPr>
-          <a:xfrm>
-            <a:off x="1005840" y="3166403"/>
-            <a:ext cx="4815687" cy="201168"/>
-          </a:xfrm>
-          <a:prstGeom prst="rect">
-            <a:avLst/>
-          </a:prstGeom>
-          <a:noFill/>
-        </p:spPr>
-        <p:txBody>
-          <a:bodyPr wrap="square" anchor="t" lIns="0" rIns="0" tIns="0" bIns="0"/>
-          <a:lstStyle/>
-          <a:p>
-            <a:pPr algn="l">
-              <a:lnSpc>
-                <a:spcPct val="110000"/>
-              </a:lnSpc>
-            </a:pPr>
-            <a:r>
-              <a:rPr sz="1100" b="1">
-                <a:solidFill>
-                  <a:srgbClr val="707078"/>
-                </a:solidFill>
-                <a:latin typeface="Inter"/>
-              </a:rPr>
-              <a:t>THEY MEASURED</a:t>
-            </a:r>
-          </a:p>
-        </p:txBody>
-      </p:sp>
-      <p:sp>
-        <p:nvSpPr>
-          <p:cNvPr id="8" name="TextBox 7"/>
-          <p:cNvSpPr txBox="1"/>
-          <p:nvPr/>
-        </p:nvSpPr>
-        <p:spPr>
-          <a:xfrm>
-            <a:off x="1005840" y="3385859"/>
-            <a:ext cx="4815687" cy="722863"/>
-          </a:xfrm>
-          <a:prstGeom prst="rect">
-            <a:avLst/>
-          </a:prstGeom>
-          <a:noFill/>
-        </p:spPr>
-        <p:txBody>
-          <a:bodyPr wrap="square" anchor="t" lIns="0" rIns="0" tIns="0" bIns="0"/>
-          <a:lstStyle/>
-          <a:p>
-            <a:pPr algn="l">
-              <a:lnSpc>
-                <a:spcPct val="112000"/>
-              </a:lnSpc>
-              <a:spcBef>
-                <a:spcPts val="0"/>
-              </a:spcBef>
-            </a:pPr>
-            <a:r>
-              <a:rPr sz="1400" b="0" i="0">
-                <a:solidFill>
-                  <a:srgbClr val="111111"/>
-                </a:solidFill>
-                <a:latin typeface="Inter"/>
-              </a:rPr>
-              <a:t>What 92 of 508 invited people ticked. The practitioners invited had recently asked a Git question on Stack Overflow.</a:t>
-            </a:r>
-          </a:p>
-        </p:txBody>
-      </p:sp>
-      <p:sp>
-        <p:nvSpPr>
-          <p:cNvPr id="9" name="Rounded Rectangle 8"/>
+              <a:t>“This suggests that even developers with years of development experience can have trouble using Git commands.”</a:t>
+            </a:r>
+          </a:p>
+        </p:txBody>
+      </p:sp>
+      <p:sp>
+        <p:nvSpPr>
+          <p:cNvPr id="7" name="Rounded Rectangle 6"/>
           <p:cNvSpPr/>
           <p:nvPr/>
         </p:nvSpPr>
         <p:spPr>
           <a:xfrm>
-            <a:off x="1005840" y="4200162"/>
+            <a:off x="1005840" y="3682734"/>
             <a:ext cx="4815687" cy="865957"/>
           </a:xfrm>
           <a:prstGeom prst="roundRect">
@@ -10248,13 +9912,13 @@
       </p:sp>
       <p:sp>
         <p:nvSpPr>
-          <p:cNvPr id="10" name="TextBox 9"/>
-          <p:cNvSpPr txBox="1"/>
-          <p:nvPr/>
-        </p:nvSpPr>
-        <p:spPr>
-          <a:xfrm>
-            <a:off x="1097280" y="4255026"/>
+          <p:cNvPr id="8" name="TextBox 7"/>
+          <p:cNvSpPr txBox="1"/>
+          <p:nvPr/>
+        </p:nvSpPr>
+        <p:spPr>
+          <a:xfrm>
+            <a:off x="1097280" y="3737598"/>
             <a:ext cx="4815687" cy="228600"/>
           </a:xfrm>
           <a:prstGeom prst="rect">
@@ -10285,13 +9949,13 @@
       </p:sp>
       <p:sp>
         <p:nvSpPr>
-          <p:cNvPr id="11" name="TextBox 10"/>
-          <p:cNvSpPr txBox="1"/>
-          <p:nvPr/>
-        </p:nvSpPr>
-        <p:spPr>
-          <a:xfrm>
-            <a:off x="1097280" y="4474482"/>
+          <p:cNvPr id="9" name="TextBox 8"/>
+          <p:cNvSpPr txBox="1"/>
+          <p:nvPr/>
+        </p:nvSpPr>
+        <p:spPr>
+          <a:xfrm>
+            <a:off x="1097280" y="3957054"/>
             <a:ext cx="4632807" cy="481909"/>
           </a:xfrm>
           <a:prstGeom prst="rect">
@@ -10318,21 +9982,21 @@
                 </a:solidFill>
                 <a:latin typeface="Inter"/>
               </a:rPr>
-              <a:t>Most of these 92 say they learned from the internet (85) and the documentation (76).</a:t>
-            </a:r>
-          </a:p>
-        </p:txBody>
-      </p:sp>
-      <p:sp>
-        <p:nvSpPr>
-          <p:cNvPr id="12" name="Rounded Rectangle 11"/>
+              <a:t>As written, it holds: some long-registered askers, including the two quoted, had trouble.</a:t>
+            </a:r>
+          </a:p>
+        </p:txBody>
+      </p:sp>
+      <p:sp>
+        <p:nvSpPr>
+          <p:cNvPr id="10" name="Rounded Rectangle 9"/>
           <p:cNvSpPr/>
           <p:nvPr/>
         </p:nvSpPr>
         <p:spPr>
           <a:xfrm>
             <a:off x="6187287" y="2679638"/>
-            <a:ext cx="5181447" cy="2827527"/>
+            <a:ext cx="5181447" cy="2533842"/>
           </a:xfrm>
           <a:prstGeom prst="roundRect">
             <a:avLst>
@@ -10357,14 +10021,14 @@
       </p:sp>
       <p:sp>
         <p:nvSpPr>
-          <p:cNvPr id="13" name="TextBox 12"/>
+          <p:cNvPr id="11" name="TextBox 10"/>
           <p:cNvSpPr txBox="1"/>
           <p:nvPr/>
         </p:nvSpPr>
         <p:spPr>
           <a:xfrm>
             <a:off x="6370167" y="2816798"/>
-            <a:ext cx="4815687" cy="516331"/>
+            <a:ext cx="4815687" cy="774496"/>
           </a:xfrm>
           <a:prstGeom prst="rect">
             <a:avLst/>
@@ -10390,98 +10054,21 @@
                 </a:solidFill>
                 <a:latin typeface="Inter"/>
               </a:rPr>
-              <a:t>“the number of questions related to Git commands has been growing steadily”</a:t>
-            </a:r>
-          </a:p>
-        </p:txBody>
-      </p:sp>
-      <p:sp>
-        <p:nvSpPr>
-          <p:cNvPr id="14" name="TextBox 13"/>
-          <p:cNvSpPr txBox="1"/>
-          <p:nvPr/>
-        </p:nvSpPr>
-        <p:spPr>
-          <a:xfrm>
-            <a:off x="6370167" y="3424569"/>
-            <a:ext cx="4815687" cy="201168"/>
-          </a:xfrm>
-          <a:prstGeom prst="rect">
-            <a:avLst/>
-          </a:prstGeom>
-          <a:noFill/>
-        </p:spPr>
-        <p:txBody>
-          <a:bodyPr wrap="square" anchor="t" lIns="0" rIns="0" tIns="0" bIns="0"/>
-          <a:lstStyle/>
-          <a:p>
-            <a:pPr algn="l">
-              <a:lnSpc>
-                <a:spcPct val="110000"/>
-              </a:lnSpc>
-            </a:pPr>
-            <a:r>
-              <a:rPr sz="1100" b="1">
-                <a:solidFill>
-                  <a:srgbClr val="707078"/>
-                </a:solidFill>
-                <a:latin typeface="Inter"/>
-              </a:rPr>
-              <a:t>THEY MEASURED</a:t>
-            </a:r>
-          </a:p>
-        </p:txBody>
-      </p:sp>
-      <p:sp>
-        <p:nvSpPr>
-          <p:cNvPr id="15" name="TextBox 14"/>
-          <p:cNvSpPr txBox="1"/>
-          <p:nvPr/>
-        </p:nvSpPr>
-        <p:spPr>
-          <a:xfrm>
-            <a:off x="6370167" y="3644025"/>
-            <a:ext cx="4815687" cy="481909"/>
-          </a:xfrm>
-          <a:prstGeom prst="rect">
-            <a:avLst/>
-          </a:prstGeom>
-          <a:noFill/>
-        </p:spPr>
-        <p:txBody>
-          <a:bodyPr wrap="square" anchor="t" lIns="0" rIns="0" tIns="0" bIns="0"/>
-          <a:lstStyle/>
-          <a:p>
-            <a:pPr algn="l">
-              <a:lnSpc>
-                <a:spcPct val="112000"/>
-              </a:lnSpc>
-              <a:spcBef>
-                <a:spcPts val="0"/>
-              </a:spcBef>
-            </a:pPr>
-            <a:r>
-              <a:rPr sz="1400" b="0" i="0">
-                <a:solidFill>
-                  <a:srgbClr val="111111"/>
-                </a:solidFill>
-                <a:latin typeface="Inter"/>
-              </a:rPr>
-              <a:t>Git questions per year (Fig. 2a), and their share of all Stack Overflow questions (Table 1).</a:t>
-            </a:r>
-          </a:p>
-        </p:txBody>
-      </p:sp>
-      <p:sp>
-        <p:nvSpPr>
-          <p:cNvPr id="16" name="Rounded Rectangle 15"/>
+              <a:t>“…for the more frequently-used commands, git credential and git submodule are among the most difficult ones.”</a:t>
+            </a:r>
+          </a:p>
+        </p:txBody>
+      </p:sp>
+      <p:sp>
+        <p:nvSpPr>
+          <p:cNvPr id="12" name="Rounded Rectangle 11"/>
           <p:cNvSpPr/>
           <p:nvPr/>
         </p:nvSpPr>
         <p:spPr>
           <a:xfrm>
-            <a:off x="6370167" y="4217374"/>
-            <a:ext cx="4815687" cy="1106911"/>
+            <a:off x="6370167" y="3682734"/>
+            <a:ext cx="4815687" cy="1347866"/>
           </a:xfrm>
           <a:prstGeom prst="roundRect">
             <a:avLst>
@@ -10504,13 +10091,13 @@
       </p:sp>
       <p:sp>
         <p:nvSpPr>
-          <p:cNvPr id="17" name="TextBox 16"/>
-          <p:cNvSpPr txBox="1"/>
-          <p:nvPr/>
-        </p:nvSpPr>
-        <p:spPr>
-          <a:xfrm>
-            <a:off x="6461607" y="4272238"/>
+          <p:cNvPr id="13" name="TextBox 12"/>
+          <p:cNvSpPr txBox="1"/>
+          <p:nvPr/>
+        </p:nvSpPr>
+        <p:spPr>
+          <a:xfrm>
+            <a:off x="6461607" y="3737598"/>
             <a:ext cx="4815687" cy="228600"/>
           </a:xfrm>
           <a:prstGeom prst="rect">
@@ -10541,14 +10128,14 @@
       </p:sp>
       <p:sp>
         <p:nvSpPr>
-          <p:cNvPr id="18" name="TextBox 17"/>
-          <p:cNvSpPr txBox="1"/>
-          <p:nvPr/>
-        </p:nvSpPr>
-        <p:spPr>
-          <a:xfrm>
-            <a:off x="6461607" y="4491694"/>
-            <a:ext cx="4632807" cy="722863"/>
+          <p:cNvPr id="14" name="TextBox 13"/>
+          <p:cNvSpPr txBox="1"/>
+          <p:nvPr/>
+        </p:nvSpPr>
+        <p:spPr>
+          <a:xfrm>
+            <a:off x="6461607" y="3957054"/>
+            <a:ext cx="4632807" cy="963818"/>
           </a:xfrm>
           <a:prstGeom prst="rect">
             <a:avLst/>
@@ -10574,14 +10161,14 @@
                 </a:solidFill>
                 <a:latin typeface="Inter"/>
               </a:rPr>
-              <a:t>Questions peaked in 2016 (9,125), fell to 7,076 in 2019, then rose again. Their share has held at about 0.4% since 2010.</a:t>
-            </a:r>
-          </a:p>
-        </p:txBody>
-      </p:sp>
-      <p:sp>
-        <p:nvSpPr>
-          <p:cNvPr id="19" name="TextBox 18"/>
+              <a:t>git credential’s questions lack an accepted answer more often than Git questions overall (paper: 43.0%; our re-run: 39.3% vs 36.5%). git submodule’s barely differ (37.5%).</a:t>
+            </a:r>
+          </a:p>
+        </p:txBody>
+      </p:sp>
+      <p:sp>
+        <p:nvSpPr>
+          <p:cNvPr id="15" name="TextBox 14"/>
           <p:cNvSpPr txBox="1"/>
           <p:nvPr/>
         </p:nvSpPr>
@@ -10614,7 +10201,7 @@
                 </a:solidFill>
                 <a:latin typeface="Inter"/>
               </a:rPr>
-              <a:t>Which claim survives best?</a:t>
+              <a:t>Which claim survives best, and why?</a:t>
             </a:r>
           </a:p>
         </p:txBody>
@@ -10628,6 +10215,547 @@
 </file>
 
 <file path=ppt/slides/slide17.xml><?xml version="1.0" encoding="utf-8"?>
+<p:sld xmlns:a="http://schemas.openxmlformats.org/drawingml/2006/main" xmlns:p="http://schemas.openxmlformats.org/presentationml/2006/main" xmlns:r="http://schemas.openxmlformats.org/officeDocument/2006/relationships">
+  <p:cSld>
+    <p:bg>
+      <p:bgPr>
+        <a:solidFill>
+          <a:srgbClr val="FFFFFF"/>
+        </a:solidFill>
+        <a:effectLst/>
+      </p:bgPr>
+    </p:bg>
+    <p:spTree>
+      <p:nvGrpSpPr>
+        <p:cNvPr id="1" name=""/>
+        <p:cNvGrpSpPr/>
+        <p:nvPr/>
+      </p:nvGrpSpPr>
+      <p:grpSpPr/>
+      <p:sp>
+        <p:nvSpPr>
+          <p:cNvPr id="2" name="TextBox 1"/>
+          <p:cNvSpPr txBox="1"/>
+          <p:nvPr/>
+        </p:nvSpPr>
+        <p:spPr>
+          <a:xfrm>
+            <a:off x="822960" y="502920"/>
+            <a:ext cx="10545775" cy="320040"/>
+          </a:xfrm>
+          <a:prstGeom prst="rect">
+            <a:avLst/>
+          </a:prstGeom>
+          <a:noFill/>
+        </p:spPr>
+        <p:txBody>
+          <a:bodyPr wrap="square" anchor="t" lIns="0" rIns="0" tIns="0" bIns="0"/>
+          <a:lstStyle/>
+          <a:p>
+            <a:pPr algn="l">
+              <a:lnSpc>
+                <a:spcPct val="110000"/>
+              </a:lnSpc>
+            </a:pPr>
+            <a:r>
+              <a:rPr sz="1600" b="1">
+                <a:solidFill>
+                  <a:srgbClr val="8B3DFF"/>
+                </a:solidFill>
+                <a:latin typeface="Inter"/>
+              </a:rPr>
+              <a:t>4 · DO YOU BELIEVE IT?</a:t>
+            </a:r>
+          </a:p>
+        </p:txBody>
+      </p:sp>
+      <p:sp>
+        <p:nvSpPr>
+          <p:cNvPr id="3" name="TextBox 2"/>
+          <p:cNvSpPr txBox="1"/>
+          <p:nvPr/>
+        </p:nvSpPr>
+        <p:spPr>
+          <a:xfrm>
+            <a:off x="822960" y="868680"/>
+            <a:ext cx="10545775" cy="688441"/>
+          </a:xfrm>
+          <a:prstGeom prst="rect">
+            <a:avLst/>
+          </a:prstGeom>
+          <a:noFill/>
+        </p:spPr>
+        <p:txBody>
+          <a:bodyPr wrap="square" anchor="t" lIns="0" rIns="0" tIns="0" bIns="0"/>
+          <a:lstStyle/>
+          <a:p>
+            <a:pPr algn="l">
+              <a:lnSpc>
+                <a:spcPct val="112000"/>
+              </a:lnSpc>
+              <a:spcBef>
+                <a:spcPts val="0"/>
+              </a:spcBef>
+            </a:pPr>
+            <a:r>
+              <a:rPr sz="4000" b="1" i="0">
+                <a:solidFill>
+                  <a:srgbClr val="111111"/>
+                </a:solidFill>
+                <a:latin typeface="Inter"/>
+              </a:rPr>
+              <a:t>The verdicts (2/2)</a:t>
+            </a:r>
+          </a:p>
+        </p:txBody>
+      </p:sp>
+      <p:sp>
+        <p:nvSpPr>
+          <p:cNvPr id="4" name="TextBox 3"/>
+          <p:cNvSpPr txBox="1"/>
+          <p:nvPr/>
+        </p:nvSpPr>
+        <p:spPr>
+          <a:xfrm>
+            <a:off x="822960" y="1831441"/>
+            <a:ext cx="10545775" cy="619597"/>
+          </a:xfrm>
+          <a:prstGeom prst="rect">
+            <a:avLst/>
+          </a:prstGeom>
+          <a:noFill/>
+        </p:spPr>
+        <p:txBody>
+          <a:bodyPr wrap="square" anchor="t" lIns="0" rIns="0" tIns="0" bIns="0"/>
+          <a:lstStyle/>
+          <a:p>
+            <a:pPr algn="l">
+              <a:lnSpc>
+                <a:spcPct val="112000"/>
+              </a:lnSpc>
+              <a:spcBef>
+                <a:spcPts val="0"/>
+              </a:spcBef>
+            </a:pPr>
+            <a:r>
+              <a:rPr sz="1800" b="0" i="0">
+                <a:solidFill>
+                  <a:srgbClr val="111111"/>
+                </a:solidFill>
+                <a:latin typeface="Inter"/>
+              </a:rPr>
+              <a:t>The title asks whether developers know how to use Git commands. Nothing in the paper watches anyone use one.</a:t>
+            </a:r>
+          </a:p>
+        </p:txBody>
+      </p:sp>
+      <p:sp>
+        <p:nvSpPr>
+          <p:cNvPr id="5" name="Rounded Rectangle 4"/>
+          <p:cNvSpPr/>
+          <p:nvPr/>
+        </p:nvSpPr>
+        <p:spPr>
+          <a:xfrm>
+            <a:off x="822960" y="2679638"/>
+            <a:ext cx="5181447" cy="2310099"/>
+          </a:xfrm>
+          <a:prstGeom prst="roundRect">
+            <a:avLst>
+              <a:gd name="adj" fmla="val 6000"/>
+            </a:avLst>
+          </a:prstGeom>
+          <a:solidFill>
+            <a:srgbClr val="FFFFFF"/>
+          </a:solidFill>
+          <a:ln w="19050">
+            <a:solidFill>
+              <a:srgbClr val="D9D9DE"/>
+            </a:solidFill>
+          </a:ln>
+          <a:effectLst/>
+        </p:spPr>
+        <p:txBody>
+          <a:bodyPr rtlCol="0" anchor="ctr"/>
+          <a:lstStyle/>
+          <a:p/>
+        </p:txBody>
+      </p:sp>
+      <p:sp>
+        <p:nvSpPr>
+          <p:cNvPr id="6" name="TextBox 5"/>
+          <p:cNvSpPr txBox="1"/>
+          <p:nvPr/>
+        </p:nvSpPr>
+        <p:spPr>
+          <a:xfrm>
+            <a:off x="1005840" y="2816798"/>
+            <a:ext cx="4815687" cy="258165"/>
+          </a:xfrm>
+          <a:prstGeom prst="rect">
+            <a:avLst/>
+          </a:prstGeom>
+          <a:noFill/>
+        </p:spPr>
+        <p:txBody>
+          <a:bodyPr wrap="square" anchor="t" lIns="0" rIns="0" tIns="0" bIns="0"/>
+          <a:lstStyle/>
+          <a:p>
+            <a:pPr algn="l">
+              <a:lnSpc>
+                <a:spcPct val="112000"/>
+              </a:lnSpc>
+              <a:spcBef>
+                <a:spcPts val="0"/>
+              </a:spcBef>
+            </a:pPr>
+            <a:r>
+              <a:rPr sz="1500" b="0" i="1">
+                <a:solidFill>
+                  <a:srgbClr val="111111"/>
+                </a:solidFill>
+                <a:latin typeface="Inter"/>
+              </a:rPr>
+              <a:t>“Self-learning is the primary learning approach.”</a:t>
+            </a:r>
+          </a:p>
+        </p:txBody>
+      </p:sp>
+      <p:sp>
+        <p:nvSpPr>
+          <p:cNvPr id="7" name="Rounded Rectangle 6"/>
+          <p:cNvSpPr/>
+          <p:nvPr/>
+        </p:nvSpPr>
+        <p:spPr>
+          <a:xfrm>
+            <a:off x="1005840" y="3166403"/>
+            <a:ext cx="4815687" cy="865957"/>
+          </a:xfrm>
+          <a:prstGeom prst="roundRect">
+            <a:avLst>
+              <a:gd name="adj" fmla="val 10000"/>
+            </a:avLst>
+          </a:prstGeom>
+          <a:solidFill>
+            <a:srgbClr val="F4ECFB"/>
+          </a:solidFill>
+          <a:ln>
+            <a:noFill/>
+          </a:ln>
+          <a:effectLst/>
+        </p:spPr>
+        <p:txBody>
+          <a:bodyPr rtlCol="0" anchor="ctr"/>
+          <a:lstStyle/>
+          <a:p/>
+        </p:txBody>
+      </p:sp>
+      <p:sp>
+        <p:nvSpPr>
+          <p:cNvPr id="8" name="TextBox 7"/>
+          <p:cNvSpPr txBox="1"/>
+          <p:nvPr/>
+        </p:nvSpPr>
+        <p:spPr>
+          <a:xfrm>
+            <a:off x="1097280" y="3221267"/>
+            <a:ext cx="4815687" cy="228600"/>
+          </a:xfrm>
+          <a:prstGeom prst="rect">
+            <a:avLst/>
+          </a:prstGeom>
+          <a:noFill/>
+        </p:spPr>
+        <p:txBody>
+          <a:bodyPr wrap="square" anchor="t" lIns="0" rIns="0" tIns="0" bIns="0"/>
+          <a:lstStyle/>
+          <a:p>
+            <a:pPr algn="l">
+              <a:lnSpc>
+                <a:spcPct val="110000"/>
+              </a:lnSpc>
+            </a:pPr>
+            <a:r>
+              <a:rPr sz="1100" b="1">
+                <a:solidFill>
+                  <a:srgbClr val="8B3DFF"/>
+                </a:solidFill>
+                <a:latin typeface="Inter"/>
+              </a:rPr>
+              <a:t>THE DATA SUPPORTS</a:t>
+            </a:r>
+          </a:p>
+        </p:txBody>
+      </p:sp>
+      <p:sp>
+        <p:nvSpPr>
+          <p:cNvPr id="9" name="TextBox 8"/>
+          <p:cNvSpPr txBox="1"/>
+          <p:nvPr/>
+        </p:nvSpPr>
+        <p:spPr>
+          <a:xfrm>
+            <a:off x="1097280" y="3440723"/>
+            <a:ext cx="4632807" cy="481909"/>
+          </a:xfrm>
+          <a:prstGeom prst="rect">
+            <a:avLst/>
+          </a:prstGeom>
+          <a:noFill/>
+        </p:spPr>
+        <p:txBody>
+          <a:bodyPr wrap="square" anchor="t" lIns="0" rIns="0" tIns="0" bIns="0"/>
+          <a:lstStyle/>
+          <a:p>
+            <a:pPr algn="l">
+              <a:lnSpc>
+                <a:spcPct val="112000"/>
+              </a:lnSpc>
+              <a:spcBef>
+                <a:spcPts val="0"/>
+              </a:spcBef>
+            </a:pPr>
+            <a:r>
+              <a:rPr sz="1400" b="0" i="0">
+                <a:solidFill>
+                  <a:srgbClr val="111111"/>
+                </a:solidFill>
+                <a:latin typeface="Inter"/>
+              </a:rPr>
+              <a:t>Most of these 92 say they learned from the internet (85) and the documentation (76).</a:t>
+            </a:r>
+          </a:p>
+        </p:txBody>
+      </p:sp>
+      <p:sp>
+        <p:nvSpPr>
+          <p:cNvPr id="10" name="Rounded Rectangle 9"/>
+          <p:cNvSpPr/>
+          <p:nvPr/>
+        </p:nvSpPr>
+        <p:spPr>
+          <a:xfrm>
+            <a:off x="6187287" y="2679638"/>
+            <a:ext cx="5181447" cy="2310099"/>
+          </a:xfrm>
+          <a:prstGeom prst="roundRect">
+            <a:avLst>
+              <a:gd name="adj" fmla="val 6000"/>
+            </a:avLst>
+          </a:prstGeom>
+          <a:solidFill>
+            <a:srgbClr val="FFFFFF"/>
+          </a:solidFill>
+          <a:ln w="19050">
+            <a:solidFill>
+              <a:srgbClr val="D9D9DE"/>
+            </a:solidFill>
+          </a:ln>
+          <a:effectLst/>
+        </p:spPr>
+        <p:txBody>
+          <a:bodyPr rtlCol="0" anchor="ctr"/>
+          <a:lstStyle/>
+          <a:p/>
+        </p:txBody>
+      </p:sp>
+      <p:sp>
+        <p:nvSpPr>
+          <p:cNvPr id="11" name="TextBox 10"/>
+          <p:cNvSpPr txBox="1"/>
+          <p:nvPr/>
+        </p:nvSpPr>
+        <p:spPr>
+          <a:xfrm>
+            <a:off x="6370167" y="2816798"/>
+            <a:ext cx="4815687" cy="1032662"/>
+          </a:xfrm>
+          <a:prstGeom prst="rect">
+            <a:avLst/>
+          </a:prstGeom>
+          <a:noFill/>
+        </p:spPr>
+        <p:txBody>
+          <a:bodyPr wrap="square" anchor="t" lIns="0" rIns="0" tIns="0" bIns="0"/>
+          <a:lstStyle/>
+          <a:p>
+            <a:pPr algn="l">
+              <a:lnSpc>
+                <a:spcPct val="112000"/>
+              </a:lnSpc>
+              <a:spcBef>
+                <a:spcPts val="0"/>
+              </a:spcBef>
+            </a:pPr>
+            <a:r>
+              <a:rPr sz="1500" b="0" i="1">
+                <a:solidFill>
+                  <a:srgbClr val="111111"/>
+                </a:solidFill>
+                <a:latin typeface="Inter"/>
+              </a:rPr>
+              <a:t>“This result, although surprising, is consistent with the conclusion we obtained in RQ2, indicating that even experienced developers still have doubts about Git usage.”</a:t>
+            </a:r>
+          </a:p>
+        </p:txBody>
+      </p:sp>
+      <p:sp>
+        <p:nvSpPr>
+          <p:cNvPr id="12" name="Rounded Rectangle 11"/>
+          <p:cNvSpPr/>
+          <p:nvPr/>
+        </p:nvSpPr>
+        <p:spPr>
+          <a:xfrm>
+            <a:off x="6370167" y="3940900"/>
+            <a:ext cx="4815687" cy="865957"/>
+          </a:xfrm>
+          <a:prstGeom prst="roundRect">
+            <a:avLst>
+              <a:gd name="adj" fmla="val 10000"/>
+            </a:avLst>
+          </a:prstGeom>
+          <a:solidFill>
+            <a:srgbClr val="F4ECFB"/>
+          </a:solidFill>
+          <a:ln>
+            <a:noFill/>
+          </a:ln>
+          <a:effectLst/>
+        </p:spPr>
+        <p:txBody>
+          <a:bodyPr rtlCol="0" anchor="ctr"/>
+          <a:lstStyle/>
+          <a:p/>
+        </p:txBody>
+      </p:sp>
+      <p:sp>
+        <p:nvSpPr>
+          <p:cNvPr id="13" name="TextBox 12"/>
+          <p:cNvSpPr txBox="1"/>
+          <p:nvPr/>
+        </p:nvSpPr>
+        <p:spPr>
+          <a:xfrm>
+            <a:off x="6461607" y="3995764"/>
+            <a:ext cx="4815687" cy="228600"/>
+          </a:xfrm>
+          <a:prstGeom prst="rect">
+            <a:avLst/>
+          </a:prstGeom>
+          <a:noFill/>
+        </p:spPr>
+        <p:txBody>
+          <a:bodyPr wrap="square" anchor="t" lIns="0" rIns="0" tIns="0" bIns="0"/>
+          <a:lstStyle/>
+          <a:p>
+            <a:pPr algn="l">
+              <a:lnSpc>
+                <a:spcPct val="110000"/>
+              </a:lnSpc>
+            </a:pPr>
+            <a:r>
+              <a:rPr sz="1100" b="1">
+                <a:solidFill>
+                  <a:srgbClr val="8B3DFF"/>
+                </a:solidFill>
+                <a:latin typeface="Inter"/>
+              </a:rPr>
+              <a:t>THE DATA SUPPORTS</a:t>
+            </a:r>
+          </a:p>
+        </p:txBody>
+      </p:sp>
+      <p:sp>
+        <p:nvSpPr>
+          <p:cNvPr id="14" name="TextBox 13"/>
+          <p:cNvSpPr txBox="1"/>
+          <p:nvPr/>
+        </p:nvSpPr>
+        <p:spPr>
+          <a:xfrm>
+            <a:off x="6461607" y="4215220"/>
+            <a:ext cx="4632807" cy="481909"/>
+          </a:xfrm>
+          <a:prstGeom prst="rect">
+            <a:avLst/>
+          </a:prstGeom>
+          <a:noFill/>
+        </p:spPr>
+        <p:txBody>
+          <a:bodyPr wrap="square" anchor="t" lIns="0" rIns="0" tIns="0" bIns="0"/>
+          <a:lstStyle/>
+          <a:p>
+            <a:pPr algn="l">
+              <a:lnSpc>
+                <a:spcPct val="112000"/>
+              </a:lnSpc>
+              <a:spcBef>
+                <a:spcPts val="0"/>
+              </a:spcBef>
+            </a:pPr>
+            <a:r>
+              <a:rPr sz="1400" b="0" i="0">
+                <a:solidFill>
+                  <a:srgbClr val="111111"/>
+                </a:solidFill>
+                <a:latin typeface="Inter"/>
+              </a:rPr>
+              <a:t>Most of these 92, many with more than five years of Git, rate themselves competent or below (79 of 92).</a:t>
+            </a:r>
+          </a:p>
+        </p:txBody>
+      </p:sp>
+      <p:sp>
+        <p:nvSpPr>
+          <p:cNvPr id="15" name="TextBox 14"/>
+          <p:cNvSpPr txBox="1"/>
+          <p:nvPr/>
+        </p:nvSpPr>
+        <p:spPr>
+          <a:xfrm>
+            <a:off x="822960" y="6022158"/>
+            <a:ext cx="10545775" cy="378642"/>
+          </a:xfrm>
+          <a:prstGeom prst="rect">
+            <a:avLst/>
+          </a:prstGeom>
+          <a:noFill/>
+        </p:spPr>
+        <p:txBody>
+          <a:bodyPr wrap="square" anchor="t" lIns="0" rIns="0" tIns="0" bIns="0"/>
+          <a:lstStyle/>
+          <a:p>
+            <a:pPr algn="l">
+              <a:lnSpc>
+                <a:spcPct val="112000"/>
+              </a:lnSpc>
+              <a:spcBef>
+                <a:spcPts val="0"/>
+              </a:spcBef>
+            </a:pPr>
+            <a:r>
+              <a:rPr sz="2200" b="0" i="1">
+                <a:solidFill>
+                  <a:srgbClr val="707078"/>
+                </a:solidFill>
+                <a:latin typeface="Inter"/>
+              </a:rPr>
+              <a:t>Which claim survives best, and why?</a:t>
+            </a:r>
+          </a:p>
+        </p:txBody>
+      </p:sp>
+    </p:spTree>
+  </p:cSld>
+  <p:clrMapOvr>
+    <a:masterClrMapping/>
+  </p:clrMapOvr>
+</p:sld>
+</file>
+
+<file path=ppt/slides/slide18.xml><?xml version="1.0" encoding="utf-8"?>
 <p:sld xmlns:a="http://schemas.openxmlformats.org/drawingml/2006/main" xmlns:p="http://schemas.openxmlformats.org/presentationml/2006/main" xmlns:r="http://schemas.openxmlformats.org/officeDocument/2006/relationships">
   <p:cSld>
     <p:bg>
@@ -10718,7 +10846,7 @@
                 </a:solidFill>
                 <a:latin typeface="Inter"/>
               </a:rPr>
-              <a:t>10 min</a:t>
+              <a:t>9 min</a:t>
             </a:r>
           </a:p>
         </p:txBody>
@@ -10772,7 +10900,7 @@
         <p:spPr>
           <a:xfrm>
             <a:off x="822960" y="1831441"/>
-            <a:ext cx="8647535" cy="1848103"/>
+            <a:ext cx="8647535" cy="1675993"/>
           </a:xfrm>
           <a:prstGeom prst="rect">
             <a:avLst/>
@@ -10792,13 +10920,49 @@
               </a:spcBef>
             </a:pPr>
             <a:r>
-              <a:rPr sz="2000" b="0" i="0">
-                <a:solidFill>
-                  <a:srgbClr val="111111"/>
-                </a:solidFill>
-                <a:latin typeface="Inter"/>
-              </a:rPr>
-              <a:t>The need: undo. The most-viewed Git question asks how to undo the most recent local commits.</a:t>
+              <a:rPr sz="1800" b="0" i="0">
+                <a:solidFill>
+                  <a:srgbClr val="111111"/>
+                </a:solidFill>
+                <a:latin typeface="Inter"/>
+              </a:rPr>
+              <a:t>The need: undo. The most-viewed Git question asks how to undo the most recent local commits. Its accepted answer’s fix is </a:t>
+            </a:r>
+            <a:r>
+              <a:rPr sz="1800" b="0" i="0">
+                <a:solidFill>
+                  <a:srgbClr val="111111"/>
+                </a:solidFill>
+                <a:latin typeface="Noto Sans Mono"/>
+              </a:rPr>
+              <a:t>git reset HEAD~</a:t>
+            </a:r>
+            <a:r>
+              <a:rPr sz="1800" b="0" i="0">
+                <a:solidFill>
+                  <a:srgbClr val="111111"/>
+                </a:solidFill>
+                <a:latin typeface="Inter"/>
+              </a:rPr>
+              <a:t>; its further reading points to </a:t>
+            </a:r>
+            <a:r>
+              <a:rPr sz="1800" b="0" i="0">
+                <a:solidFill>
+                  <a:srgbClr val="111111"/>
+                </a:solidFill>
+                <a:latin typeface="Noto Sans Mono"/>
+              </a:rPr>
+              <a:t>git reflog</a:t>
+            </a:r>
+            <a:r>
+              <a:rPr sz="1800" b="0" i="0">
+                <a:solidFill>
+                  <a:srgbClr val="111111"/>
+                </a:solidFill>
+                <a:latin typeface="Inter"/>
+              </a:rPr>
+              <a:t>.</a:t>
             </a:r>
           </a:p>
           <a:p>
@@ -10811,49 +10975,13 @@
               </a:spcBef>
             </a:pPr>
             <a:r>
-              <a:rPr sz="2000" b="0" i="0">
-                <a:solidFill>
-                  <a:srgbClr val="111111"/>
-                </a:solidFill>
-                <a:latin typeface="Inter"/>
-              </a:rPr>
-              <a:t>Its accepted answer’s fix is </a:t>
-            </a:r>
-            <a:r>
-              <a:rPr sz="2000" b="0" i="0">
-                <a:solidFill>
-                  <a:srgbClr val="111111"/>
-                </a:solidFill>
-                <a:latin typeface="Noto Sans Mono"/>
-              </a:rPr>
-              <a:t>git reset HEAD~</a:t>
-            </a:r>
-            <a:r>
-              <a:rPr sz="2000" b="0" i="0">
-                <a:solidFill>
-                  <a:srgbClr val="111111"/>
-                </a:solidFill>
-                <a:latin typeface="Inter"/>
-              </a:rPr>
-              <a:t>. Its further reading points to </a:t>
-            </a:r>
-            <a:r>
-              <a:rPr sz="2000" b="0" i="0">
-                <a:solidFill>
-                  <a:srgbClr val="111111"/>
-                </a:solidFill>
-                <a:latin typeface="Noto Sans Mono"/>
-              </a:rPr>
-              <a:t>git reflog</a:t>
-            </a:r>
-            <a:r>
-              <a:rPr sz="2000" b="0" i="0">
-                <a:solidFill>
-                  <a:srgbClr val="111111"/>
-                </a:solidFill>
-                <a:latin typeface="Inter"/>
-              </a:rPr>
-              <a:t>: the record Git already keeps of where HEAD has been.</a:t>
+              <a:rPr sz="1800" b="0" i="0">
+                <a:solidFill>
+                  <a:srgbClr val="111111"/>
+                </a:solidFill>
+                <a:latin typeface="Inter"/>
+              </a:rPr>
+              <a:t>Why do people have to ask? Design one change, and the study that would show it works.</a:t>
             </a:r>
           </a:p>
         </p:txBody>
@@ -10866,8 +10994,8 @@
         </p:nvSpPr>
         <p:spPr>
           <a:xfrm>
-            <a:off x="822960" y="3908144"/>
-            <a:ext cx="3393338" cy="1021405"/>
+            <a:off x="822960" y="3736034"/>
+            <a:ext cx="2499283" cy="1262359"/>
           </a:xfrm>
           <a:prstGeom prst="roundRect">
             <a:avLst>
@@ -10898,8 +11026,8 @@
         </p:nvSpPr>
         <p:spPr>
           <a:xfrm>
-            <a:off x="1005840" y="4045304"/>
-            <a:ext cx="3027578" cy="201168"/>
+            <a:off x="1005840" y="3873194"/>
+            <a:ext cx="2133523" cy="201168"/>
           </a:xfrm>
           <a:prstGeom prst="rect">
             <a:avLst/>
@@ -10935,8 +11063,8 @@
         </p:nvSpPr>
         <p:spPr>
           <a:xfrm>
-            <a:off x="1005840" y="4264760"/>
-            <a:ext cx="3027578" cy="240954"/>
+            <a:off x="1005840" y="4092650"/>
+            <a:ext cx="2133523" cy="481909"/>
           </a:xfrm>
           <a:prstGeom prst="rect">
             <a:avLst/>
@@ -10962,7 +11090,7 @@
                 </a:solidFill>
                 <a:latin typeface="Inter"/>
               </a:rPr>
-              <a:t>e.g. what the user sees or types</a:t>
+              <a:t>What the user sees or types</a:t>
             </a:r>
           </a:p>
         </p:txBody>
@@ -10975,8 +11103,8 @@
         </p:nvSpPr>
         <p:spPr>
           <a:xfrm>
-            <a:off x="4399178" y="3908144"/>
-            <a:ext cx="3393338" cy="1021405"/>
+            <a:off x="3505123" y="3736034"/>
+            <a:ext cx="2499283" cy="1262359"/>
           </a:xfrm>
           <a:prstGeom prst="roundRect">
             <a:avLst>
@@ -11007,8 +11135,8 @@
         </p:nvSpPr>
         <p:spPr>
           <a:xfrm>
-            <a:off x="4582058" y="4045304"/>
-            <a:ext cx="3027578" cy="201168"/>
+            <a:off x="3688003" y="3873194"/>
+            <a:ext cx="2133523" cy="201168"/>
           </a:xfrm>
           <a:prstGeom prst="rect">
             <a:avLst/>
@@ -11031,7 +11159,7 @@
                 </a:solidFill>
                 <a:latin typeface="Inter"/>
               </a:rPr>
-              <a:t>THE STUDY THAT WOULD SHOW IT WORKS</a:t>
+              <a:t>THE STUDY</a:t>
             </a:r>
           </a:p>
         </p:txBody>
@@ -11044,8 +11172,8 @@
         </p:nvSpPr>
         <p:spPr>
           <a:xfrm>
-            <a:off x="4582058" y="4264760"/>
-            <a:ext cx="3027578" cy="481909"/>
+            <a:off x="3688003" y="4092650"/>
+            <a:ext cx="2133523" cy="722863"/>
           </a:xfrm>
           <a:prstGeom prst="rect">
             <a:avLst/>
@@ -11084,8 +11212,8 @@
         </p:nvSpPr>
         <p:spPr>
           <a:xfrm>
-            <a:off x="7975396" y="3908144"/>
-            <a:ext cx="3393338" cy="1021405"/>
+            <a:off x="6187286" y="3736034"/>
+            <a:ext cx="2499283" cy="1262359"/>
           </a:xfrm>
           <a:prstGeom prst="roundRect">
             <a:avLst>
@@ -11116,8 +11244,8 @@
         </p:nvSpPr>
         <p:spPr>
           <a:xfrm>
-            <a:off x="8158276" y="4045304"/>
-            <a:ext cx="3027578" cy="201168"/>
+            <a:off x="6370166" y="3873194"/>
+            <a:ext cx="2133523" cy="201168"/>
           </a:xfrm>
           <a:prstGeom prst="rect">
             <a:avLst/>
@@ -11140,6 +11268,115 @@
                 </a:solidFill>
                 <a:latin typeface="Inter"/>
               </a:rPr>
+              <a:t>MEASURE, AND ONE THREAT</a:t>
+            </a:r>
+          </a:p>
+        </p:txBody>
+      </p:sp>
+      <p:sp>
+        <p:nvSpPr>
+          <p:cNvPr id="14" name="TextBox 13"/>
+          <p:cNvSpPr txBox="1"/>
+          <p:nvPr/>
+        </p:nvSpPr>
+        <p:spPr>
+          <a:xfrm>
+            <a:off x="6370166" y="4092650"/>
+            <a:ext cx="2133523" cy="481909"/>
+          </a:xfrm>
+          <a:prstGeom prst="rect">
+            <a:avLst/>
+          </a:prstGeom>
+          <a:noFill/>
+        </p:spPr>
+        <p:txBody>
+          <a:bodyPr wrap="square" anchor="t" lIns="0" rIns="0" tIns="0" bIns="0"/>
+          <a:lstStyle/>
+          <a:p>
+            <a:pPr algn="l">
+              <a:lnSpc>
+                <a:spcPct val="112000"/>
+              </a:lnSpc>
+              <a:spcBef>
+                <a:spcPts val="0"/>
+              </a:spcBef>
+            </a:pPr>
+            <a:r>
+              <a:rPr sz="1400" b="0" i="0">
+                <a:solidFill>
+                  <a:srgbClr val="111111"/>
+                </a:solidFill>
+                <a:latin typeface="Inter"/>
+              </a:rPr>
+              <a:t>e.g. time to recover; threat: a learning effect</a:t>
+            </a:r>
+          </a:p>
+        </p:txBody>
+      </p:sp>
+      <p:sp>
+        <p:nvSpPr>
+          <p:cNvPr id="15" name="Rounded Rectangle 14"/>
+          <p:cNvSpPr/>
+          <p:nvPr/>
+        </p:nvSpPr>
+        <p:spPr>
+          <a:xfrm>
+            <a:off x="8869449" y="3736034"/>
+            <a:ext cx="2499283" cy="1262359"/>
+          </a:xfrm>
+          <a:prstGeom prst="roundRect">
+            <a:avLst>
+              <a:gd name="adj" fmla="val 6000"/>
+            </a:avLst>
+          </a:prstGeom>
+          <a:solidFill>
+            <a:srgbClr val="FFFFFF"/>
+          </a:solidFill>
+          <a:ln w="19050">
+            <a:solidFill>
+              <a:srgbClr val="D9D9DE"/>
+            </a:solidFill>
+          </a:ln>
+          <a:effectLst/>
+        </p:spPr>
+        <p:txBody>
+          <a:bodyPr rtlCol="0" anchor="ctr"/>
+          <a:lstStyle/>
+          <a:p/>
+        </p:txBody>
+      </p:sp>
+      <p:sp>
+        <p:nvSpPr>
+          <p:cNvPr id="16" name="TextBox 15"/>
+          <p:cNvSpPr txBox="1"/>
+          <p:nvPr/>
+        </p:nvSpPr>
+        <p:spPr>
+          <a:xfrm>
+            <a:off x="9052329" y="3873194"/>
+            <a:ext cx="2133523" cy="201168"/>
+          </a:xfrm>
+          <a:prstGeom prst="rect">
+            <a:avLst/>
+          </a:prstGeom>
+          <a:noFill/>
+        </p:spPr>
+        <p:txBody>
+          <a:bodyPr wrap="square" anchor="t" lIns="0" rIns="0" tIns="0" bIns="0"/>
+          <a:lstStyle/>
+          <a:p>
+            <a:pPr algn="l">
+              <a:lnSpc>
+                <a:spcPct val="110000"/>
+              </a:lnSpc>
+            </a:pPr>
+            <a:r>
+              <a:rPr sz="1100" b="1">
+                <a:solidFill>
+                  <a:srgbClr val="707078"/>
+                </a:solidFill>
+                <a:latin typeface="Inter"/>
+              </a:rPr>
               <a:t>YOUR DATA</a:t>
             </a:r>
           </a:p>
@@ -11147,14 +11384,14 @@
       </p:sp>
       <p:sp>
         <p:nvSpPr>
-          <p:cNvPr id="14" name="TextBox 13"/>
-          <p:cNvSpPr txBox="1"/>
-          <p:nvPr/>
-        </p:nvSpPr>
-        <p:spPr>
-          <a:xfrm>
-            <a:off x="8158276" y="4264760"/>
-            <a:ext cx="3027578" cy="481909"/>
+          <p:cNvPr id="17" name="TextBox 16"/>
+          <p:cNvSpPr txBox="1"/>
+          <p:nvPr/>
+        </p:nvSpPr>
+        <p:spPr>
+          <a:xfrm>
+            <a:off x="9052329" y="4092650"/>
+            <a:ext cx="2133523" cy="722863"/>
           </a:xfrm>
           <a:prstGeom prst="rect">
             <a:avLst/>
@@ -11181,189 +11418,6 @@
                 <a:latin typeface="Inter"/>
               </a:rPr>
               <a:t>Watch people, collect traces, or ask them? Which, exactly?</a:t>
-            </a:r>
-          </a:p>
-        </p:txBody>
-      </p:sp>
-    </p:spTree>
-  </p:cSld>
-  <p:clrMapOvr>
-    <a:masterClrMapping/>
-  </p:clrMapOvr>
-</p:sld>
-</file>
-
-<file path=ppt/slides/slide18.xml><?xml version="1.0" encoding="utf-8"?>
-<p:sld xmlns:a="http://schemas.openxmlformats.org/drawingml/2006/main" xmlns:p="http://schemas.openxmlformats.org/presentationml/2006/main" xmlns:r="http://schemas.openxmlformats.org/officeDocument/2006/relationships">
-  <p:cSld>
-    <p:bg>
-      <p:bgPr>
-        <a:solidFill>
-          <a:srgbClr val="FFFFFF"/>
-        </a:solidFill>
-        <a:effectLst/>
-      </p:bgPr>
-    </p:bg>
-    <p:spTree>
-      <p:nvGrpSpPr>
-        <p:cNvPr id="1" name=""/>
-        <p:cNvGrpSpPr/>
-        <p:nvPr/>
-      </p:nvGrpSpPr>
-      <p:grpSpPr/>
-      <p:sp>
-        <p:nvSpPr>
-          <p:cNvPr id="2" name="TextBox 1"/>
-          <p:cNvSpPr txBox="1"/>
-          <p:nvPr/>
-        </p:nvSpPr>
-        <p:spPr>
-          <a:xfrm>
-            <a:off x="822960" y="502920"/>
-            <a:ext cx="10545775" cy="320040"/>
-          </a:xfrm>
-          <a:prstGeom prst="rect">
-            <a:avLst/>
-          </a:prstGeom>
-          <a:noFill/>
-        </p:spPr>
-        <p:txBody>
-          <a:bodyPr wrap="square" anchor="t" lIns="0" rIns="0" tIns="0" bIns="0"/>
-          <a:lstStyle/>
-          <a:p>
-            <a:pPr algn="l">
-              <a:lnSpc>
-                <a:spcPct val="110000"/>
-              </a:lnSpc>
-            </a:pPr>
-            <a:r>
-              <a:rPr sz="1600" b="1">
-                <a:solidFill>
-                  <a:srgbClr val="8B3DFF"/>
-                </a:solidFill>
-                <a:latin typeface="Inter"/>
-              </a:rPr>
-              <a:t>5 · DESIGN</a:t>
-            </a:r>
-          </a:p>
-        </p:txBody>
-      </p:sp>
-      <p:sp>
-        <p:nvSpPr>
-          <p:cNvPr id="3" name="TextBox 2"/>
-          <p:cNvSpPr txBox="1"/>
-          <p:nvPr/>
-        </p:nvSpPr>
-        <p:spPr>
-          <a:xfrm>
-            <a:off x="822960" y="868680"/>
-            <a:ext cx="10545775" cy="688441"/>
-          </a:xfrm>
-          <a:prstGeom prst="rect">
-            <a:avLst/>
-          </a:prstGeom>
-          <a:noFill/>
-        </p:spPr>
-        <p:txBody>
-          <a:bodyPr wrap="square" anchor="t" lIns="0" rIns="0" tIns="0" bIns="0"/>
-          <a:lstStyle/>
-          <a:p>
-            <a:pPr algn="l">
-              <a:lnSpc>
-                <a:spcPct val="112000"/>
-              </a:lnSpc>
-              <a:spcBef>
-                <a:spcPts val="0"/>
-              </a:spcBef>
-            </a:pPr>
-            <a:r>
-              <a:rPr sz="4000" b="1" i="0">
-                <a:solidFill>
-                  <a:srgbClr val="111111"/>
-                </a:solidFill>
-                <a:latin typeface="Inter"/>
-              </a:rPr>
-              <a:t>Your designs</a:t>
-            </a:r>
-          </a:p>
-        </p:txBody>
-      </p:sp>
-      <p:sp>
-        <p:nvSpPr>
-          <p:cNvPr id="4" name="TextBox 3"/>
-          <p:cNvSpPr txBox="1"/>
-          <p:nvPr/>
-        </p:nvSpPr>
-        <p:spPr>
-          <a:xfrm>
-            <a:off x="822960" y="1831441"/>
-            <a:ext cx="8647535" cy="757285"/>
-          </a:xfrm>
-          <a:prstGeom prst="rect">
-            <a:avLst/>
-          </a:prstGeom>
-          <a:noFill/>
-        </p:spPr>
-        <p:txBody>
-          <a:bodyPr wrap="square" anchor="t" lIns="0" rIns="0" tIns="0" bIns="0"/>
-          <a:lstStyle/>
-          <a:p>
-            <a:pPr algn="l">
-              <a:lnSpc>
-                <a:spcPct val="112000"/>
-              </a:lnSpc>
-              <a:spcBef>
-                <a:spcPts val="0"/>
-              </a:spcBef>
-            </a:pPr>
-            <a:r>
-              <a:rPr sz="2200" b="0" i="0">
-                <a:solidFill>
-                  <a:srgbClr val="707078"/>
-                </a:solidFill>
-                <a:latin typeface="Inter"/>
-              </a:rPr>
-              <a:t>Each group reads its change, the study that would show it works, and its data. The app shows all of them.</a:t>
-            </a:r>
-          </a:p>
-        </p:txBody>
-      </p:sp>
-      <p:sp>
-        <p:nvSpPr>
-          <p:cNvPr id="5" name="TextBox 4"/>
-          <p:cNvSpPr txBox="1"/>
-          <p:nvPr/>
-        </p:nvSpPr>
-        <p:spPr>
-          <a:xfrm>
-            <a:off x="822960" y="6022158"/>
-            <a:ext cx="10545775" cy="378642"/>
-          </a:xfrm>
-          <a:prstGeom prst="rect">
-            <a:avLst/>
-          </a:prstGeom>
-          <a:noFill/>
-        </p:spPr>
-        <p:txBody>
-          <a:bodyPr wrap="square" anchor="t" lIns="0" rIns="0" tIns="0" bIns="0"/>
-          <a:lstStyle/>
-          <a:p>
-            <a:pPr algn="l">
-              <a:lnSpc>
-                <a:spcPct val="112000"/>
-              </a:lnSpc>
-              <a:spcBef>
-                <a:spcPts val="0"/>
-              </a:spcBef>
-            </a:pPr>
-            <a:r>
-              <a:rPr sz="2200" b="0" i="1">
-                <a:solidFill>
-                  <a:srgbClr val="707078"/>
-                </a:solidFill>
-                <a:latin typeface="Inter"/>
-              </a:rPr>
-              <a:t>Which of these could you test by watching people?</a:t>
             </a:r>
           </a:p>
         </p:txBody>
@@ -11466,7 +11520,7 @@
                 </a:solidFill>
                 <a:latin typeface="Inter"/>
               </a:rPr>
-              <a:t>What Git and Jujutsu did</a:t>
+              <a:t>Your designs</a:t>
             </a:r>
           </a:p>
         </p:txBody>
@@ -11480,7 +11534,7 @@
         <p:spPr>
           <a:xfrm>
             <a:off x="822960" y="1831441"/>
-            <a:ext cx="8647535" cy="2398856"/>
+            <a:ext cx="8647535" cy="757285"/>
           </a:xfrm>
           <a:prstGeom prst="rect">
             <a:avLst/>
@@ -11502,156 +11556,11 @@
             <a:r>
               <a:rPr sz="2200" b="0" i="0">
                 <a:solidFill>
-                  <a:srgbClr val="111111"/>
-                </a:solidFill>
-                <a:latin typeface="Inter"/>
-              </a:rPr>
-              <a:t>Git 2.23 (2019) split </a:t>
-            </a:r>
-            <a:r>
-              <a:rPr sz="2200" b="0" i="0">
-                <a:solidFill>
-                  <a:srgbClr val="111111"/>
-                </a:solidFill>
-                <a:latin typeface="Noto Sans Mono"/>
-              </a:rPr>
-              <a:t>git checkout</a:t>
-            </a:r>
-            <a:r>
-              <a:rPr sz="2200" b="0" i="0">
-                <a:solidFill>
-                  <a:srgbClr val="111111"/>
-                </a:solidFill>
-                <a:latin typeface="Inter"/>
-              </a:rPr>
-              <a:t> into </a:t>
-            </a:r>
-            <a:r>
-              <a:rPr sz="2200" b="0" i="0">
-                <a:solidFill>
-                  <a:srgbClr val="111111"/>
-                </a:solidFill>
-                <a:latin typeface="Noto Sans Mono"/>
-              </a:rPr>
-              <a:t>git switch</a:t>
-            </a:r>
-            <a:r>
-              <a:rPr sz="2200" b="0" i="0">
-                <a:solidFill>
-                  <a:srgbClr val="111111"/>
-                </a:solidFill>
-                <a:latin typeface="Inter"/>
-              </a:rPr>
-              <a:t> and </a:t>
-            </a:r>
-            <a:r>
-              <a:rPr sz="2200" b="0" i="0">
-                <a:solidFill>
-                  <a:srgbClr val="111111"/>
-                </a:solidFill>
-                <a:latin typeface="Noto Sans Mono"/>
-              </a:rPr>
-              <a:t>git restore</a:t>
-            </a:r>
-            <a:r>
-              <a:rPr sz="2200" b="0" i="0">
-                <a:solidFill>
-                  <a:srgbClr val="111111"/>
-                </a:solidFill>
-                <a:latin typeface="Inter"/>
-              </a:rPr>
-              <a:t>. In 2020 a developer “working with Git for years” asked what </a:t>
-            </a:r>
-            <a:r>
-              <a:rPr sz="2200" b="0" i="0">
-                <a:solidFill>
-                  <a:srgbClr val="111111"/>
-                </a:solidFill>
-                <a:latin typeface="Noto Sans Mono"/>
-              </a:rPr>
-              <a:t>git checkout [file]</a:t>
-            </a:r>
-            <a:r>
-              <a:rPr sz="2200" b="0" i="0">
-                <a:solidFill>
-                  <a:srgbClr val="111111"/>
-                </a:solidFill>
-                <a:latin typeface="Inter"/>
-              </a:rPr>
-              <a:t> does next to </a:t>
-            </a:r>
-            <a:r>
-              <a:rPr sz="2200" b="0" i="0">
-                <a:solidFill>
-                  <a:srgbClr val="111111"/>
-                </a:solidFill>
-                <a:latin typeface="Noto Sans Mono"/>
-              </a:rPr>
-              <a:t>git restore</a:t>
-            </a:r>
-            <a:r>
-              <a:rPr sz="2200" b="0" i="0">
-                <a:solidFill>
-                  <a:srgbClr val="111111"/>
-                </a:solidFill>
-                <a:latin typeface="Inter"/>
-              </a:rPr>
-              <a:t>: the paper’s reference [41].</a:t>
-            </a:r>
-          </a:p>
-          <a:p>
-            <a:pPr algn="l">
-              <a:lnSpc>
-                <a:spcPct val="112000"/>
-              </a:lnSpc>
-              <a:spcBef>
-                <a:spcPts val="1000"/>
-              </a:spcBef>
-            </a:pPr>
-            <a:r>
-              <a:rPr sz="2200" b="0" i="0">
-                <a:solidFill>
-                  <a:srgbClr val="111111"/>
-                </a:solidFill>
-                <a:latin typeface="Inter"/>
-              </a:rPr>
-              <a:t>Jujutsu (</a:t>
-            </a:r>
-            <a:r>
-              <a:rPr sz="2200" b="0" i="0">
-                <a:solidFill>
-                  <a:srgbClr val="111111"/>
-                </a:solidFill>
-                <a:latin typeface="Noto Sans Mono"/>
-              </a:rPr>
-              <a:t>jj</a:t>
-            </a:r>
-            <a:r>
-              <a:rPr sz="2200" b="0" i="0">
-                <a:solidFill>
-                  <a:srgbClr val="111111"/>
-                </a:solidFill>
-                <a:latin typeface="Inter"/>
-              </a:rPr>
-              <a:t>) logs every operation, and </a:t>
-            </a:r>
-            <a:r>
-              <a:rPr sz="2200" b="0" i="0">
-                <a:solidFill>
-                  <a:srgbClr val="111111"/>
-                </a:solidFill>
-                <a:latin typeface="Noto Sans Mono"/>
-              </a:rPr>
-              <a:t>jj undo</a:t>
-            </a:r>
-            <a:r>
-              <a:rPr sz="2200" b="0" i="0">
-                <a:solidFill>
-                  <a:srgbClr val="111111"/>
-                </a:solidFill>
-                <a:latin typeface="Inter"/>
-              </a:rPr>
-              <a:t> reverses the last one.</a:t>
+                  <a:srgbClr val="707078"/>
+                </a:solidFill>
+                <a:latin typeface="Inter"/>
+              </a:rPr>
+              <a:t>Each group reads its change, the study that would show it works, and its data. The app shows all of them.</a:t>
             </a:r>
           </a:p>
         </p:txBody>
@@ -11691,7 +11600,7 @@
                 </a:solidFill>
                 <a:latin typeface="Inter"/>
               </a:rPr>
-              <a:t>Which data would convince Git’s maintainers your change works?</a:t>
+              <a:t>Which of these could you test by watching people? Which threat is hardest?</a:t>
             </a:r>
           </a:p>
         </p:txBody>
@@ -11909,6 +11818,334 @@
     <p:bg>
       <p:bgPr>
         <a:solidFill>
+          <a:srgbClr val="FFFFFF"/>
+        </a:solidFill>
+        <a:effectLst/>
+      </p:bgPr>
+    </p:bg>
+    <p:spTree>
+      <p:nvGrpSpPr>
+        <p:cNvPr id="1" name=""/>
+        <p:cNvGrpSpPr/>
+        <p:nvPr/>
+      </p:nvGrpSpPr>
+      <p:grpSpPr/>
+      <p:sp>
+        <p:nvSpPr>
+          <p:cNvPr id="2" name="TextBox 1"/>
+          <p:cNvSpPr txBox="1"/>
+          <p:nvPr/>
+        </p:nvSpPr>
+        <p:spPr>
+          <a:xfrm>
+            <a:off x="822960" y="502920"/>
+            <a:ext cx="10545775" cy="320040"/>
+          </a:xfrm>
+          <a:prstGeom prst="rect">
+            <a:avLst/>
+          </a:prstGeom>
+          <a:noFill/>
+        </p:spPr>
+        <p:txBody>
+          <a:bodyPr wrap="square" anchor="t" lIns="0" rIns="0" tIns="0" bIns="0"/>
+          <a:lstStyle/>
+          <a:p>
+            <a:pPr algn="l">
+              <a:lnSpc>
+                <a:spcPct val="110000"/>
+              </a:lnSpc>
+            </a:pPr>
+            <a:r>
+              <a:rPr sz="1600" b="1">
+                <a:solidFill>
+                  <a:srgbClr val="8B3DFF"/>
+                </a:solidFill>
+                <a:latin typeface="Inter"/>
+              </a:rPr>
+              <a:t>5 · DESIGN</a:t>
+            </a:r>
+          </a:p>
+        </p:txBody>
+      </p:sp>
+      <p:sp>
+        <p:nvSpPr>
+          <p:cNvPr id="3" name="TextBox 2"/>
+          <p:cNvSpPr txBox="1"/>
+          <p:nvPr/>
+        </p:nvSpPr>
+        <p:spPr>
+          <a:xfrm>
+            <a:off x="822960" y="868680"/>
+            <a:ext cx="10545775" cy="688441"/>
+          </a:xfrm>
+          <a:prstGeom prst="rect">
+            <a:avLst/>
+          </a:prstGeom>
+          <a:noFill/>
+        </p:spPr>
+        <p:txBody>
+          <a:bodyPr wrap="square" anchor="t" lIns="0" rIns="0" tIns="0" bIns="0"/>
+          <a:lstStyle/>
+          <a:p>
+            <a:pPr algn="l">
+              <a:lnSpc>
+                <a:spcPct val="112000"/>
+              </a:lnSpc>
+              <a:spcBef>
+                <a:spcPts val="0"/>
+              </a:spcBef>
+            </a:pPr>
+            <a:r>
+              <a:rPr sz="4000" b="1" i="0">
+                <a:solidFill>
+                  <a:srgbClr val="111111"/>
+                </a:solidFill>
+                <a:latin typeface="Inter"/>
+              </a:rPr>
+              <a:t>What Git and Jujutsu did</a:t>
+            </a:r>
+          </a:p>
+        </p:txBody>
+      </p:sp>
+      <p:sp>
+        <p:nvSpPr>
+          <p:cNvPr id="4" name="TextBox 3"/>
+          <p:cNvSpPr txBox="1"/>
+          <p:nvPr/>
+        </p:nvSpPr>
+        <p:spPr>
+          <a:xfrm>
+            <a:off x="822960" y="1831441"/>
+            <a:ext cx="8647535" cy="2398856"/>
+          </a:xfrm>
+          <a:prstGeom prst="rect">
+            <a:avLst/>
+          </a:prstGeom>
+          <a:noFill/>
+        </p:spPr>
+        <p:txBody>
+          <a:bodyPr wrap="square" anchor="t" lIns="0" rIns="0" tIns="0" bIns="0"/>
+          <a:lstStyle/>
+          <a:p>
+            <a:pPr algn="l">
+              <a:lnSpc>
+                <a:spcPct val="112000"/>
+              </a:lnSpc>
+              <a:spcBef>
+                <a:spcPts val="0"/>
+              </a:spcBef>
+            </a:pPr>
+            <a:r>
+              <a:rPr sz="2200" b="0" i="0">
+                <a:solidFill>
+                  <a:srgbClr val="111111"/>
+                </a:solidFill>
+                <a:latin typeface="Inter"/>
+              </a:rPr>
+              <a:t>Git 2.23 (2019) split </a:t>
+            </a:r>
+            <a:r>
+              <a:rPr sz="2200" b="0" i="0">
+                <a:solidFill>
+                  <a:srgbClr val="111111"/>
+                </a:solidFill>
+                <a:latin typeface="Noto Sans Mono"/>
+              </a:rPr>
+              <a:t>git checkout</a:t>
+            </a:r>
+            <a:r>
+              <a:rPr sz="2200" b="0" i="0">
+                <a:solidFill>
+                  <a:srgbClr val="111111"/>
+                </a:solidFill>
+                <a:latin typeface="Inter"/>
+              </a:rPr>
+              <a:t> into </a:t>
+            </a:r>
+            <a:r>
+              <a:rPr sz="2200" b="0" i="0">
+                <a:solidFill>
+                  <a:srgbClr val="111111"/>
+                </a:solidFill>
+                <a:latin typeface="Noto Sans Mono"/>
+              </a:rPr>
+              <a:t>git switch</a:t>
+            </a:r>
+            <a:r>
+              <a:rPr sz="2200" b="0" i="0">
+                <a:solidFill>
+                  <a:srgbClr val="111111"/>
+                </a:solidFill>
+                <a:latin typeface="Inter"/>
+              </a:rPr>
+              <a:t> and </a:t>
+            </a:r>
+            <a:r>
+              <a:rPr sz="2200" b="0" i="0">
+                <a:solidFill>
+                  <a:srgbClr val="111111"/>
+                </a:solidFill>
+                <a:latin typeface="Noto Sans Mono"/>
+              </a:rPr>
+              <a:t>git restore</a:t>
+            </a:r>
+            <a:r>
+              <a:rPr sz="2200" b="0" i="0">
+                <a:solidFill>
+                  <a:srgbClr val="111111"/>
+                </a:solidFill>
+                <a:latin typeface="Inter"/>
+              </a:rPr>
+              <a:t>. In 2020 a developer “working with Git for years” asked what </a:t>
+            </a:r>
+            <a:r>
+              <a:rPr sz="2200" b="0" i="0">
+                <a:solidFill>
+                  <a:srgbClr val="111111"/>
+                </a:solidFill>
+                <a:latin typeface="Noto Sans Mono"/>
+              </a:rPr>
+              <a:t>git checkout [file]</a:t>
+            </a:r>
+            <a:r>
+              <a:rPr sz="2200" b="0" i="0">
+                <a:solidFill>
+                  <a:srgbClr val="111111"/>
+                </a:solidFill>
+                <a:latin typeface="Inter"/>
+              </a:rPr>
+              <a:t> does next to </a:t>
+            </a:r>
+            <a:r>
+              <a:rPr sz="2200" b="0" i="0">
+                <a:solidFill>
+                  <a:srgbClr val="111111"/>
+                </a:solidFill>
+                <a:latin typeface="Noto Sans Mono"/>
+              </a:rPr>
+              <a:t>git restore</a:t>
+            </a:r>
+            <a:r>
+              <a:rPr sz="2200" b="0" i="0">
+                <a:solidFill>
+                  <a:srgbClr val="111111"/>
+                </a:solidFill>
+                <a:latin typeface="Inter"/>
+              </a:rPr>
+              <a:t>: the paper’s reference [41].</a:t>
+            </a:r>
+          </a:p>
+          <a:p>
+            <a:pPr algn="l">
+              <a:lnSpc>
+                <a:spcPct val="112000"/>
+              </a:lnSpc>
+              <a:spcBef>
+                <a:spcPts val="1000"/>
+              </a:spcBef>
+            </a:pPr>
+            <a:r>
+              <a:rPr sz="2200" b="0" i="0">
+                <a:solidFill>
+                  <a:srgbClr val="111111"/>
+                </a:solidFill>
+                <a:latin typeface="Inter"/>
+              </a:rPr>
+              <a:t>Jujutsu (</a:t>
+            </a:r>
+            <a:r>
+              <a:rPr sz="2200" b="0" i="0">
+                <a:solidFill>
+                  <a:srgbClr val="111111"/>
+                </a:solidFill>
+                <a:latin typeface="Noto Sans Mono"/>
+              </a:rPr>
+              <a:t>jj</a:t>
+            </a:r>
+            <a:r>
+              <a:rPr sz="2200" b="0" i="0">
+                <a:solidFill>
+                  <a:srgbClr val="111111"/>
+                </a:solidFill>
+                <a:latin typeface="Inter"/>
+              </a:rPr>
+              <a:t>) logs every operation, and </a:t>
+            </a:r>
+            <a:r>
+              <a:rPr sz="2200" b="0" i="0">
+                <a:solidFill>
+                  <a:srgbClr val="111111"/>
+                </a:solidFill>
+                <a:latin typeface="Noto Sans Mono"/>
+              </a:rPr>
+              <a:t>jj undo</a:t>
+            </a:r>
+            <a:r>
+              <a:rPr sz="2200" b="0" i="0">
+                <a:solidFill>
+                  <a:srgbClr val="111111"/>
+                </a:solidFill>
+                <a:latin typeface="Inter"/>
+              </a:rPr>
+              <a:t> reverses the last one.</a:t>
+            </a:r>
+          </a:p>
+        </p:txBody>
+      </p:sp>
+      <p:sp>
+        <p:nvSpPr>
+          <p:cNvPr id="5" name="TextBox 4"/>
+          <p:cNvSpPr txBox="1"/>
+          <p:nvPr/>
+        </p:nvSpPr>
+        <p:spPr>
+          <a:xfrm>
+            <a:off x="822960" y="6022158"/>
+            <a:ext cx="10545775" cy="378642"/>
+          </a:xfrm>
+          <a:prstGeom prst="rect">
+            <a:avLst/>
+          </a:prstGeom>
+          <a:noFill/>
+        </p:spPr>
+        <p:txBody>
+          <a:bodyPr wrap="square" anchor="t" lIns="0" rIns="0" tIns="0" bIns="0"/>
+          <a:lstStyle/>
+          <a:p>
+            <a:pPr algn="l">
+              <a:lnSpc>
+                <a:spcPct val="112000"/>
+              </a:lnSpc>
+              <a:spcBef>
+                <a:spcPts val="0"/>
+              </a:spcBef>
+            </a:pPr>
+            <a:r>
+              <a:rPr sz="2200" b="0" i="1">
+                <a:solidFill>
+                  <a:srgbClr val="707078"/>
+                </a:solidFill>
+                <a:latin typeface="Inter"/>
+              </a:rPr>
+              <a:t>Which data would convince Git’s maintainers your change works?</a:t>
+            </a:r>
+          </a:p>
+        </p:txBody>
+      </p:sp>
+    </p:spTree>
+  </p:cSld>
+  <p:clrMapOvr>
+    <a:masterClrMapping/>
+  </p:clrMapOvr>
+</p:sld>
+</file>
+
+<file path=ppt/slides/slide21.xml><?xml version="1.0" encoding="utf-8"?>
+<p:sld xmlns:a="http://schemas.openxmlformats.org/drawingml/2006/main" xmlns:p="http://schemas.openxmlformats.org/presentationml/2006/main" xmlns:r="http://schemas.openxmlformats.org/officeDocument/2006/relationships">
+  <p:cSld>
+    <p:bg>
+      <p:bgPr>
+        <a:solidFill>
           <a:srgbClr val="F4ECFB"/>
         </a:solidFill>
         <a:effectLst/>
@@ -12087,7 +12324,7 @@
 </p:sld>
 </file>
 
-<file path=ppt/slides/slide21.xml><?xml version="1.0" encoding="utf-8"?>
+<file path=ppt/slides/slide22.xml><?xml version="1.0" encoding="utf-8"?>
 <p:sld xmlns:a="http://schemas.openxmlformats.org/drawingml/2006/main" xmlns:p="http://schemas.openxmlformats.org/presentationml/2006/main" xmlns:r="http://schemas.openxmlformats.org/officeDocument/2006/relationships">
   <p:cSld>
     <p:bg>
@@ -12217,7 +12454,7 @@
                 </a:solidFill>
                 <a:latin typeface="Inter"/>
               </a:rPr>
-              <a:t>Tuesday: flat history is data loss. Thursday: asking is not using.</a:t>
+              <a:t>Neither the survey (we ask them) nor Stack Overflow (they ask) shows anyone using Git.</a:t>
             </a:r>
           </a:p>
           <a:p>
@@ -12236,7 +12473,7 @@
                 </a:solidFill>
                 <a:latin typeface="Inter"/>
               </a:rPr>
-              <a:t>Both: check what your data actually records before you believe it.</a:t>
+              <a:t>Both days: check what your data actually records before you believe it.</a:t>
             </a:r>
           </a:p>
         </p:txBody>
@@ -14400,7 +14637,7 @@
                 </a:solidFill>
                 <a:latin typeface="Inter"/>
               </a:rPr>
-              <a:t>Observation: watching people use Git</a:t>
+              <a:t>Observation: someone watched people use Git</a:t>
             </a:r>
           </a:p>
         </p:txBody>
@@ -14472,7 +14709,7 @@
                 </a:solidFill>
                 <a:latin typeface="Inter"/>
               </a:rPr>
-              <a:t>Traces: records left by real work</a:t>
+              <a:t>Traces: records people left while working</a:t>
             </a:r>
           </a:p>
         </p:txBody>
@@ -14544,7 +14781,7 @@
                 </a:solidFill>
                 <a:latin typeface="Inter"/>
               </a:rPr>
-              <a:t>Self-report: people telling us</a:t>
+              <a:t>Self-report: people describing their own experience</a:t>
             </a:r>
           </a:p>
         </p:txBody>
@@ -14719,7 +14956,7 @@
                 </a:solidFill>
                 <a:latin typeface="Inter"/>
               </a:rPr>
-              <a:t>Observation: watching people use Git</a:t>
+              <a:t>Observation: someone watched people use Git</a:t>
             </a:r>
           </a:p>
         </p:txBody>
@@ -14791,7 +15028,7 @@
                 </a:solidFill>
                 <a:latin typeface="Inter"/>
               </a:rPr>
-              <a:t>Traces: records left by real work  ✓</a:t>
+              <a:t>Traces: records people left while working  ✓</a:t>
             </a:r>
           </a:p>
         </p:txBody>
@@ -14863,7 +15100,7 @@
                 </a:solidFill>
                 <a:latin typeface="Inter"/>
               </a:rPr>
-              <a:t>Self-report: people telling us</a:t>
+              <a:t>Self-report: people describing their own experience</a:t>
             </a:r>
           </a:p>
         </p:txBody>
@@ -14903,7 +15140,7 @@
                 </a:solidFill>
                 <a:latin typeface="Inter"/>
               </a:rPr>
-              <a:t>Stack Overflow questions are on Sarah’s list of traces: better than asking people, worse than watching them.</a:t>
+              <a:t>Sarah’s ladder: watching beats traces, traces beat asking. Stack Overflow questions are on her list of traces.</a:t>
             </a:r>
           </a:p>
           <a:p>
@@ -14922,7 +15159,7 @@
                 </a:solidFill>
                 <a:latin typeface="Inter"/>
               </a:rPr>
-              <a:t>They record people asking, not people using Git. A common problem is asked once, then viewed millions of times.</a:t>
+              <a:t>Traces of asking, not of using. A question body is also partly self-report: the asker describes the problem.</a:t>
             </a:r>
           </a:p>
           <a:p>
@@ -14941,7 +15178,7 @@
                 </a:solidFill>
                 <a:latin typeface="Inter"/>
               </a:rPr>
-              <a:t>RQ5 is self-report. Nobody in this paper was watched using Git.</a:t>
+              <a:t>RQ5 is a survey. Nobody in this paper was watched using Git.</a:t>
             </a:r>
           </a:p>
         </p:txBody>
@@ -16837,7 +17074,7 @@
                 </a:solidFill>
                 <a:latin typeface="Inter"/>
               </a:rPr>
-              <a:t>Which of these numbers would you trust? Did Tuesday change your answer?</a:t>
+              <a:t>Your level, and how you learned: which would you trust?</a:t>
             </a:r>
           </a:p>
         </p:txBody>

--- a/slides/thursday_app.pptx
+++ b/slides/thursday_app.pptx
@@ -27,6 +27,7 @@
     <p:sldId id="275" r:id="rId27"/>
     <p:sldId id="276" r:id="rId28"/>
     <p:sldId id="277" r:id="rId29"/>
+    <p:sldId id="278" r:id="rId30"/>
   </p:sldIdLst>
   <p:sldSz cx="12191695" cy="6858000" type="screen4x3"/>
   <p:notesSz cx="6858000" cy="9144000"/>
@@ -1589,7 +1590,7 @@
           <a:lstStyle/>
           <a:p>
             <a:r>
-              <a:t>Say: Sarah’s bar: nobody leaves without a new insight about designing tools for humans.</a:t>
+              <a:t>Say: Fair to the authors: need-finding from public data is useful, and they published it. What breaks is turning counts of asking into claims about difficulty and skill.</a:t>
             </a:r>
           </a:p>
         </p:txBody>
@@ -1615,6 +1616,76 @@
 </file>
 
 <file path=ppt/notesSlides/notesSlide22.xml><?xml version="1.0" encoding="utf-8"?>
+<p:notes xmlns:a="http://schemas.openxmlformats.org/drawingml/2006/main" xmlns:p="http://schemas.openxmlformats.org/presentationml/2006/main" xmlns:r="http://schemas.openxmlformats.org/officeDocument/2006/relationships">
+  <p:cSld>
+    <p:spTree>
+      <p:nvGrpSpPr>
+        <p:cNvPr id="1" name=""/>
+        <p:cNvGrpSpPr/>
+        <p:nvPr/>
+      </p:nvGrpSpPr>
+      <p:grpSpPr>
+        <a:xfrm>
+          <a:off x="0" y="0"/>
+          <a:ext cx="0" cy="0"/>
+          <a:chOff x="0" y="0"/>
+          <a:chExt cx="0" cy="0"/>
+        </a:xfrm>
+      </p:grpSpPr>
+      <p:sp>
+        <p:nvSpPr>
+          <p:cNvPr id="2" name="Slide Image Placeholder 1"/>
+          <p:cNvSpPr>
+            <a:spLocks noGrp="1"/>
+          </p:cNvSpPr>
+          <p:nvPr>
+            <p:ph type="sldImg" idx="2"/>
+          </p:nvPr>
+        </p:nvSpPr>
+        <p:spPr/>
+      </p:sp>
+      <p:sp>
+        <p:nvSpPr>
+          <p:cNvPr id="3" name="Notes Placeholder 2"/>
+          <p:cNvSpPr>
+            <a:spLocks noGrp="1"/>
+          </p:cNvSpPr>
+          <p:nvPr>
+            <p:ph type="body" idx="3" sz="quarter"/>
+          </p:nvPr>
+        </p:nvSpPr>
+        <p:spPr/>
+        <p:txBody>
+          <a:bodyPr/>
+          <a:lstStyle/>
+          <a:p>
+            <a:r>
+              <a:t>Say: Sarah’s bar: nobody leaves without a new insight about designing tools for humans.</a:t>
+            </a:r>
+          </a:p>
+        </p:txBody>
+      </p:sp>
+      <p:sp>
+        <p:nvSpPr>
+          <p:cNvPr id="4" name="Slide Number Placeholder 3"/>
+          <p:cNvSpPr>
+            <a:spLocks noGrp="1"/>
+          </p:cNvSpPr>
+          <p:nvPr>
+            <p:ph type="sldNum" idx="5" sz="quarter"/>
+          </p:nvPr>
+        </p:nvSpPr>
+        <p:spPr/>
+      </p:sp>
+    </p:spTree>
+  </p:cSld>
+  <p:clrMapOvr>
+    <a:masterClrMapping/>
+  </p:clrMapOvr>
+</p:notes>
+</file>
+
+<file path=ppt/notesSlides/notesSlide23.xml><?xml version="1.0" encoding="utf-8"?>
 <p:notes xmlns:a="http://schemas.openxmlformats.org/drawingml/2006/main" xmlns:p="http://schemas.openxmlformats.org/presentationml/2006/main" xmlns:r="http://schemas.openxmlformats.org/officeDocument/2006/relationships">
   <p:cSld>
     <p:spTree>
@@ -5334,7 +5405,7 @@
                 </a:solidFill>
                 <a:latin typeface="Inter"/>
               </a:rPr>
-              <a:t>CS294 Modern Programming Tools · Thursday · 80 minutes (74 + 6 of buffer)</a:t>
+              <a:t>CS294 Modern Programming Tools · Thursday · 80 minutes (76 + 4 of buffer)</a:t>
             </a:r>
           </a:p>
         </p:txBody>
@@ -11560,7 +11631,7 @@
                 </a:solidFill>
                 <a:latin typeface="Inter"/>
               </a:rPr>
-              <a:t>Each group reads its change, the study that would show it works, and its data. The app shows all of them.</a:t>
+              <a:t>Each group reads its change, its study, its measure and threat, and its data. The app shows all of them.</a:t>
             </a:r>
           </a:p>
         </p:txBody>
@@ -12146,6 +12217,472 @@
     <p:bg>
       <p:bgPr>
         <a:solidFill>
+          <a:srgbClr val="FFFFFF"/>
+        </a:solidFill>
+        <a:effectLst/>
+      </p:bgPr>
+    </p:bg>
+    <p:spTree>
+      <p:nvGrpSpPr>
+        <p:cNvPr id="1" name=""/>
+        <p:cNvGrpSpPr/>
+        <p:nvPr/>
+      </p:nvGrpSpPr>
+      <p:grpSpPr/>
+      <p:sp>
+        <p:nvSpPr>
+          <p:cNvPr id="2" name="TextBox 1"/>
+          <p:cNvSpPr txBox="1"/>
+          <p:nvPr/>
+        </p:nvSpPr>
+        <p:spPr>
+          <a:xfrm>
+            <a:off x="822960" y="502920"/>
+            <a:ext cx="10545775" cy="320040"/>
+          </a:xfrm>
+          <a:prstGeom prst="rect">
+            <a:avLst/>
+          </a:prstGeom>
+          <a:noFill/>
+        </p:spPr>
+        <p:txBody>
+          <a:bodyPr wrap="square" anchor="t" lIns="0" rIns="0" tIns="0" bIns="0"/>
+          <a:lstStyle/>
+          <a:p>
+            <a:pPr algn="l">
+              <a:lnSpc>
+                <a:spcPct val="110000"/>
+              </a:lnSpc>
+            </a:pPr>
+            <a:r>
+              <a:rPr sz="1600" b="1">
+                <a:solidFill>
+                  <a:srgbClr val="8B3DFF"/>
+                </a:solidFill>
+                <a:latin typeface="Inter"/>
+              </a:rPr>
+              <a:t>THURSDAY</a:t>
+            </a:r>
+          </a:p>
+        </p:txBody>
+      </p:sp>
+      <p:sp>
+        <p:nvSpPr>
+          <p:cNvPr id="3" name="TextBox 2"/>
+          <p:cNvSpPr txBox="1"/>
+          <p:nvPr/>
+        </p:nvSpPr>
+        <p:spPr>
+          <a:xfrm>
+            <a:off x="822960" y="868680"/>
+            <a:ext cx="10545775" cy="688441"/>
+          </a:xfrm>
+          <a:prstGeom prst="rect">
+            <a:avLst/>
+          </a:prstGeom>
+          <a:noFill/>
+        </p:spPr>
+        <p:txBody>
+          <a:bodyPr wrap="square" anchor="t" lIns="0" rIns="0" tIns="0" bIns="0"/>
+          <a:lstStyle/>
+          <a:p>
+            <a:pPr algn="l">
+              <a:lnSpc>
+                <a:spcPct val="112000"/>
+              </a:lnSpc>
+              <a:spcBef>
+                <a:spcPts val="0"/>
+              </a:spcBef>
+            </a:pPr>
+            <a:r>
+              <a:rPr sz="4000" b="1" i="0">
+                <a:solidFill>
+                  <a:srgbClr val="111111"/>
+                </a:solidFill>
+                <a:latin typeface="Inter"/>
+              </a:rPr>
+              <a:t>The paper: what holds, what doesn’t</a:t>
+            </a:r>
+          </a:p>
+        </p:txBody>
+      </p:sp>
+      <p:sp>
+        <p:nvSpPr>
+          <p:cNvPr id="4" name="TextBox 3"/>
+          <p:cNvSpPr txBox="1"/>
+          <p:nvPr/>
+        </p:nvSpPr>
+        <p:spPr>
+          <a:xfrm>
+            <a:off x="822960" y="1831441"/>
+            <a:ext cx="5044287" cy="365760"/>
+          </a:xfrm>
+          <a:prstGeom prst="rect">
+            <a:avLst/>
+          </a:prstGeom>
+          <a:noFill/>
+        </p:spPr>
+        <p:txBody>
+          <a:bodyPr wrap="square" anchor="t" lIns="0" rIns="0" tIns="0" bIns="0"/>
+          <a:lstStyle/>
+          <a:p>
+            <a:pPr algn="l">
+              <a:lnSpc>
+                <a:spcPct val="110000"/>
+              </a:lnSpc>
+            </a:pPr>
+            <a:r>
+              <a:rPr sz="2000" b="1">
+                <a:solidFill>
+                  <a:srgbClr val="16A34A"/>
+                </a:solidFill>
+                <a:latin typeface="Inter"/>
+              </a:rPr>
+              <a:t>Holds</a:t>
+            </a:r>
+          </a:p>
+        </p:txBody>
+      </p:sp>
+      <p:sp>
+        <p:nvSpPr>
+          <p:cNvPr id="5" name="Rectangle 4"/>
+          <p:cNvSpPr/>
+          <p:nvPr/>
+        </p:nvSpPr>
+        <p:spPr>
+          <a:xfrm>
+            <a:off x="822960" y="2242921"/>
+            <a:ext cx="5044287" cy="45720"/>
+          </a:xfrm>
+          <a:prstGeom prst="rect">
+            <a:avLst/>
+          </a:prstGeom>
+          <a:solidFill>
+            <a:srgbClr val="16A34A"/>
+          </a:solidFill>
+          <a:ln>
+            <a:noFill/>
+          </a:ln>
+        </p:spPr>
+        <p:txBody>
+          <a:bodyPr rtlCol="0" anchor="ctr"/>
+          <a:lstStyle/>
+          <a:p>
+            <a:pPr algn="ctr"/>
+          </a:p>
+        </p:txBody>
+      </p:sp>
+      <p:sp>
+        <p:nvSpPr>
+          <p:cNvPr id="6" name="TextBox 5"/>
+          <p:cNvSpPr txBox="1"/>
+          <p:nvPr/>
+        </p:nvSpPr>
+        <p:spPr>
+          <a:xfrm>
+            <a:off x="822960" y="2380081"/>
+            <a:ext cx="5044287" cy="2507812"/>
+          </a:xfrm>
+          <a:prstGeom prst="rect">
+            <a:avLst/>
+          </a:prstGeom>
+          <a:noFill/>
+        </p:spPr>
+        <p:txBody>
+          <a:bodyPr wrap="square" anchor="t" lIns="0" rIns="0" tIns="0" bIns="0"/>
+          <a:lstStyle/>
+          <a:p>
+            <a:pPr algn="l">
+              <a:lnSpc>
+                <a:spcPct val="112000"/>
+              </a:lnSpc>
+              <a:spcBef>
+                <a:spcPts val="0"/>
+              </a:spcBef>
+            </a:pPr>
+            <a:r>
+              <a:rPr sz="1600" b="0" i="0">
+                <a:solidFill>
+                  <a:srgbClr val="111111"/>
+                </a:solidFill>
+                <a:latin typeface="Inter"/>
+              </a:rPr>
+              <a:t>✓ Git questions are many, and steady: about 0.4% of Stack Overflow a year.</a:t>
+            </a:r>
+          </a:p>
+          <a:p>
+            <a:pPr algn="l">
+              <a:lnSpc>
+                <a:spcPct val="112000"/>
+              </a:lnSpc>
+              <a:spcBef>
+                <a:spcPts val="800"/>
+              </a:spcBef>
+            </a:pPr>
+            <a:r>
+              <a:rPr sz="1600" b="0" i="0">
+                <a:solidFill>
+                  <a:srgbClr val="111111"/>
+                </a:solidFill>
+                <a:latin typeface="Inter"/>
+              </a:rPr>
+              <a:t>✓ Undo is a real need: the most-viewed Git question asks how to undo a commit.</a:t>
+            </a:r>
+          </a:p>
+          <a:p>
+            <a:pPr algn="l">
+              <a:lnSpc>
+                <a:spcPct val="112000"/>
+              </a:lnSpc>
+              <a:spcBef>
+                <a:spcPts val="800"/>
+              </a:spcBef>
+            </a:pPr>
+            <a:r>
+              <a:rPr sz="1600" b="0" i="0">
+                <a:solidFill>
+                  <a:srgbClr val="111111"/>
+                </a:solidFill>
+                <a:latin typeface="Inter"/>
+              </a:rPr>
+              <a:t>✓ Experienced developers can have trouble: true, as written.</a:t>
+            </a:r>
+          </a:p>
+          <a:p>
+            <a:pPr algn="l">
+              <a:lnSpc>
+                <a:spcPct val="112000"/>
+              </a:lnSpc>
+              <a:spcBef>
+                <a:spcPts val="800"/>
+              </a:spcBef>
+            </a:pPr>
+            <a:r>
+              <a:rPr sz="1600" b="0" i="0">
+                <a:solidFill>
+                  <a:srgbClr val="111111"/>
+                </a:solidFill>
+                <a:latin typeface="Inter"/>
+              </a:rPr>
+              <a:t>✓ The data is public, so anyone can check it. We did.</a:t>
+            </a:r>
+          </a:p>
+        </p:txBody>
+      </p:sp>
+      <p:sp>
+        <p:nvSpPr>
+          <p:cNvPr id="7" name="TextBox 6"/>
+          <p:cNvSpPr txBox="1"/>
+          <p:nvPr/>
+        </p:nvSpPr>
+        <p:spPr>
+          <a:xfrm>
+            <a:off x="6324447" y="1831441"/>
+            <a:ext cx="5044287" cy="365760"/>
+          </a:xfrm>
+          <a:prstGeom prst="rect">
+            <a:avLst/>
+          </a:prstGeom>
+          <a:noFill/>
+        </p:spPr>
+        <p:txBody>
+          <a:bodyPr wrap="square" anchor="t" lIns="0" rIns="0" tIns="0" bIns="0"/>
+          <a:lstStyle/>
+          <a:p>
+            <a:pPr algn="l">
+              <a:lnSpc>
+                <a:spcPct val="110000"/>
+              </a:lnSpc>
+            </a:pPr>
+            <a:r>
+              <a:rPr sz="2000" b="1">
+                <a:solidFill>
+                  <a:srgbClr val="DC2626"/>
+                </a:solidFill>
+                <a:latin typeface="Inter"/>
+              </a:rPr>
+              <a:t>Does not hold, as written</a:t>
+            </a:r>
+          </a:p>
+        </p:txBody>
+      </p:sp>
+      <p:sp>
+        <p:nvSpPr>
+          <p:cNvPr id="8" name="Rectangle 7"/>
+          <p:cNvSpPr/>
+          <p:nvPr/>
+        </p:nvSpPr>
+        <p:spPr>
+          <a:xfrm>
+            <a:off x="6324447" y="2242921"/>
+            <a:ext cx="5044287" cy="45720"/>
+          </a:xfrm>
+          <a:prstGeom prst="rect">
+            <a:avLst/>
+          </a:prstGeom>
+          <a:solidFill>
+            <a:srgbClr val="DC2626"/>
+          </a:solidFill>
+          <a:ln>
+            <a:noFill/>
+          </a:ln>
+        </p:spPr>
+        <p:txBody>
+          <a:bodyPr rtlCol="0" anchor="ctr"/>
+          <a:lstStyle/>
+          <a:p>
+            <a:pPr algn="ctr"/>
+          </a:p>
+        </p:txBody>
+      </p:sp>
+      <p:sp>
+        <p:nvSpPr>
+          <p:cNvPr id="9" name="TextBox 8"/>
+          <p:cNvSpPr txBox="1"/>
+          <p:nvPr/>
+        </p:nvSpPr>
+        <p:spPr>
+          <a:xfrm>
+            <a:off x="6324447" y="2380081"/>
+            <a:ext cx="5044287" cy="3160165"/>
+          </a:xfrm>
+          <a:prstGeom prst="rect">
+            <a:avLst/>
+          </a:prstGeom>
+          <a:noFill/>
+        </p:spPr>
+        <p:txBody>
+          <a:bodyPr wrap="square" anchor="t" lIns="0" rIns="0" tIns="0" bIns="0"/>
+          <a:lstStyle/>
+          <a:p>
+            <a:pPr algn="l">
+              <a:lnSpc>
+                <a:spcPct val="112000"/>
+              </a:lnSpc>
+              <a:spcBef>
+                <a:spcPts val="0"/>
+              </a:spcBef>
+            </a:pPr>
+            <a:r>
+              <a:rPr sz="1600" b="0" i="0">
+                <a:solidFill>
+                  <a:srgbClr val="111111"/>
+                </a:solidFill>
+                <a:latin typeface="Inter"/>
+              </a:rPr>
+              <a:t>✗ “Hardest commands”: the rule counts fixes in answers as problems.</a:t>
+            </a:r>
+          </a:p>
+          <a:p>
+            <a:pPr algn="l">
+              <a:lnSpc>
+                <a:spcPct val="112000"/>
+              </a:lnSpc>
+              <a:spcBef>
+                <a:spcPts val="800"/>
+              </a:spcBef>
+            </a:pPr>
+            <a:r>
+              <a:rPr sz="1600" b="0" i="0">
+                <a:solidFill>
+                  <a:srgbClr val="111111"/>
+                </a:solidFill>
+                <a:latin typeface="Inter"/>
+              </a:rPr>
+              <a:t>✗ The command ranking: one post moves </a:t>
+            </a:r>
+            <a:r>
+              <a:rPr sz="1600" b="0" i="0">
+                <a:solidFill>
+                  <a:srgbClr val="111111"/>
+                </a:solidFill>
+                <a:latin typeface="Noto Sans Mono"/>
+              </a:rPr>
+              <a:t>git reflog</a:t>
+            </a:r>
+            <a:r>
+              <a:rPr sz="1600" b="0" i="0">
+                <a:solidFill>
+                  <a:srgbClr val="111111"/>
+                </a:solidFill>
+                <a:latin typeface="Inter"/>
+              </a:rPr>
+              <a:t> from #8 to #2.</a:t>
+            </a:r>
+          </a:p>
+          <a:p>
+            <a:pPr algn="l">
+              <a:lnSpc>
+                <a:spcPct val="112000"/>
+              </a:lnSpc>
+              <a:spcBef>
+                <a:spcPts val="800"/>
+              </a:spcBef>
+            </a:pPr>
+            <a:r>
+              <a:rPr sz="1600" b="0" i="0">
+                <a:solidFill>
+                  <a:srgbClr val="111111"/>
+                </a:solidFill>
+                <a:latin typeface="Inter"/>
+              </a:rPr>
+              <a:t>✗ “Self-learning is primary”: asked of people found on Stack Overflow.</a:t>
+            </a:r>
+          </a:p>
+          <a:p>
+            <a:pPr algn="l">
+              <a:lnSpc>
+                <a:spcPct val="112000"/>
+              </a:lnSpc>
+              <a:spcBef>
+                <a:spcPts val="800"/>
+              </a:spcBef>
+            </a:pPr>
+            <a:r>
+              <a:rPr sz="1600" b="0" i="0">
+                <a:solidFill>
+                  <a:srgbClr val="111111"/>
+                </a:solidFill>
+                <a:latin typeface="Inter"/>
+              </a:rPr>
+              <a:t>✗ Table 8 and “doubts”: no coding method; self-ratings, not skill.</a:t>
+            </a:r>
+          </a:p>
+          <a:p>
+            <a:pPr algn="l">
+              <a:lnSpc>
+                <a:spcPct val="112000"/>
+              </a:lnSpc>
+              <a:spcBef>
+                <a:spcPts val="800"/>
+              </a:spcBef>
+            </a:pPr>
+            <a:r>
+              <a:rPr sz="1600" b="0" i="0">
+                <a:solidFill>
+                  <a:srgbClr val="111111"/>
+                </a:solidFill>
+                <a:latin typeface="Inter"/>
+              </a:rPr>
+              <a:t>✗ The title’s question: nobody was watched using Git.</a:t>
+            </a:r>
+          </a:p>
+        </p:txBody>
+      </p:sp>
+    </p:spTree>
+  </p:cSld>
+  <p:clrMapOvr>
+    <a:masterClrMapping/>
+  </p:clrMapOvr>
+</p:sld>
+</file>
+
+<file path=ppt/slides/slide22.xml><?xml version="1.0" encoding="utf-8"?>
+<p:sld xmlns:a="http://schemas.openxmlformats.org/drawingml/2006/main" xmlns:p="http://schemas.openxmlformats.org/presentationml/2006/main" xmlns:r="http://schemas.openxmlformats.org/officeDocument/2006/relationships">
+  <p:cSld>
+    <p:bg>
+      <p:bgPr>
+        <a:solidFill>
           <a:srgbClr val="F4ECFB"/>
         </a:solidFill>
         <a:effectLst/>
@@ -12324,7 +12861,7 @@
 </p:sld>
 </file>
 
-<file path=ppt/slides/slide22.xml><?xml version="1.0" encoding="utf-8"?>
+<file path=ppt/slides/slide23.xml><?xml version="1.0" encoding="utf-8"?>
 <p:sld xmlns:a="http://schemas.openxmlformats.org/drawingml/2006/main" xmlns:p="http://schemas.openxmlformats.org/presentationml/2006/main" xmlns:r="http://schemas.openxmlformats.org/officeDocument/2006/relationships">
   <p:cSld>
     <p:bg>

--- a/slides/thursday_app.pptx
+++ b/slides/thursday_app.pptx
@@ -6484,7 +6484,7 @@
         <p:spPr>
           <a:xfrm>
             <a:off x="822960" y="2875481"/>
-            <a:ext cx="5181447" cy="1313992"/>
+            <a:ext cx="5181447" cy="1302145"/>
           </a:xfrm>
           <a:prstGeom prst="roundRect">
             <a:avLst>
@@ -6516,7 +6516,7 @@
         <p:spPr>
           <a:xfrm>
             <a:off x="1005840" y="3012641"/>
-            <a:ext cx="4815687" cy="201168"/>
+            <a:ext cx="4815687" cy="189321"/>
           </a:xfrm>
           <a:prstGeom prst="rect">
             <a:avLst/>
@@ -6552,7 +6552,7 @@
         </p:nvSpPr>
         <p:spPr>
           <a:xfrm>
-            <a:off x="1005840" y="3232097"/>
+            <a:off x="1005840" y="3220250"/>
             <a:ext cx="4815687" cy="774496"/>
           </a:xfrm>
           <a:prstGeom prst="rect">
@@ -6593,7 +6593,7 @@
         <p:spPr>
           <a:xfrm>
             <a:off x="6187287" y="2875481"/>
-            <a:ext cx="5181447" cy="1313992"/>
+            <a:ext cx="5181447" cy="1302145"/>
           </a:xfrm>
           <a:prstGeom prst="roundRect">
             <a:avLst>
@@ -6625,7 +6625,7 @@
         <p:spPr>
           <a:xfrm>
             <a:off x="6370167" y="3012641"/>
-            <a:ext cx="4815687" cy="201168"/>
+            <a:ext cx="4815687" cy="189321"/>
           </a:xfrm>
           <a:prstGeom prst="rect">
             <a:avLst/>
@@ -6661,7 +6661,7 @@
         </p:nvSpPr>
         <p:spPr>
           <a:xfrm>
-            <a:off x="6370167" y="3232097"/>
+            <a:off x="6370167" y="3220250"/>
             <a:ext cx="4815687" cy="774496"/>
           </a:xfrm>
           <a:prstGeom prst="rect">
@@ -6701,8 +6701,8 @@
         </p:nvSpPr>
         <p:spPr>
           <a:xfrm>
-            <a:off x="822960" y="4372353"/>
-            <a:ext cx="5181447" cy="1572158"/>
+            <a:off x="822960" y="4360506"/>
+            <a:ext cx="5181447" cy="1560311"/>
           </a:xfrm>
           <a:prstGeom prst="roundRect">
             <a:avLst>
@@ -6733,8 +6733,8 @@
         </p:nvSpPr>
         <p:spPr>
           <a:xfrm>
-            <a:off x="1005840" y="4509513"/>
-            <a:ext cx="4815687" cy="201168"/>
+            <a:off x="1005840" y="4497666"/>
+            <a:ext cx="4815687" cy="189321"/>
           </a:xfrm>
           <a:prstGeom prst="rect">
             <a:avLst/>
@@ -6770,7 +6770,7 @@
         </p:nvSpPr>
         <p:spPr>
           <a:xfrm>
-            <a:off x="1005840" y="4728969"/>
+            <a:off x="1005840" y="4705275"/>
             <a:ext cx="4815687" cy="258165"/>
           </a:xfrm>
           <a:prstGeom prst="rect">
@@ -6810,8 +6810,8 @@
         </p:nvSpPr>
         <p:spPr>
           <a:xfrm>
-            <a:off x="6187287" y="4372353"/>
-            <a:ext cx="5181447" cy="1572158"/>
+            <a:off x="6187287" y="4360506"/>
+            <a:ext cx="5181447" cy="1560311"/>
           </a:xfrm>
           <a:prstGeom prst="roundRect">
             <a:avLst>
@@ -6842,8 +6842,8 @@
         </p:nvSpPr>
         <p:spPr>
           <a:xfrm>
-            <a:off x="6370167" y="4509513"/>
-            <a:ext cx="4815687" cy="201168"/>
+            <a:off x="6370167" y="4497666"/>
+            <a:ext cx="4815687" cy="189321"/>
           </a:xfrm>
           <a:prstGeom prst="rect">
             <a:avLst/>
@@ -6879,7 +6879,7 @@
         </p:nvSpPr>
         <p:spPr>
           <a:xfrm>
-            <a:off x="6370167" y="4728969"/>
+            <a:off x="6370167" y="4705275"/>
             <a:ext cx="4815687" cy="1032662"/>
           </a:xfrm>
           <a:prstGeom prst="rect">
@@ -8205,7 +8205,7 @@
         <p:spPr>
           <a:xfrm>
             <a:off x="822960" y="2806637"/>
-            <a:ext cx="2499283" cy="1503314"/>
+            <a:ext cx="2499283" cy="1680788"/>
           </a:xfrm>
           <a:prstGeom prst="roundRect">
             <a:avLst>
@@ -8237,7 +8237,7 @@
         <p:spPr>
           <a:xfrm>
             <a:off x="1005840" y="2943797"/>
-            <a:ext cx="2133523" cy="201168"/>
+            <a:ext cx="2133523" cy="189321"/>
           </a:xfrm>
           <a:prstGeom prst="rect">
             <a:avLst/>
@@ -8273,7 +8273,7 @@
         </p:nvSpPr>
         <p:spPr>
           <a:xfrm>
-            <a:off x="1005840" y="3163253"/>
+            <a:off x="1005840" y="3151406"/>
             <a:ext cx="2133523" cy="481909"/>
           </a:xfrm>
           <a:prstGeom prst="rect">
@@ -8314,7 +8314,7 @@
         <p:spPr>
           <a:xfrm>
             <a:off x="3505123" y="2806637"/>
-            <a:ext cx="2499283" cy="1503314"/>
+            <a:ext cx="2499283" cy="1680788"/>
           </a:xfrm>
           <a:prstGeom prst="roundRect">
             <a:avLst>
@@ -8346,7 +8346,7 @@
         <p:spPr>
           <a:xfrm>
             <a:off x="3688003" y="2943797"/>
-            <a:ext cx="2133523" cy="201168"/>
+            <a:ext cx="2133523" cy="189321"/>
           </a:xfrm>
           <a:prstGeom prst="rect">
             <a:avLst/>
@@ -8382,7 +8382,7 @@
         </p:nvSpPr>
         <p:spPr>
           <a:xfrm>
-            <a:off x="3688003" y="3163253"/>
+            <a:off x="3688003" y="3151406"/>
             <a:ext cx="2133523" cy="722863"/>
           </a:xfrm>
           <a:prstGeom prst="rect">
@@ -8423,7 +8423,7 @@
         <p:spPr>
           <a:xfrm>
             <a:off x="6187286" y="2806637"/>
-            <a:ext cx="2499283" cy="1503314"/>
+            <a:ext cx="2499283" cy="1680788"/>
           </a:xfrm>
           <a:prstGeom prst="roundRect">
             <a:avLst>
@@ -8455,7 +8455,7 @@
         <p:spPr>
           <a:xfrm>
             <a:off x="6370166" y="2943797"/>
-            <a:ext cx="2133523" cy="201168"/>
+            <a:ext cx="2133523" cy="378642"/>
           </a:xfrm>
           <a:prstGeom prst="rect">
             <a:avLst/>
@@ -8491,7 +8491,7 @@
         </p:nvSpPr>
         <p:spPr>
           <a:xfrm>
-            <a:off x="6370166" y="3163253"/>
+            <a:off x="6370166" y="3340727"/>
             <a:ext cx="2133523" cy="963818"/>
           </a:xfrm>
           <a:prstGeom prst="rect">
@@ -8532,7 +8532,7 @@
         <p:spPr>
           <a:xfrm>
             <a:off x="8869449" y="2806637"/>
-            <a:ext cx="2499283" cy="1503314"/>
+            <a:ext cx="2499283" cy="1680788"/>
           </a:xfrm>
           <a:prstGeom prst="roundRect">
             <a:avLst>
@@ -8564,7 +8564,7 @@
         <p:spPr>
           <a:xfrm>
             <a:off x="9052329" y="2943797"/>
-            <a:ext cx="2133523" cy="201168"/>
+            <a:ext cx="2133523" cy="378642"/>
           </a:xfrm>
           <a:prstGeom prst="rect">
             <a:avLst/>
@@ -8600,7 +8600,7 @@
         </p:nvSpPr>
         <p:spPr>
           <a:xfrm>
-            <a:off x="9052329" y="3163253"/>
+            <a:off x="9052329" y="3340727"/>
             <a:ext cx="2133523" cy="722863"/>
           </a:xfrm>
           <a:prstGeom prst="rect">
@@ -8770,7 +8770,7 @@
                 </a:solidFill>
                 <a:latin typeface="Inter"/>
               </a:rPr>
-              <a:t>Each group reads its change, its study, its measure and threat, and its data. The app shows all of them.</a:t>
+              <a:t>Each group reads its change, its test, its measure and risk, and its data. The app shows all of them.</a:t>
             </a:r>
           </a:p>
         </p:txBody>
@@ -8993,7 +8993,7 @@
         <p:spPr>
           <a:xfrm>
             <a:off x="822960" y="3068523"/>
-            <a:ext cx="5044287" cy="1957058"/>
+            <a:ext cx="5044287" cy="2232435"/>
           </a:xfrm>
           <a:prstGeom prst="rect">
             <a:avLst/>
@@ -9057,7 +9057,7 @@
                 </a:solidFill>
                 <a:latin typeface="Inter"/>
               </a:rPr>
-              <a:t>✓ Long-time users can still get stuck.</a:t>
+              <a:t>✓ Long-time Stack Overflow users can still get stuck.</a:t>
             </a:r>
           </a:p>
           <a:p>
@@ -9979,7 +9979,7 @@
         <p:spPr>
           <a:xfrm>
             <a:off x="822960" y="1831441"/>
-            <a:ext cx="8647535" cy="884284"/>
+            <a:ext cx="8647535" cy="1262927"/>
           </a:xfrm>
           <a:prstGeom prst="rect">
             <a:avLst/>
@@ -10005,7 +10005,7 @@
                 </a:solidFill>
                 <a:latin typeface="Inter"/>
               </a:rPr>
-              <a:t>These are the questions the paper asked 92 developers.</a:t>
+              <a:t>These are the paper’s survey questions, which 92 developers answered.</a:t>
             </a:r>
           </a:p>
           <a:p>
@@ -10037,7 +10037,7 @@
         </p:nvSpPr>
         <p:spPr>
           <a:xfrm>
-            <a:off x="822960" y="2944325"/>
+            <a:off x="822960" y="3322968"/>
             <a:ext cx="8647535" cy="1969756"/>
           </a:xfrm>
           <a:prstGeom prst="rect">
@@ -10172,7 +10172,7 @@
         </p:nvSpPr>
         <p:spPr>
           <a:xfrm>
-            <a:off x="822960" y="5051241"/>
+            <a:off x="822960" y="5429884"/>
             <a:ext cx="8647535" cy="223743"/>
           </a:xfrm>
           <a:prstGeom prst="rect">
@@ -11059,7 +11059,7 @@
                 </a:solidFill>
                 <a:latin typeface="Inter"/>
               </a:rPr>
-              <a:t>Many askers are long-time users. In 2020, 40% had joined Stack Overflow more than 5 years earlier.</a:t>
+              <a:t>Many askers have old Stack Overflow accounts. In 2020, 40% had joined more than 5 years earlier.</a:t>
             </a:r>
           </a:p>
         </p:txBody>
@@ -13585,7 +13585,7 @@
         <p:spPr>
           <a:xfrm>
             <a:off x="822960" y="3322968"/>
-            <a:ext cx="3393338" cy="1021405"/>
+            <a:ext cx="3393338" cy="1009558"/>
           </a:xfrm>
           <a:prstGeom prst="roundRect">
             <a:avLst>
@@ -13617,7 +13617,7 @@
         <p:spPr>
           <a:xfrm>
             <a:off x="1005840" y="3460128"/>
-            <a:ext cx="3027578" cy="201168"/>
+            <a:ext cx="3027578" cy="189321"/>
           </a:xfrm>
           <a:prstGeom prst="rect">
             <a:avLst/>
@@ -13653,7 +13653,7 @@
         </p:nvSpPr>
         <p:spPr>
           <a:xfrm>
-            <a:off x="1005840" y="3679584"/>
+            <a:off x="1005840" y="3667737"/>
             <a:ext cx="3027578" cy="481909"/>
           </a:xfrm>
           <a:prstGeom prst="rect">
@@ -13694,7 +13694,7 @@
         <p:spPr>
           <a:xfrm>
             <a:off x="4399178" y="3322968"/>
-            <a:ext cx="3393338" cy="1021405"/>
+            <a:ext cx="3393338" cy="1009558"/>
           </a:xfrm>
           <a:prstGeom prst="roundRect">
             <a:avLst>
@@ -13726,7 +13726,7 @@
         <p:spPr>
           <a:xfrm>
             <a:off x="4582058" y="3460128"/>
-            <a:ext cx="3027578" cy="201168"/>
+            <a:ext cx="3027578" cy="189321"/>
           </a:xfrm>
           <a:prstGeom prst="rect">
             <a:avLst/>
@@ -13762,7 +13762,7 @@
         </p:nvSpPr>
         <p:spPr>
           <a:xfrm>
-            <a:off x="4582058" y="3679584"/>
+            <a:off x="4582058" y="3667737"/>
             <a:ext cx="3027578" cy="481909"/>
           </a:xfrm>
           <a:prstGeom prst="rect">
@@ -13803,7 +13803,7 @@
         <p:spPr>
           <a:xfrm>
             <a:off x="7975396" y="3322968"/>
-            <a:ext cx="3393338" cy="1021405"/>
+            <a:ext cx="3393338" cy="1009558"/>
           </a:xfrm>
           <a:prstGeom prst="roundRect">
             <a:avLst>
@@ -13835,7 +13835,7 @@
         <p:spPr>
           <a:xfrm>
             <a:off x="8158276" y="3460128"/>
-            <a:ext cx="3027578" cy="201168"/>
+            <a:ext cx="3027578" cy="189321"/>
           </a:xfrm>
           <a:prstGeom prst="rect">
             <a:avLst/>
@@ -13871,7 +13871,7 @@
         </p:nvSpPr>
         <p:spPr>
           <a:xfrm>
-            <a:off x="8158276" y="3679584"/>
+            <a:off x="8158276" y="3667737"/>
             <a:ext cx="3027578" cy="481909"/>
           </a:xfrm>
           <a:prstGeom prst="rect">
@@ -13911,7 +13911,7 @@
         </p:nvSpPr>
         <p:spPr>
           <a:xfrm>
-            <a:off x="822960" y="4572973"/>
+            <a:off x="822960" y="4561126"/>
             <a:ext cx="8647535" cy="1152306"/>
           </a:xfrm>
           <a:prstGeom prst="rect">
@@ -13957,7 +13957,7 @@
                 </a:solidFill>
                 <a:latin typeface="Inter"/>
               </a:rPr>
-              <a:t>Drawn at random from short, answered posts credited to the top-5 commands (analysis/thursday_numbers.py, seed 294).</a:t>
+              <a:t>Drawn at random from short, answered posts counted for the five most-viewed commands.</a:t>
             </a:r>
           </a:p>
         </p:txBody>

--- a/slides/thursday_app.pptx
+++ b/slides/thursday_app.pptx
@@ -742,33 +742,33 @@
           <a:lstStyle/>
           <a:p>
             <a:r>
-              <a:t>Say: One claim per group. The paper is open on their laptops; the hint points to the section.</a:t>
+              <a:t>Say: One claim per group. Everything they need is on their screen: the claim and the facts behind it. Nobody needs the paper.</a:t>
             </a:r>
           </a:p>
           <a:p/>
           <a:p>
             <a:r>
-              <a:t>The hint each group sees:</a:t>
-            </a:r>
-          </a:p>
-          <a:p>
-            <a:r>
-              <a:t>- "This suggests that even developers with years of development experience can have trouble using Git commands." Look at: How did the authors measure experience? See §2.1 Step 4 and §5.</a:t>
-            </a:r>
-          </a:p>
-          <a:p>
-            <a:r>
-              <a:t>- "…for the more frequently-used commands, git credential and git submodule are among the most difficult ones." Look at: What does “difficult” mean in §3.4? For comparison, 36.5% of all the Git questions have no accepted answer (our count on the paper’s data).</a:t>
-            </a:r>
-          </a:p>
-          <a:p>
-            <a:r>
-              <a:t>- "Self-learning is the primary learning approach." Look at: Who was asked, and how were they found? See §2.2.</a:t>
-            </a:r>
-          </a:p>
-          <a:p>
-            <a:r>
-              <a:t>- "This result, although surprising, is consistent with the conclusion we obtained in RQ2, indicating that even experienced developers still have doubts about Git usage." Look at: What is the evidence for “doubts”? See §3.5 and Figure 4.</a:t>
+              <a:t>The facts each group sees with its claim:</a:t>
+            </a:r>
+          </a:p>
+          <a:p>
+            <a:r>
+              <a:t>- "This suggests that even developers with years of development experience can have trouble using Git commands." The authors measured experience as the years since the asker joined Stack Overflow. In 2020, 40.0% of Git askers had joined more than 5 years earlier. Among all Stack Overflow askers, 21.2% had. The authors themselves call this a stand-in for experience (§5). Two askers are quoted saying they have programmed for years and still struggle with Git.</a:t>
+            </a:r>
+          </a:p>
+          <a:p>
+            <a:r>
+              <a:t>- "…for the more frequently-used commands, git credential and git submodule are among the most difficult ones." “Difficult” was measured as the share of a command’s questions where the asker never marked an answer as accepted. git credential: 43.0% of 328 questions. git submodule: 37.5% of 2,911. All Git questions together: 36.5% (our count on the paper’s data). A question counts for a command when the command’s name appears in the question or in its accepted answer. Accepting an answer is one click by the asker. The authors note askers may forget it (§5).</a:t>
+            </a:r>
+          </a:p>
+          <a:p>
+            <a:r>
+              <a:t>- "Self-learning is the primary learning approach." The survey was sent to 508 people. 92 answered. The people invited were developers who had recently asked a Git question on Stack Overflow, plus some researchers. Of all the learning approaches ticked, 81.7% were self-learning (161 of 197 ticks). By people: 85 of 92 ticked the internet, 76 the documentation.</a:t>
+            </a:r>
+          </a:p>
+          <a:p>
+            <a:r>
+              <a:t>- "This result, although surprising, is consistent with the conclusion we obtained in RQ2, indicating that even experienced developers still have doubts about Git usage." The 92 rated their own Git level on a five-step scale: novice, advanced beginner, competent, proficient, expert. 79 of 92 chose competent or below. Many of them had used Git for more than five years. Nobody’s Git skill was tested.</a:t>
             </a:r>
           </a:p>
         </p:txBody>
@@ -6425,7 +6425,7 @@
         <p:spPr>
           <a:xfrm>
             <a:off x="822960" y="1831441"/>
-            <a:ext cx="8647535" cy="815440"/>
+            <a:ext cx="8647535" cy="1159661"/>
           </a:xfrm>
           <a:prstGeom prst="rect">
             <a:avLst/>
@@ -6451,7 +6451,7 @@
                 </a:solidFill>
                 <a:latin typeface="Inter"/>
               </a:rPr>
-              <a:t>Your group has one sentence from the paper to check.</a:t>
+              <a:t>Your group has one sentence from the paper, and the facts behind it.</a:t>
             </a:r>
           </a:p>
           <a:p>
@@ -6470,7 +6470,7 @@
                 </a:solidFill>
                 <a:latin typeface="Inter"/>
               </a:rPr>
-              <a:t>Write what the authors measured, then what that really shows.</a:t>
+              <a:t>Write what the facts really show, then what you would need to believe the claim.</a:t>
             </a:r>
           </a:p>
         </p:txBody>
@@ -6483,7 +6483,7 @@
         </p:nvSpPr>
         <p:spPr>
           <a:xfrm>
-            <a:off x="822960" y="2875481"/>
+            <a:off x="822960" y="3219702"/>
             <a:ext cx="5181447" cy="1302145"/>
           </a:xfrm>
           <a:prstGeom prst="roundRect">
@@ -6515,7 +6515,7 @@
         </p:nvSpPr>
         <p:spPr>
           <a:xfrm>
-            <a:off x="1005840" y="3012641"/>
+            <a:off x="1005840" y="3356862"/>
             <a:ext cx="4815687" cy="189321"/>
           </a:xfrm>
           <a:prstGeom prst="rect">
@@ -6552,7 +6552,7 @@
         </p:nvSpPr>
         <p:spPr>
           <a:xfrm>
-            <a:off x="1005840" y="3220250"/>
+            <a:off x="1005840" y="3564471"/>
             <a:ext cx="4815687" cy="774496"/>
           </a:xfrm>
           <a:prstGeom prst="rect">
@@ -6592,7 +6592,7 @@
         </p:nvSpPr>
         <p:spPr>
           <a:xfrm>
-            <a:off x="6187287" y="2875481"/>
+            <a:off x="6187287" y="3219702"/>
             <a:ext cx="5181447" cy="1302145"/>
           </a:xfrm>
           <a:prstGeom prst="roundRect">
@@ -6624,7 +6624,7 @@
         </p:nvSpPr>
         <p:spPr>
           <a:xfrm>
-            <a:off x="6370167" y="3012641"/>
+            <a:off x="6370167" y="3356862"/>
             <a:ext cx="4815687" cy="189321"/>
           </a:xfrm>
           <a:prstGeom prst="rect">
@@ -6661,7 +6661,7 @@
         </p:nvSpPr>
         <p:spPr>
           <a:xfrm>
-            <a:off x="6370167" y="3220250"/>
+            <a:off x="6370167" y="3564471"/>
             <a:ext cx="4815687" cy="774496"/>
           </a:xfrm>
           <a:prstGeom prst="rect">
@@ -6701,7 +6701,7 @@
         </p:nvSpPr>
         <p:spPr>
           <a:xfrm>
-            <a:off x="822960" y="4360506"/>
+            <a:off x="822960" y="4704727"/>
             <a:ext cx="5181447" cy="1560311"/>
           </a:xfrm>
           <a:prstGeom prst="roundRect">
@@ -6733,7 +6733,7 @@
         </p:nvSpPr>
         <p:spPr>
           <a:xfrm>
-            <a:off x="1005840" y="4497666"/>
+            <a:off x="1005840" y="4841887"/>
             <a:ext cx="4815687" cy="189321"/>
           </a:xfrm>
           <a:prstGeom prst="rect">
@@ -6770,7 +6770,7 @@
         </p:nvSpPr>
         <p:spPr>
           <a:xfrm>
-            <a:off x="1005840" y="4705275"/>
+            <a:off x="1005840" y="5049496"/>
             <a:ext cx="4815687" cy="258165"/>
           </a:xfrm>
           <a:prstGeom prst="rect">
@@ -6810,7 +6810,7 @@
         </p:nvSpPr>
         <p:spPr>
           <a:xfrm>
-            <a:off x="6187287" y="4360506"/>
+            <a:off x="6187287" y="4704727"/>
             <a:ext cx="5181447" cy="1560311"/>
           </a:xfrm>
           <a:prstGeom prst="roundRect">
@@ -6842,7 +6842,7 @@
         </p:nvSpPr>
         <p:spPr>
           <a:xfrm>
-            <a:off x="6370167" y="4497666"/>
+            <a:off x="6370167" y="4841887"/>
             <a:ext cx="4815687" cy="189321"/>
           </a:xfrm>
           <a:prstGeom prst="rect">
@@ -6879,7 +6879,7 @@
         </p:nvSpPr>
         <p:spPr>
           <a:xfrm>
-            <a:off x="6370167" y="4705275"/>
+            <a:off x="6370167" y="5049496"/>
             <a:ext cx="4815687" cy="1032662"/>
           </a:xfrm>
           <a:prstGeom prst="rect">

--- a/slides/thursday_app.pptx
+++ b/slides/thursday_app.pptx
@@ -753,12 +753,12 @@
           </a:p>
           <a:p>
             <a:r>
-              <a:t>- "This suggests that even developers with years of development experience can have trouble using Git commands." The authors measured experience as the years since the asker joined Stack Overflow. In 2020, 40.0% of Git askers had joined more than 5 years earlier. Among all Stack Overflow askers, 21.2% had. The authors themselves call this a stand-in for experience (§5). Two askers are quoted saying they have programmed for years and still struggle with Git.</a:t>
-            </a:r>
-          </a:p>
-          <a:p>
-            <a:r>
-              <a:t>- "…for the more frequently-used commands, git credential and git submodule are among the most difficult ones." “Difficult” was measured as the share of a command’s questions where the asker never marked an answer as accepted. git credential: 43.0% of 328 questions. git submodule: 37.5% of 2,911. All Git questions together: 36.5% (our count on the paper’s data). A question counts for a command when the command’s name appears in the question or in its accepted answer. Accepting an answer is one click by the asker. The authors note askers may forget it (§5).</a:t>
+              <a:t>- "This suggests that even developers with years of development experience can have trouble using Git commands." The authors measured experience as the years since the asker joined Stack Overflow. In 2020, 40.0% of Git askers had joined more than 5 years earlier. Among all Stack Overflow askers, 21.2% had. The authors themselves call this a stand-in for experience. Two askers are quoted saying they have programmed for years and still struggle with Git.</a:t>
+            </a:r>
+          </a:p>
+          <a:p>
+            <a:r>
+              <a:t>- "…for the more frequently-used commands, git credential and git submodule are among the most difficult ones." “Difficult” was measured as the share of a command’s questions where the asker never marked an answer as accepted. git credential: 43.0% of 328 questions. git submodule: 37.5% of 2,911. All Git questions together: 36.5% (our count on the paper’s data). A question counts for a command when the command’s name appears in the question or in its accepted answer. Accepting an answer is one click by the asker. The authors note askers may forget it.</a:t>
             </a:r>
           </a:p>
           <a:p>
@@ -866,7 +866,7 @@
           </a:p>
           <a:p>
             <a:r>
-              <a:t>- "…for the more frequently-used commands, git credential and git submodule are among the most difficult ones." Measured: The share of a command’s questions that have no accepted answer. Accepting an answer is one click by the asker, and it is often forgotten (§5). And a post counted through its accepted answer has one by definition, so commands that appear in fixes look easy.</a:t>
+              <a:t>- "…for the more frequently-used commands, git credential and git submodule are among the most difficult ones." Measured: The share of a command’s questions that have no accepted answer. Accepting an answer is one click by the asker, and it is often forgotten. And a post counted through its accepted answer has one by definition, so commands that appear in fixes look easy.</a:t>
             </a:r>
           </a:p>
           <a:p>
@@ -974,7 +974,7 @@
           </a:p>
           <a:p>
             <a:r>
-              <a:t>- "…for the more frequently-used commands, git credential and git submodule are among the most difficult ones." Measured: The share of a command’s questions that have no accepted answer. Accepting an answer is one click by the asker, and it is often forgotten (§5). And a post counted through its accepted answer has one by definition, so commands that appear in fixes look easy.</a:t>
+              <a:t>- "…for the more frequently-used commands, git credential and git submodule are among the most difficult ones." Measured: The share of a command’s questions that have no accepted answer. Accepting an answer is one click by the asker, and it is often forgotten. And a post counted through its accepted answer has one by definition, so commands that appear in fixes look easy.</a:t>
             </a:r>
           </a:p>
           <a:p>
@@ -8237,7 +8237,7 @@
         <p:spPr>
           <a:xfrm>
             <a:off x="1005840" y="2943797"/>
-            <a:ext cx="2133523" cy="189321"/>
+            <a:ext cx="2133523" cy="378642"/>
           </a:xfrm>
           <a:prstGeom prst="rect">
             <a:avLst/>
@@ -8260,7 +8260,7 @@
                 </a:solidFill>
                 <a:latin typeface="Inter"/>
               </a:rPr>
-              <a:t>YOUR CHANGE</a:t>
+              <a:t>YOUR CHANGE: WHAT WOULD THE USER SEE OR TYPE?</a:t>
             </a:r>
           </a:p>
         </p:txBody>
@@ -8273,8 +8273,8 @@
         </p:nvSpPr>
         <p:spPr>
           <a:xfrm>
-            <a:off x="1005840" y="3151406"/>
-            <a:ext cx="2133523" cy="481909"/>
+            <a:off x="1005840" y="3340727"/>
+            <a:ext cx="2133523" cy="722863"/>
           </a:xfrm>
           <a:prstGeom prst="rect">
             <a:avLst/>
@@ -8300,7 +8300,7 @@
                 </a:solidFill>
                 <a:latin typeface="Inter"/>
               </a:rPr>
-              <a:t>What the user would see or type</a:t>
+              <a:t>For example: a command that undoes the last thing Git did.</a:t>
             </a:r>
           </a:p>
         </p:txBody>
@@ -8346,7 +8346,7 @@
         <p:spPr>
           <a:xfrm>
             <a:off x="3688003" y="2943797"/>
-            <a:ext cx="2133523" cy="189321"/>
+            <a:ext cx="2133523" cy="378642"/>
           </a:xfrm>
           <a:prstGeom prst="rect">
             <a:avLst/>
@@ -8369,7 +8369,7 @@
                 </a:solidFill>
                 <a:latin typeface="Inter"/>
               </a:rPr>
-              <a:t>HOW YOU WOULD TEST IT</a:t>
+              <a:t>YOUR TEST: WHO WOULD TRY IT, DOING WHAT TASK?</a:t>
             </a:r>
           </a:p>
         </p:txBody>
@@ -8382,8 +8382,8 @@
         </p:nvSpPr>
         <p:spPr>
           <a:xfrm>
-            <a:off x="3688003" y="3151406"/>
-            <a:ext cx="2133523" cy="722863"/>
+            <a:off x="3688003" y="3340727"/>
+            <a:ext cx="2133523" cy="963818"/>
           </a:xfrm>
           <a:prstGeom prst="rect">
             <a:avLst/>
@@ -8409,7 +8409,7 @@
                 </a:solidFill>
                 <a:latin typeface="Inter"/>
               </a:rPr>
-              <a:t>For example: does it cut the time to recover, and for whom?</a:t>
+              <a:t>For example: 20 students who just made a bad commit, half with the change.</a:t>
             </a:r>
           </a:p>
         </p:txBody>
@@ -8455,7 +8455,7 @@
         <p:spPr>
           <a:xfrm>
             <a:off x="6370166" y="2943797"/>
-            <a:ext cx="2133523" cy="378642"/>
+            <a:ext cx="2133523" cy="567964"/>
           </a:xfrm>
           <a:prstGeom prst="rect">
             <a:avLst/>
@@ -8478,7 +8478,7 @@
                 </a:solidFill>
                 <a:latin typeface="Inter"/>
               </a:rPr>
-              <a:t>WHAT YOU WOULD MEASURE, AND ONE RISK</a:t>
+              <a:t>WHAT WOULD YOU MEASURE, AND WHAT COULD FOOL YOU?</a:t>
             </a:r>
           </a:p>
         </p:txBody>
@@ -8491,8 +8491,8 @@
         </p:nvSpPr>
         <p:spPr>
           <a:xfrm>
-            <a:off x="6370166" y="3340727"/>
-            <a:ext cx="2133523" cy="963818"/>
+            <a:off x="6370166" y="3530049"/>
+            <a:ext cx="2133523" cy="722863"/>
           </a:xfrm>
           <a:prstGeom prst="rect">
             <a:avLst/>
@@ -8518,7 +8518,7 @@
                 </a:solidFill>
                 <a:latin typeface="Inter"/>
               </a:rPr>
-              <a:t>For example: time to recover; a risk is that people learn from the first try</a:t>
+              <a:t>For example: time to recover; people get faster on the second try.</a:t>
             </a:r>
           </a:p>
         </p:txBody>
@@ -8564,7 +8564,7 @@
         <p:spPr>
           <a:xfrm>
             <a:off x="9052329" y="2943797"/>
-            <a:ext cx="2133523" cy="378642"/>
+            <a:ext cx="2133523" cy="567964"/>
           </a:xfrm>
           <a:prstGeom prst="rect">
             <a:avLst/>
@@ -8587,7 +8587,7 @@
                 </a:solidFill>
                 <a:latin typeface="Inter"/>
               </a:rPr>
-              <a:t>HOW YOU WOULD COLLECT THE DATA</a:t>
+              <a:t>HOW WOULD YOU GET THE DATA: WATCH PEOPLE, LOG REAL USE, OR ASK THEM?</a:t>
             </a:r>
           </a:p>
         </p:txBody>
@@ -8600,8 +8600,8 @@
         </p:nvSpPr>
         <p:spPr>
           <a:xfrm>
-            <a:off x="9052329" y="3340727"/>
-            <a:ext cx="2133523" cy="722863"/>
+            <a:off x="9052329" y="3530049"/>
+            <a:ext cx="2133523" cy="481909"/>
           </a:xfrm>
           <a:prstGeom prst="rect">
             <a:avLst/>
@@ -8627,7 +8627,7 @@
                 </a:solidFill>
                 <a:latin typeface="Inter"/>
               </a:rPr>
-              <a:t>Would you watch people, log real use, or ask them?</a:t>
+              <a:t>For example: screen recordings of the task.</a:t>
             </a:r>
           </a:p>
         </p:txBody>
@@ -13585,7 +13585,7 @@
         <p:spPr>
           <a:xfrm>
             <a:off x="822960" y="3322968"/>
-            <a:ext cx="3393338" cy="1009558"/>
+            <a:ext cx="3393338" cy="1439833"/>
           </a:xfrm>
           <a:prstGeom prst="roundRect">
             <a:avLst>
@@ -13640,7 +13640,7 @@
                 </a:solidFill>
                 <a:latin typeface="Inter"/>
               </a:rPr>
-              <a:t>STUCK ON IT</a:t>
+              <a:t>YES, STUCK ON IT</a:t>
             </a:r>
           </a:p>
         </p:txBody>
@@ -13680,7 +13680,7 @@
                 </a:solidFill>
                 <a:latin typeface="Inter"/>
               </a:rPr>
-              <a:t>The asker is asking about this command.</a:t>
+              <a:t>They were asking how to use this command.</a:t>
             </a:r>
           </a:p>
         </p:txBody>
@@ -13694,7 +13694,7 @@
         <p:spPr>
           <a:xfrm>
             <a:off x="4399178" y="3322968"/>
-            <a:ext cx="3393338" cy="1009558"/>
+            <a:ext cx="3393338" cy="1439833"/>
           </a:xfrm>
           <a:prstGeom prst="roundRect">
             <a:avLst>
@@ -13726,7 +13726,7 @@
         <p:spPr>
           <a:xfrm>
             <a:off x="4582058" y="3460128"/>
-            <a:ext cx="3027578" cy="189321"/>
+            <a:ext cx="3027578" cy="378642"/>
           </a:xfrm>
           <a:prstGeom prst="rect">
             <a:avLst/>
@@ -13749,7 +13749,7 @@
                 </a:solidFill>
                 <a:latin typeface="Inter"/>
               </a:rPr>
-              <a:t>NEEDS IT BUT DOESN’T KNOW IT</a:t>
+              <a:t>NO. THEY NEEDED IT BUT DID NOT KNOW IT</a:t>
             </a:r>
           </a:p>
         </p:txBody>
@@ -13762,8 +13762,8 @@
         </p:nvSpPr>
         <p:spPr>
           <a:xfrm>
-            <a:off x="4582058" y="3667737"/>
-            <a:ext cx="3027578" cy="481909"/>
+            <a:off x="4582058" y="3857058"/>
+            <a:ext cx="3027578" cy="722863"/>
           </a:xfrm>
           <a:prstGeom prst="rect">
             <a:avLst/>
@@ -13789,7 +13789,7 @@
                 </a:solidFill>
                 <a:latin typeface="Inter"/>
               </a:rPr>
-              <a:t>This command would solve their problem, but they do not know it.</a:t>
+              <a:t>The command would have fixed their problem, but they did not name it.</a:t>
             </a:r>
           </a:p>
         </p:txBody>
@@ -13803,7 +13803,7 @@
         <p:spPr>
           <a:xfrm>
             <a:off x="7975396" y="3322968"/>
-            <a:ext cx="3393338" cy="1009558"/>
+            <a:ext cx="3393338" cy="1439833"/>
           </a:xfrm>
           <a:prstGeom prst="roundRect">
             <a:avLst>
@@ -13858,7 +13858,7 @@
                 </a:solidFill>
                 <a:latin typeface="Inter"/>
               </a:rPr>
-              <a:t>NOT ABOUT IT</a:t>
+              <a:t>NO. IT IS NOT ABOUT IT</a:t>
             </a:r>
           </a:p>
         </p:txBody>
@@ -13898,7 +13898,7 @@
                 </a:solidFill>
                 <a:latin typeface="Inter"/>
               </a:rPr>
-              <a:t>The command is only mentioned; the post is about something else.</a:t>
+              <a:t>The command is only mentioned in passing.</a:t>
             </a:r>
           </a:p>
         </p:txBody>
@@ -13911,7 +13911,7 @@
         </p:nvSpPr>
         <p:spPr>
           <a:xfrm>
-            <a:off x="822960" y="4561126"/>
+            <a:off x="822960" y="4991401"/>
             <a:ext cx="8647535" cy="1152306"/>
           </a:xfrm>
           <a:prstGeom prst="rect">

--- a/slides/thursday_app.pptx
+++ b/slides/thursday_app.pptx
@@ -6484,7 +6484,7 @@
         <p:spPr>
           <a:xfrm>
             <a:off x="822960" y="3219702"/>
-            <a:ext cx="5181447" cy="1302145"/>
+            <a:ext cx="5181447" cy="1094536"/>
           </a:xfrm>
           <a:prstGeom prst="roundRect">
             <a:avLst>
@@ -6516,43 +6516,6 @@
         <p:spPr>
           <a:xfrm>
             <a:off x="1005840" y="3356862"/>
-            <a:ext cx="4815687" cy="189321"/>
-          </a:xfrm>
-          <a:prstGeom prst="rect">
-            <a:avLst/>
-          </a:prstGeom>
-          <a:noFill/>
-        </p:spPr>
-        <p:txBody>
-          <a:bodyPr wrap="square" anchor="t" lIns="0" rIns="0" tIns="0" bIns="0"/>
-          <a:lstStyle/>
-          <a:p>
-            <a:pPr algn="l">
-              <a:lnSpc>
-                <a:spcPct val="110000"/>
-              </a:lnSpc>
-            </a:pPr>
-            <a:r>
-              <a:rPr sz="1100" b="1">
-                <a:solidFill>
-                  <a:srgbClr val="707078"/>
-                </a:solidFill>
-                <a:latin typeface="Inter"/>
-              </a:rPr>
-              <a:t>RQ2, §3.2</a:t>
-            </a:r>
-          </a:p>
-        </p:txBody>
-      </p:sp>
-      <p:sp>
-        <p:nvSpPr>
-          <p:cNvPr id="8" name="TextBox 7"/>
-          <p:cNvSpPr txBox="1"/>
-          <p:nvPr/>
-        </p:nvSpPr>
-        <p:spPr>
-          <a:xfrm>
-            <a:off x="1005840" y="3564471"/>
             <a:ext cx="4815687" cy="774496"/>
           </a:xfrm>
           <a:prstGeom prst="rect">
@@ -6586,14 +6549,14 @@
       </p:sp>
       <p:sp>
         <p:nvSpPr>
-          <p:cNvPr id="9" name="Rounded Rectangle 8"/>
+          <p:cNvPr id="8" name="Rounded Rectangle 7"/>
           <p:cNvSpPr/>
           <p:nvPr/>
         </p:nvSpPr>
         <p:spPr>
           <a:xfrm>
             <a:off x="6187287" y="3219702"/>
-            <a:ext cx="5181447" cy="1302145"/>
+            <a:ext cx="5181447" cy="1094536"/>
           </a:xfrm>
           <a:prstGeom prst="roundRect">
             <a:avLst>
@@ -6618,50 +6581,13 @@
       </p:sp>
       <p:sp>
         <p:nvSpPr>
-          <p:cNvPr id="10" name="TextBox 9"/>
+          <p:cNvPr id="9" name="TextBox 8"/>
           <p:cNvSpPr txBox="1"/>
           <p:nvPr/>
         </p:nvSpPr>
         <p:spPr>
           <a:xfrm>
             <a:off x="6370167" y="3356862"/>
-            <a:ext cx="4815687" cy="189321"/>
-          </a:xfrm>
-          <a:prstGeom prst="rect">
-            <a:avLst/>
-          </a:prstGeom>
-          <a:noFill/>
-        </p:spPr>
-        <p:txBody>
-          <a:bodyPr wrap="square" anchor="t" lIns="0" rIns="0" tIns="0" bIns="0"/>
-          <a:lstStyle/>
-          <a:p>
-            <a:pPr algn="l">
-              <a:lnSpc>
-                <a:spcPct val="110000"/>
-              </a:lnSpc>
-            </a:pPr>
-            <a:r>
-              <a:rPr sz="1100" b="1">
-                <a:solidFill>
-                  <a:srgbClr val="707078"/>
-                </a:solidFill>
-                <a:latin typeface="Inter"/>
-              </a:rPr>
-              <a:t>§1, FINDING 4; §3.4</a:t>
-            </a:r>
-          </a:p>
-        </p:txBody>
-      </p:sp>
-      <p:sp>
-        <p:nvSpPr>
-          <p:cNvPr id="11" name="TextBox 10"/>
-          <p:cNvSpPr txBox="1"/>
-          <p:nvPr/>
-        </p:nvSpPr>
-        <p:spPr>
-          <a:xfrm>
-            <a:off x="6370167" y="3564471"/>
             <a:ext cx="4815687" cy="774496"/>
           </a:xfrm>
           <a:prstGeom prst="rect">
@@ -6695,14 +6621,14 @@
       </p:sp>
       <p:sp>
         <p:nvSpPr>
-          <p:cNvPr id="12" name="Rounded Rectangle 11"/>
+          <p:cNvPr id="10" name="Rounded Rectangle 9"/>
           <p:cNvSpPr/>
           <p:nvPr/>
         </p:nvSpPr>
         <p:spPr>
           <a:xfrm>
-            <a:off x="822960" y="4704727"/>
-            <a:ext cx="5181447" cy="1560311"/>
+            <a:off x="822960" y="4497118"/>
+            <a:ext cx="5181447" cy="1352702"/>
           </a:xfrm>
           <a:prstGeom prst="roundRect">
             <a:avLst>
@@ -6727,50 +6653,13 @@
       </p:sp>
       <p:sp>
         <p:nvSpPr>
-          <p:cNvPr id="13" name="TextBox 12"/>
-          <p:cNvSpPr txBox="1"/>
-          <p:nvPr/>
-        </p:nvSpPr>
-        <p:spPr>
-          <a:xfrm>
-            <a:off x="1005840" y="4841887"/>
-            <a:ext cx="4815687" cy="189321"/>
-          </a:xfrm>
-          <a:prstGeom prst="rect">
-            <a:avLst/>
-          </a:prstGeom>
-          <a:noFill/>
-        </p:spPr>
-        <p:txBody>
-          <a:bodyPr wrap="square" anchor="t" lIns="0" rIns="0" tIns="0" bIns="0"/>
-          <a:lstStyle/>
-          <a:p>
-            <a:pPr algn="l">
-              <a:lnSpc>
-                <a:spcPct val="110000"/>
-              </a:lnSpc>
-            </a:pPr>
-            <a:r>
-              <a:rPr sz="1100" b="1">
-                <a:solidFill>
-                  <a:srgbClr val="707078"/>
-                </a:solidFill>
-                <a:latin typeface="Inter"/>
-              </a:rPr>
-              <a:t>ABSTRACT; §3.5</a:t>
-            </a:r>
-          </a:p>
-        </p:txBody>
-      </p:sp>
-      <p:sp>
-        <p:nvSpPr>
-          <p:cNvPr id="14" name="TextBox 13"/>
-          <p:cNvSpPr txBox="1"/>
-          <p:nvPr/>
-        </p:nvSpPr>
-        <p:spPr>
-          <a:xfrm>
-            <a:off x="1005840" y="5049496"/>
+          <p:cNvPr id="11" name="TextBox 10"/>
+          <p:cNvSpPr txBox="1"/>
+          <p:nvPr/>
+        </p:nvSpPr>
+        <p:spPr>
+          <a:xfrm>
+            <a:off x="1005840" y="4634278"/>
             <a:ext cx="4815687" cy="258165"/>
           </a:xfrm>
           <a:prstGeom prst="rect">
@@ -6804,14 +6693,14 @@
       </p:sp>
       <p:sp>
         <p:nvSpPr>
-          <p:cNvPr id="15" name="Rounded Rectangle 14"/>
+          <p:cNvPr id="12" name="Rounded Rectangle 11"/>
           <p:cNvSpPr/>
           <p:nvPr/>
         </p:nvSpPr>
         <p:spPr>
           <a:xfrm>
-            <a:off x="6187287" y="4704727"/>
-            <a:ext cx="5181447" cy="1560311"/>
+            <a:off x="6187287" y="4497118"/>
+            <a:ext cx="5181447" cy="1352702"/>
           </a:xfrm>
           <a:prstGeom prst="roundRect">
             <a:avLst>
@@ -6836,50 +6725,13 @@
       </p:sp>
       <p:sp>
         <p:nvSpPr>
-          <p:cNvPr id="16" name="TextBox 15"/>
-          <p:cNvSpPr txBox="1"/>
-          <p:nvPr/>
-        </p:nvSpPr>
-        <p:spPr>
-          <a:xfrm>
-            <a:off x="6370167" y="4841887"/>
-            <a:ext cx="4815687" cy="189321"/>
-          </a:xfrm>
-          <a:prstGeom prst="rect">
-            <a:avLst/>
-          </a:prstGeom>
-          <a:noFill/>
-        </p:spPr>
-        <p:txBody>
-          <a:bodyPr wrap="square" anchor="t" lIns="0" rIns="0" tIns="0" bIns="0"/>
-          <a:lstStyle/>
-          <a:p>
-            <a:pPr algn="l">
-              <a:lnSpc>
-                <a:spcPct val="110000"/>
-              </a:lnSpc>
-            </a:pPr>
-            <a:r>
-              <a:rPr sz="1100" b="1">
-                <a:solidFill>
-                  <a:srgbClr val="707078"/>
-                </a:solidFill>
-                <a:latin typeface="Inter"/>
-              </a:rPr>
-              <a:t>§3.5</a:t>
-            </a:r>
-          </a:p>
-        </p:txBody>
-      </p:sp>
-      <p:sp>
-        <p:nvSpPr>
-          <p:cNvPr id="17" name="TextBox 16"/>
-          <p:cNvSpPr txBox="1"/>
-          <p:nvPr/>
-        </p:nvSpPr>
-        <p:spPr>
-          <a:xfrm>
-            <a:off x="6370167" y="5049496"/>
+          <p:cNvPr id="13" name="TextBox 12"/>
+          <p:cNvSpPr txBox="1"/>
+          <p:nvPr/>
+        </p:nvSpPr>
+        <p:spPr>
+          <a:xfrm>
+            <a:off x="6370167" y="4634278"/>
             <a:ext cx="4815687" cy="1032662"/>
           </a:xfrm>
           <a:prstGeom prst="rect">
@@ -7009,7 +6861,7 @@
                 </a:solidFill>
                 <a:latin typeface="Inter"/>
               </a:rPr>
-              <a:t>The four claims, and what the data supports (1/2)</a:t>
+              <a:t>Each claim, and what the data supports (1/2)</a:t>
             </a:r>
           </a:p>
         </p:txBody>
@@ -7023,7 +6875,7 @@
         <p:spPr>
           <a:xfrm>
             <a:off x="822960" y="2519883"/>
-            <a:ext cx="10545775" cy="309798"/>
+            <a:ext cx="10545775" cy="619597"/>
           </a:xfrm>
           <a:prstGeom prst="rect">
             <a:avLst/>
@@ -7049,7 +6901,7 @@
                 </a:solidFill>
                 <a:latin typeface="Inter"/>
               </a:rPr>
-              <a:t>Nobody was watched using Git, so the data cannot answer the paper’s title.</a:t>
+              <a:t>Nobody was watched using Git. So the data cannot answer the question in the paper’s title: do developers know how to use Git commands?</a:t>
             </a:r>
           </a:p>
         </p:txBody>
@@ -7062,7 +6914,7 @@
         </p:nvSpPr>
         <p:spPr>
           <a:xfrm>
-            <a:off x="822960" y="3058281"/>
+            <a:off x="822960" y="3368080"/>
             <a:ext cx="5181447" cy="2292887"/>
           </a:xfrm>
           <a:prstGeom prst="roundRect">
@@ -7094,7 +6946,7 @@
         </p:nvSpPr>
         <p:spPr>
           <a:xfrm>
-            <a:off x="1005840" y="3195441"/>
+            <a:off x="1005840" y="3505240"/>
             <a:ext cx="4815687" cy="774496"/>
           </a:xfrm>
           <a:prstGeom prst="rect">
@@ -7134,7 +6986,7 @@
         </p:nvSpPr>
         <p:spPr>
           <a:xfrm>
-            <a:off x="1005840" y="4061377"/>
+            <a:off x="1005840" y="4371176"/>
             <a:ext cx="4815687" cy="865957"/>
           </a:xfrm>
           <a:prstGeom prst="roundRect">
@@ -7164,7 +7016,7 @@
         </p:nvSpPr>
         <p:spPr>
           <a:xfrm>
-            <a:off x="1097280" y="4116241"/>
+            <a:off x="1097280" y="4426040"/>
             <a:ext cx="4815687" cy="228600"/>
           </a:xfrm>
           <a:prstGeom prst="rect">
@@ -7201,7 +7053,7 @@
         </p:nvSpPr>
         <p:spPr>
           <a:xfrm>
-            <a:off x="1097280" y="4335697"/>
+            <a:off x="1097280" y="4645496"/>
             <a:ext cx="4632807" cy="481909"/>
           </a:xfrm>
           <a:prstGeom prst="rect">
@@ -7241,7 +7093,7 @@
         </p:nvSpPr>
         <p:spPr>
           <a:xfrm>
-            <a:off x="6187287" y="3058281"/>
+            <a:off x="6187287" y="3368080"/>
             <a:ext cx="5181447" cy="2292887"/>
           </a:xfrm>
           <a:prstGeom prst="roundRect">
@@ -7273,7 +7125,7 @@
         </p:nvSpPr>
         <p:spPr>
           <a:xfrm>
-            <a:off x="6370167" y="3195441"/>
+            <a:off x="6370167" y="3505240"/>
             <a:ext cx="4815687" cy="774496"/>
           </a:xfrm>
           <a:prstGeom prst="rect">
@@ -7313,7 +7165,7 @@
         </p:nvSpPr>
         <p:spPr>
           <a:xfrm>
-            <a:off x="6370167" y="4061377"/>
+            <a:off x="6370167" y="4371176"/>
             <a:ext cx="4815687" cy="1106911"/>
           </a:xfrm>
           <a:prstGeom prst="roundRect">
@@ -7343,7 +7195,7 @@
         </p:nvSpPr>
         <p:spPr>
           <a:xfrm>
-            <a:off x="6461607" y="4116241"/>
+            <a:off x="6461607" y="4426040"/>
             <a:ext cx="4815687" cy="228600"/>
           </a:xfrm>
           <a:prstGeom prst="rect">
@@ -7380,7 +7232,7 @@
         </p:nvSpPr>
         <p:spPr>
           <a:xfrm>
-            <a:off x="6461607" y="4335697"/>
+            <a:off x="6461607" y="4645496"/>
             <a:ext cx="4632807" cy="722863"/>
           </a:xfrm>
           <a:prstGeom prst="rect">
@@ -7550,7 +7402,7 @@
                 </a:solidFill>
                 <a:latin typeface="Inter"/>
               </a:rPr>
-              <a:t>The four claims, and what the data supports (2/2)</a:t>
+              <a:t>Each claim, and what the data supports (2/2)</a:t>
             </a:r>
           </a:p>
         </p:txBody>
@@ -7564,7 +7416,7 @@
         <p:spPr>
           <a:xfrm>
             <a:off x="822960" y="2519883"/>
-            <a:ext cx="10545775" cy="309798"/>
+            <a:ext cx="10545775" cy="619597"/>
           </a:xfrm>
           <a:prstGeom prst="rect">
             <a:avLst/>
@@ -7590,7 +7442,7 @@
                 </a:solidFill>
                 <a:latin typeface="Inter"/>
               </a:rPr>
-              <a:t>Nobody was watched using Git, so the data cannot answer the paper’s title.</a:t>
+              <a:t>Nobody was watched using Git. So the data cannot answer the question in the paper’s title: do developers know how to use Git commands?</a:t>
             </a:r>
           </a:p>
         </p:txBody>
@@ -7603,7 +7455,7 @@
         </p:nvSpPr>
         <p:spPr>
           <a:xfrm>
-            <a:off x="822960" y="3058281"/>
+            <a:off x="822960" y="3368080"/>
             <a:ext cx="5181447" cy="2310099"/>
           </a:xfrm>
           <a:prstGeom prst="roundRect">
@@ -7635,7 +7487,7 @@
         </p:nvSpPr>
         <p:spPr>
           <a:xfrm>
-            <a:off x="1005840" y="3195441"/>
+            <a:off x="1005840" y="3505240"/>
             <a:ext cx="4815687" cy="258165"/>
           </a:xfrm>
           <a:prstGeom prst="rect">
@@ -7675,7 +7527,7 @@
         </p:nvSpPr>
         <p:spPr>
           <a:xfrm>
-            <a:off x="1005840" y="3545046"/>
+            <a:off x="1005840" y="3854845"/>
             <a:ext cx="4815687" cy="865957"/>
           </a:xfrm>
           <a:prstGeom prst="roundRect">
@@ -7705,7 +7557,7 @@
         </p:nvSpPr>
         <p:spPr>
           <a:xfrm>
-            <a:off x="1097280" y="3599910"/>
+            <a:off x="1097280" y="3909709"/>
             <a:ext cx="4815687" cy="228600"/>
           </a:xfrm>
           <a:prstGeom prst="rect">
@@ -7742,7 +7594,7 @@
         </p:nvSpPr>
         <p:spPr>
           <a:xfrm>
-            <a:off x="1097280" y="3819366"/>
+            <a:off x="1097280" y="4129165"/>
             <a:ext cx="4632807" cy="481909"/>
           </a:xfrm>
           <a:prstGeom prst="rect">
@@ -7782,7 +7634,7 @@
         </p:nvSpPr>
         <p:spPr>
           <a:xfrm>
-            <a:off x="6187287" y="3058281"/>
+            <a:off x="6187287" y="3368080"/>
             <a:ext cx="5181447" cy="2310099"/>
           </a:xfrm>
           <a:prstGeom prst="roundRect">
@@ -7814,7 +7666,7 @@
         </p:nvSpPr>
         <p:spPr>
           <a:xfrm>
-            <a:off x="6370167" y="3195441"/>
+            <a:off x="6370167" y="3505240"/>
             <a:ext cx="4815687" cy="1032662"/>
           </a:xfrm>
           <a:prstGeom prst="rect">
@@ -7854,7 +7706,7 @@
         </p:nvSpPr>
         <p:spPr>
           <a:xfrm>
-            <a:off x="6370167" y="4319543"/>
+            <a:off x="6370167" y="4629342"/>
             <a:ext cx="4815687" cy="865957"/>
           </a:xfrm>
           <a:prstGeom prst="roundRect">
@@ -7884,7 +7736,7 @@
         </p:nvSpPr>
         <p:spPr>
           <a:xfrm>
-            <a:off x="6461607" y="4374407"/>
+            <a:off x="6461607" y="4684206"/>
             <a:ext cx="4815687" cy="228600"/>
           </a:xfrm>
           <a:prstGeom prst="rect">
@@ -7921,7 +7773,7 @@
         </p:nvSpPr>
         <p:spPr>
           <a:xfrm>
-            <a:off x="6461607" y="4593863"/>
+            <a:off x="6461607" y="4903662"/>
             <a:ext cx="4632807" cy="481909"/>
           </a:xfrm>
           <a:prstGeom prst="rect">
@@ -8146,7 +7998,7 @@
         <p:spPr>
           <a:xfrm>
             <a:off x="822960" y="1831441"/>
-            <a:ext cx="8647535" cy="746596"/>
+            <a:ext cx="8647535" cy="1056395"/>
           </a:xfrm>
           <a:prstGeom prst="rect">
             <a:avLst/>
@@ -8172,7 +8024,61 @@
                 </a:solidFill>
                 <a:latin typeface="Inter"/>
               </a:rPr>
-              <a:t>The most-viewed Git question asks how to undo the last commit.</a:t>
+              <a:t>Git has </a:t>
+            </a:r>
+            <a:r>
+              <a:rPr sz="1800" b="0" i="0">
+                <a:solidFill>
+                  <a:srgbClr val="111111"/>
+                </a:solidFill>
+                <a:latin typeface="Noto Sans Mono"/>
+              </a:rPr>
+              <a:t>reset</a:t>
+            </a:r>
+            <a:r>
+              <a:rPr sz="1800" b="0" i="0">
+                <a:solidFill>
+                  <a:srgbClr val="111111"/>
+                </a:solidFill>
+                <a:latin typeface="Inter"/>
+              </a:rPr>
+              <a:t>, </a:t>
+            </a:r>
+            <a:r>
+              <a:rPr sz="1800" b="0" i="0">
+                <a:solidFill>
+                  <a:srgbClr val="111111"/>
+                </a:solidFill>
+                <a:latin typeface="Noto Sans Mono"/>
+              </a:rPr>
+              <a:t>revert</a:t>
+            </a:r>
+            <a:r>
+              <a:rPr sz="1800" b="0" i="0">
+                <a:solidFill>
+                  <a:srgbClr val="111111"/>
+                </a:solidFill>
+                <a:latin typeface="Inter"/>
+              </a:rPr>
+              <a:t> and </a:t>
+            </a:r>
+            <a:r>
+              <a:rPr sz="1800" b="0" i="0">
+                <a:solidFill>
+                  <a:srgbClr val="111111"/>
+                </a:solidFill>
+                <a:latin typeface="Noto Sans Mono"/>
+              </a:rPr>
+              <a:t>reflog</a:t>
+            </a:r>
+            <a:r>
+              <a:rPr sz="1800" b="0" i="0">
+                <a:solidFill>
+                  <a:srgbClr val="111111"/>
+                </a:solidFill>
+                <a:latin typeface="Inter"/>
+              </a:rPr>
+              <a:t>. Still, the most-viewed Git question is how to undo the last commit.</a:t>
             </a:r>
           </a:p>
           <a:p>
@@ -8191,21 +8097,61 @@
                 </a:solidFill>
                 <a:latin typeface="Inter"/>
               </a:rPr>
-              <a:t>Design one change, and say how you would test whether it helps.</a:t>
-            </a:r>
-          </a:p>
-        </p:txBody>
-      </p:sp>
-      <p:sp>
-        <p:nvSpPr>
-          <p:cNvPr id="6" name="Rounded Rectangle 5"/>
+              <a:t>Design one change that would help, and say how you would test it.</a:t>
+            </a:r>
+          </a:p>
+        </p:txBody>
+      </p:sp>
+      <p:sp>
+        <p:nvSpPr>
+          <p:cNvPr id="6" name="TextBox 5"/>
+          <p:cNvSpPr txBox="1"/>
+          <p:nvPr/>
+        </p:nvSpPr>
+        <p:spPr>
+          <a:xfrm>
+            <a:off x="822960" y="3116436"/>
+            <a:ext cx="10545775" cy="223743"/>
+          </a:xfrm>
+          <a:prstGeom prst="rect">
+            <a:avLst/>
+          </a:prstGeom>
+          <a:noFill/>
+        </p:spPr>
+        <p:txBody>
+          <a:bodyPr wrap="square" anchor="t" lIns="0" rIns="0" tIns="0" bIns="0"/>
+          <a:lstStyle/>
+          <a:p>
+            <a:pPr algn="l">
+              <a:lnSpc>
+                <a:spcPct val="112000"/>
+              </a:lnSpc>
+              <a:spcBef>
+                <a:spcPts val="0"/>
+              </a:spcBef>
+            </a:pPr>
+            <a:r>
+              <a:rPr sz="1300" b="0" i="0">
+                <a:solidFill>
+                  <a:srgbClr val="707078"/>
+                </a:solidFill>
+                <a:latin typeface="Inter"/>
+              </a:rPr>
+              <a:t>An example, for a different problem. The problem: people ask what “detached HEAD” means.</a:t>
+            </a:r>
+          </a:p>
+        </p:txBody>
+      </p:sp>
+      <p:sp>
+        <p:nvSpPr>
+          <p:cNvPr id="7" name="Rounded Rectangle 6"/>
           <p:cNvSpPr/>
           <p:nvPr/>
         </p:nvSpPr>
         <p:spPr>
           <a:xfrm>
-            <a:off x="822960" y="2806637"/>
-            <a:ext cx="2499283" cy="1680788"/>
+            <a:off x="822960" y="3431619"/>
+            <a:ext cx="2499283" cy="2403651"/>
           </a:xfrm>
           <a:prstGeom prst="roundRect">
             <a:avLst>
@@ -8230,14 +8176,14 @@
       </p:sp>
       <p:sp>
         <p:nvSpPr>
-          <p:cNvPr id="7" name="TextBox 6"/>
-          <p:cNvSpPr txBox="1"/>
-          <p:nvPr/>
-        </p:nvSpPr>
-        <p:spPr>
-          <a:xfrm>
-            <a:off x="1005840" y="2943797"/>
-            <a:ext cx="2133523" cy="378642"/>
+          <p:cNvPr id="8" name="TextBox 7"/>
+          <p:cNvSpPr txBox="1"/>
+          <p:nvPr/>
+        </p:nvSpPr>
+        <p:spPr>
+          <a:xfrm>
+            <a:off x="1005840" y="3568779"/>
+            <a:ext cx="2133523" cy="189321"/>
           </a:xfrm>
           <a:prstGeom prst="rect">
             <a:avLst/>
@@ -8260,21 +8206,21 @@
                 </a:solidFill>
                 <a:latin typeface="Inter"/>
               </a:rPr>
-              <a:t>YOUR CHANGE: WHAT WOULD THE USER SEE OR TYPE?</a:t>
-            </a:r>
-          </a:p>
-        </p:txBody>
-      </p:sp>
-      <p:sp>
-        <p:nvSpPr>
-          <p:cNvPr id="8" name="TextBox 7"/>
-          <p:cNvSpPr txBox="1"/>
-          <p:nvPr/>
-        </p:nvSpPr>
-        <p:spPr>
-          <a:xfrm>
-            <a:off x="1005840" y="3340727"/>
-            <a:ext cx="2133523" cy="722863"/>
+              <a:t>THE CHANGE</a:t>
+            </a:r>
+          </a:p>
+        </p:txBody>
+      </p:sp>
+      <p:sp>
+        <p:nvSpPr>
+          <p:cNvPr id="9" name="TextBox 8"/>
+          <p:cNvSpPr txBox="1"/>
+          <p:nvPr/>
+        </p:nvSpPr>
+        <p:spPr>
+          <a:xfrm>
+            <a:off x="1005840" y="3776388"/>
+            <a:ext cx="2133523" cy="1445727"/>
           </a:xfrm>
           <a:prstGeom prst="rect">
             <a:avLst/>
@@ -8300,21 +8246,21 @@
                 </a:solidFill>
                 <a:latin typeface="Inter"/>
               </a:rPr>
-              <a:t>For example: a command that undoes the last thing Git did.</a:t>
-            </a:r>
-          </a:p>
-        </p:txBody>
-      </p:sp>
-      <p:sp>
-        <p:nvSpPr>
-          <p:cNvPr id="9" name="Rounded Rectangle 8"/>
+              <a:t>Replace the long “detached HEAD” notice with two lines: what just happened, and the one command that puts you back on a branch.</a:t>
+            </a:r>
+          </a:p>
+        </p:txBody>
+      </p:sp>
+      <p:sp>
+        <p:nvSpPr>
+          <p:cNvPr id="10" name="Rounded Rectangle 9"/>
           <p:cNvSpPr/>
           <p:nvPr/>
         </p:nvSpPr>
         <p:spPr>
           <a:xfrm>
-            <a:off x="3505123" y="2806637"/>
-            <a:ext cx="2499283" cy="1680788"/>
+            <a:off x="3505123" y="3431619"/>
+            <a:ext cx="2499283" cy="2403651"/>
           </a:xfrm>
           <a:prstGeom prst="roundRect">
             <a:avLst>
@@ -8339,14 +8285,14 @@
       </p:sp>
       <p:sp>
         <p:nvSpPr>
-          <p:cNvPr id="10" name="TextBox 9"/>
-          <p:cNvSpPr txBox="1"/>
-          <p:nvPr/>
-        </p:nvSpPr>
-        <p:spPr>
-          <a:xfrm>
-            <a:off x="3688003" y="2943797"/>
-            <a:ext cx="2133523" cy="378642"/>
+          <p:cNvPr id="11" name="TextBox 10"/>
+          <p:cNvSpPr txBox="1"/>
+          <p:nvPr/>
+        </p:nvSpPr>
+        <p:spPr>
+          <a:xfrm>
+            <a:off x="3688003" y="3568779"/>
+            <a:ext cx="2133523" cy="189321"/>
           </a:xfrm>
           <a:prstGeom prst="rect">
             <a:avLst/>
@@ -8369,21 +8315,21 @@
                 </a:solidFill>
                 <a:latin typeface="Inter"/>
               </a:rPr>
-              <a:t>YOUR TEST: WHO WOULD TRY IT, DOING WHAT TASK?</a:t>
-            </a:r>
-          </a:p>
-        </p:txBody>
-      </p:sp>
-      <p:sp>
-        <p:nvSpPr>
-          <p:cNvPr id="11" name="TextBox 10"/>
-          <p:cNvSpPr txBox="1"/>
-          <p:nvPr/>
-        </p:nvSpPr>
-        <p:spPr>
-          <a:xfrm>
-            <a:off x="3688003" y="3340727"/>
-            <a:ext cx="2133523" cy="963818"/>
+              <a:t>WHO TRIES IT, DOING WHAT</a:t>
+            </a:r>
+          </a:p>
+        </p:txBody>
+      </p:sp>
+      <p:sp>
+        <p:nvSpPr>
+          <p:cNvPr id="12" name="TextBox 11"/>
+          <p:cNvSpPr txBox="1"/>
+          <p:nvPr/>
+        </p:nvSpPr>
+        <p:spPr>
+          <a:xfrm>
+            <a:off x="3688003" y="3776388"/>
+            <a:ext cx="2133523" cy="1445727"/>
           </a:xfrm>
           <a:prstGeom prst="rect">
             <a:avLst/>
@@ -8409,21 +8355,21 @@
                 </a:solidFill>
                 <a:latin typeface="Inter"/>
               </a:rPr>
-              <a:t>For example: 20 students who just made a bad commit, half with the change.</a:t>
-            </a:r>
-          </a:p>
-        </p:txBody>
-      </p:sp>
-      <p:sp>
-        <p:nvSpPr>
-          <p:cNvPr id="12" name="Rounded Rectangle 11"/>
+              <a:t>20 students check out a tag, then are asked to make a commit on a branch. Half see the new message, half the old one.</a:t>
+            </a:r>
+          </a:p>
+        </p:txBody>
+      </p:sp>
+      <p:sp>
+        <p:nvSpPr>
+          <p:cNvPr id="13" name="Rounded Rectangle 12"/>
           <p:cNvSpPr/>
           <p:nvPr/>
         </p:nvSpPr>
         <p:spPr>
           <a:xfrm>
-            <a:off x="6187286" y="2806637"/>
-            <a:ext cx="2499283" cy="1680788"/>
+            <a:off x="6187286" y="3431619"/>
+            <a:ext cx="2499283" cy="2403651"/>
           </a:xfrm>
           <a:prstGeom prst="roundRect">
             <a:avLst>
@@ -8448,14 +8394,14 @@
       </p:sp>
       <p:sp>
         <p:nvSpPr>
-          <p:cNvPr id="13" name="TextBox 12"/>
-          <p:cNvSpPr txBox="1"/>
-          <p:nvPr/>
-        </p:nvSpPr>
-        <p:spPr>
-          <a:xfrm>
-            <a:off x="6370166" y="2943797"/>
-            <a:ext cx="2133523" cy="567964"/>
+          <p:cNvPr id="14" name="TextBox 13"/>
+          <p:cNvSpPr txBox="1"/>
+          <p:nvPr/>
+        </p:nvSpPr>
+        <p:spPr>
+          <a:xfrm>
+            <a:off x="6370166" y="3568779"/>
+            <a:ext cx="2133523" cy="378642"/>
           </a:xfrm>
           <a:prstGeom prst="rect">
             <a:avLst/>
@@ -8478,21 +8424,21 @@
                 </a:solidFill>
                 <a:latin typeface="Inter"/>
               </a:rPr>
-              <a:t>WHAT WOULD YOU MEASURE, AND WHAT COULD FOOL YOU?</a:t>
-            </a:r>
-          </a:p>
-        </p:txBody>
-      </p:sp>
-      <p:sp>
-        <p:nvSpPr>
-          <p:cNvPr id="14" name="TextBox 13"/>
-          <p:cNvSpPr txBox="1"/>
-          <p:nvPr/>
-        </p:nvSpPr>
-        <p:spPr>
-          <a:xfrm>
-            <a:off x="6370166" y="3530049"/>
-            <a:ext cx="2133523" cy="722863"/>
+              <a:t>MEASURE, AND WHAT COULD FOOL YOU</a:t>
+            </a:r>
+          </a:p>
+        </p:txBody>
+      </p:sp>
+      <p:sp>
+        <p:nvSpPr>
+          <p:cNvPr id="15" name="TextBox 14"/>
+          <p:cNvSpPr txBox="1"/>
+          <p:nvPr/>
+        </p:nvSpPr>
+        <p:spPr>
+          <a:xfrm>
+            <a:off x="6370166" y="3965709"/>
+            <a:ext cx="2133523" cy="1686681"/>
           </a:xfrm>
           <a:prstGeom prst="rect">
             <a:avLst/>
@@ -8518,21 +8464,21 @@
                 </a:solidFill>
                 <a:latin typeface="Inter"/>
               </a:rPr>
-              <a:t>For example: time to recover; people get faster on the second try.</a:t>
-            </a:r>
-          </a:p>
-        </p:txBody>
-      </p:sp>
-      <p:sp>
-        <p:nvSpPr>
-          <p:cNvPr id="15" name="Rounded Rectangle 14"/>
+              <a:t>How many are back on a branch within five minutes. What could fool you: students who already knew the fix, if most of them land in one half.</a:t>
+            </a:r>
+          </a:p>
+        </p:txBody>
+      </p:sp>
+      <p:sp>
+        <p:nvSpPr>
+          <p:cNvPr id="16" name="Rounded Rectangle 15"/>
           <p:cNvSpPr/>
           <p:nvPr/>
         </p:nvSpPr>
         <p:spPr>
           <a:xfrm>
-            <a:off x="8869449" y="2806637"/>
-            <a:ext cx="2499283" cy="1680788"/>
+            <a:off x="8869449" y="3431619"/>
+            <a:ext cx="2499283" cy="2403651"/>
           </a:xfrm>
           <a:prstGeom prst="roundRect">
             <a:avLst>
@@ -8557,14 +8503,14 @@
       </p:sp>
       <p:sp>
         <p:nvSpPr>
-          <p:cNvPr id="16" name="TextBox 15"/>
-          <p:cNvSpPr txBox="1"/>
-          <p:nvPr/>
-        </p:nvSpPr>
-        <p:spPr>
-          <a:xfrm>
-            <a:off x="9052329" y="2943797"/>
-            <a:ext cx="2133523" cy="567964"/>
+          <p:cNvPr id="17" name="TextBox 16"/>
+          <p:cNvSpPr txBox="1"/>
+          <p:nvPr/>
+        </p:nvSpPr>
+        <p:spPr>
+          <a:xfrm>
+            <a:off x="9052329" y="3568779"/>
+            <a:ext cx="2133523" cy="189321"/>
           </a:xfrm>
           <a:prstGeom prst="rect">
             <a:avLst/>
@@ -8587,20 +8533,20 @@
                 </a:solidFill>
                 <a:latin typeface="Inter"/>
               </a:rPr>
-              <a:t>HOW WOULD YOU GET THE DATA: WATCH PEOPLE, LOG REAL USE, OR ASK THEM?</a:t>
-            </a:r>
-          </a:p>
-        </p:txBody>
-      </p:sp>
-      <p:sp>
-        <p:nvSpPr>
-          <p:cNvPr id="17" name="TextBox 16"/>
-          <p:cNvSpPr txBox="1"/>
-          <p:nvPr/>
-        </p:nvSpPr>
-        <p:spPr>
-          <a:xfrm>
-            <a:off x="9052329" y="3530049"/>
+              <a:t>HOW YOU GET THE DATA</a:t>
+            </a:r>
+          </a:p>
+        </p:txBody>
+      </p:sp>
+      <p:sp>
+        <p:nvSpPr>
+          <p:cNvPr id="18" name="TextBox 17"/>
+          <p:cNvSpPr txBox="1"/>
+          <p:nvPr/>
+        </p:nvSpPr>
+        <p:spPr>
+          <a:xfrm>
+            <a:off x="9052329" y="3776388"/>
             <a:ext cx="2133523" cy="481909"/>
           </a:xfrm>
           <a:prstGeom prst="rect">
@@ -8627,7 +8573,7 @@
                 </a:solidFill>
                 <a:latin typeface="Inter"/>
               </a:rPr>
-              <a:t>For example: screen recordings of the task.</a:t>
+              <a:t>Watch them do it, with the screen recorded.</a:t>
             </a:r>
           </a:p>
         </p:txBody>
@@ -8744,6 +8690,46 @@
         <p:spPr>
           <a:xfrm>
             <a:off x="822960" y="1831441"/>
+            <a:ext cx="8647535" cy="378642"/>
+          </a:xfrm>
+          <a:prstGeom prst="rect">
+            <a:avLst/>
+          </a:prstGeom>
+          <a:noFill/>
+        </p:spPr>
+        <p:txBody>
+          <a:bodyPr wrap="square" anchor="t" lIns="0" rIns="0" tIns="0" bIns="0"/>
+          <a:lstStyle/>
+          <a:p>
+            <a:pPr algn="l">
+              <a:lnSpc>
+                <a:spcPct val="112000"/>
+              </a:lnSpc>
+              <a:spcBef>
+                <a:spcPts val="0"/>
+              </a:spcBef>
+            </a:pPr>
+            <a:r>
+              <a:rPr sz="2200" b="0" i="0">
+                <a:solidFill>
+                  <a:srgbClr val="111111"/>
+                </a:solidFill>
+                <a:latin typeface="Inter"/>
+              </a:rPr>
+              <a:t>Each group reads out its change and its test.</a:t>
+            </a:r>
+          </a:p>
+        </p:txBody>
+      </p:sp>
+      <p:sp>
+        <p:nvSpPr>
+          <p:cNvPr id="5" name="TextBox 4"/>
+          <p:cNvSpPr txBox="1"/>
+          <p:nvPr/>
+        </p:nvSpPr>
+        <p:spPr>
+          <a:xfrm>
+            <a:off x="822960" y="2438683"/>
             <a:ext cx="8647535" cy="757285"/>
           </a:xfrm>
           <a:prstGeom prst="rect">
@@ -8777,7 +8763,7 @@
       </p:sp>
       <p:sp>
         <p:nvSpPr>
-          <p:cNvPr id="5" name="TextBox 4"/>
+          <p:cNvPr id="6" name="TextBox 5"/>
           <p:cNvSpPr txBox="1"/>
           <p:nvPr/>
         </p:nvSpPr>
@@ -9182,7 +9168,7 @@
                 </a:solidFill>
                 <a:latin typeface="Inter"/>
               </a:rPr>
-              <a:t>✗ The hardness ranking counts a command in the fix as the problem.</a:t>
+              <a:t>✗ The “hardest commands” ranking counts a command named in the fix as if it were the problem.</a:t>
             </a:r>
           </a:p>
           <a:p>
@@ -9238,7 +9224,7 @@
                 </a:solidFill>
                 <a:latin typeface="Inter"/>
               </a:rPr>
-              <a:t>✗ That developers learn on their own was asked of people found on Stack Overflow.</a:t>
+              <a:t>✗ “Developers learn on their own” comes from 92 people, found mostly through Stack Overflow.</a:t>
             </a:r>
           </a:p>
           <a:p>
@@ -10064,7 +10050,7 @@
                 </a:solidFill>
                 <a:latin typeface="Inter"/>
               </a:rPr>
-              <a:t>2. What is your professional area?</a:t>
+              <a:t>1. What is your professional area?</a:t>
             </a:r>
           </a:p>
           <a:p>
@@ -10083,7 +10069,7 @@
                 </a:solidFill>
                 <a:latin typeface="Inter"/>
               </a:rPr>
-              <a:t>3. What is your highest degree?</a:t>
+              <a:t>2. What is your highest degree?</a:t>
             </a:r>
           </a:p>
           <a:p>
@@ -10102,7 +10088,7 @@
                 </a:solidFill>
                 <a:latin typeface="Inter"/>
               </a:rPr>
-              <a:t>4. How many years have you been using Git?</a:t>
+              <a:t>3. How many years have you been using Git?</a:t>
             </a:r>
           </a:p>
           <a:p>
@@ -10121,7 +10107,7 @@
                 </a:solidFill>
                 <a:latin typeface="Inter"/>
               </a:rPr>
-              <a:t>5. Which of the following levels do you consider your ability to use Git to be?</a:t>
+              <a:t>4. Which of the following levels do you consider your ability to use Git to be?</a:t>
             </a:r>
           </a:p>
           <a:p>
@@ -10140,7 +10126,7 @@
                 </a:solidFill>
                 <a:latin typeface="Inter"/>
               </a:rPr>
-              <a:t>6. What are the main approaches you used to learn Git commands?</a:t>
+              <a:t>5. What are the main approaches you used to learn Git commands?</a:t>
             </a:r>
           </a:p>
           <a:p>
@@ -10159,7 +10145,7 @@
                 </a:solidFill>
                 <a:latin typeface="Inter"/>
               </a:rPr>
-              <a:t>7. Do you have any suggestions for potential new developers on learning Git commands</a:t>
+              <a:t>6. Do you have any suggestions for potential new developers on learning Git commands</a:t>
             </a:r>
           </a:p>
         </p:txBody>
@@ -10199,7 +10185,7 @@
                 </a:solidFill>
                 <a:latin typeface="Inter"/>
               </a:rPr>
-              <a:t>Q1 of the form, the donation choice, is left out.</a:t>
+              <a:t>These are Q2 to Q7 of the authors’ form; its Q1, a donation choice, is left out.</a:t>
             </a:r>
           </a:p>
         </p:txBody>
